--- a/slides/12-ml-methods_and_experiment.pptx
+++ b/slides/12-ml-methods_and_experiment.pptx
@@ -2,52 +2,52 @@
 <file path=ppt/presentation.xml><?xml version="1.0" encoding="utf-8"?>
 <p:presentation xmlns:p="http://schemas.openxmlformats.org/presentationml/2006/main">
   <p:sldMasterIdLst>
-    <p:sldMasterId xmlns:r="http://schemas.openxmlformats.org/officeDocument/2006/relationships" id="2147483648" r:id="Rb39db56535f64958"/>
+    <p:sldMasterId xmlns:r="http://schemas.openxmlformats.org/officeDocument/2006/relationships" id="2147483648" r:id="Reed790cb256145d8"/>
   </p:sldMasterIdLst>
   <p:notesMasterIdLst>
-    <p:notesMasterId xmlns:r="http://schemas.openxmlformats.org/officeDocument/2006/relationships" r:id="Rc3b1a3bc0b17464e"/>
+    <p:notesMasterId xmlns:r="http://schemas.openxmlformats.org/officeDocument/2006/relationships" r:id="R0691f8d025d04efd"/>
   </p:notesMasterIdLst>
   <p:sldIdLst>
-    <p:sldId xmlns:r="http://schemas.openxmlformats.org/officeDocument/2006/relationships" id="256" r:id="Rb84052d678914a3b"/>
-    <p:sldId xmlns:r="http://schemas.openxmlformats.org/officeDocument/2006/relationships" id="257" r:id="Re17866d54e174c30"/>
-    <p:sldId xmlns:r="http://schemas.openxmlformats.org/officeDocument/2006/relationships" id="258" r:id="R1c1c9e9ee8bf4950"/>
-    <p:sldId xmlns:r="http://schemas.openxmlformats.org/officeDocument/2006/relationships" id="259" r:id="R0baa31646469420c"/>
-    <p:sldId xmlns:r="http://schemas.openxmlformats.org/officeDocument/2006/relationships" id="260" r:id="R9a882a748c7b442b"/>
-    <p:sldId xmlns:r="http://schemas.openxmlformats.org/officeDocument/2006/relationships" id="261" r:id="R747896084aa24546"/>
-    <p:sldId xmlns:r="http://schemas.openxmlformats.org/officeDocument/2006/relationships" id="262" r:id="Rcd2a6659ce444671"/>
-    <p:sldId xmlns:r="http://schemas.openxmlformats.org/officeDocument/2006/relationships" id="263" r:id="R91ee489702dc4e06"/>
-    <p:sldId xmlns:r="http://schemas.openxmlformats.org/officeDocument/2006/relationships" id="264" r:id="Rd79fd48484e64371"/>
-    <p:sldId xmlns:r="http://schemas.openxmlformats.org/officeDocument/2006/relationships" id="265" r:id="Raf2dafb018e34c69"/>
-    <p:sldId xmlns:r="http://schemas.openxmlformats.org/officeDocument/2006/relationships" id="266" r:id="Rec383123fb134c7b"/>
-    <p:sldId xmlns:r="http://schemas.openxmlformats.org/officeDocument/2006/relationships" id="267" r:id="Rbe39367fb1f84814"/>
-    <p:sldId xmlns:r="http://schemas.openxmlformats.org/officeDocument/2006/relationships" id="268" r:id="Rcba157f8fec34d6e"/>
-    <p:sldId xmlns:r="http://schemas.openxmlformats.org/officeDocument/2006/relationships" id="269" r:id="Raf758160daec4fdf"/>
-    <p:sldId xmlns:r="http://schemas.openxmlformats.org/officeDocument/2006/relationships" id="270" r:id="R2671dd2221ae4ea4"/>
-    <p:sldId xmlns:r="http://schemas.openxmlformats.org/officeDocument/2006/relationships" id="271" r:id="R286265ae3dee4c63"/>
-    <p:sldId xmlns:r="http://schemas.openxmlformats.org/officeDocument/2006/relationships" id="272" r:id="Rfa38ed9254c1442d"/>
-    <p:sldId xmlns:r="http://schemas.openxmlformats.org/officeDocument/2006/relationships" id="273" r:id="R610d9081a8cc434f"/>
-    <p:sldId xmlns:r="http://schemas.openxmlformats.org/officeDocument/2006/relationships" id="274" r:id="Rc197a32d76d34fdf"/>
-    <p:sldId xmlns:r="http://schemas.openxmlformats.org/officeDocument/2006/relationships" id="275" r:id="R4e8766b7331b4c42"/>
-    <p:sldId xmlns:r="http://schemas.openxmlformats.org/officeDocument/2006/relationships" id="276" r:id="Rb3d4a2d4d0614d92"/>
-    <p:sldId xmlns:r="http://schemas.openxmlformats.org/officeDocument/2006/relationships" id="277" r:id="R37639fc2698a481d"/>
-    <p:sldId xmlns:r="http://schemas.openxmlformats.org/officeDocument/2006/relationships" id="278" r:id="R820b3a84cb1e4872"/>
-    <p:sldId xmlns:r="http://schemas.openxmlformats.org/officeDocument/2006/relationships" id="279" r:id="R217c23b57b144e83"/>
-    <p:sldId xmlns:r="http://schemas.openxmlformats.org/officeDocument/2006/relationships" id="280" r:id="Ra436d49edf6041c3"/>
-    <p:sldId xmlns:r="http://schemas.openxmlformats.org/officeDocument/2006/relationships" id="281" r:id="R144b62c6aa974cf0"/>
-    <p:sldId xmlns:r="http://schemas.openxmlformats.org/officeDocument/2006/relationships" id="282" r:id="Raaf8512284034d0d"/>
-    <p:sldId xmlns:r="http://schemas.openxmlformats.org/officeDocument/2006/relationships" id="283" r:id="R488ad412b6e1447f"/>
-    <p:sldId xmlns:r="http://schemas.openxmlformats.org/officeDocument/2006/relationships" id="284" r:id="R99c449e250524277"/>
-    <p:sldId xmlns:r="http://schemas.openxmlformats.org/officeDocument/2006/relationships" id="285" r:id="Ra9da022a3d364e6c"/>
-    <p:sldId xmlns:r="http://schemas.openxmlformats.org/officeDocument/2006/relationships" id="286" r:id="R2e75d5271faa421d"/>
-    <p:sldId xmlns:r="http://schemas.openxmlformats.org/officeDocument/2006/relationships" id="287" r:id="Re3a3d9a5ce774bc0"/>
-    <p:sldId xmlns:r="http://schemas.openxmlformats.org/officeDocument/2006/relationships" id="288" r:id="Rb320bda52f2a4e04"/>
-    <p:sldId xmlns:r="http://schemas.openxmlformats.org/officeDocument/2006/relationships" id="289" r:id="R2b605b8cf6f441ac"/>
-    <p:sldId xmlns:r="http://schemas.openxmlformats.org/officeDocument/2006/relationships" id="290" r:id="R36ff1288cdad4761"/>
-    <p:sldId xmlns:r="http://schemas.openxmlformats.org/officeDocument/2006/relationships" id="291" r:id="R4919086dec904a75"/>
-    <p:sldId xmlns:r="http://schemas.openxmlformats.org/officeDocument/2006/relationships" id="292" r:id="R6f88b81791114cbc"/>
-    <p:sldId xmlns:r="http://schemas.openxmlformats.org/officeDocument/2006/relationships" id="293" r:id="R3a5799a59b41408c"/>
-    <p:sldId xmlns:r="http://schemas.openxmlformats.org/officeDocument/2006/relationships" id="294" r:id="R65b6339f6e434730"/>
-    <p:sldId xmlns:r="http://schemas.openxmlformats.org/officeDocument/2006/relationships" id="295" r:id="R86316e9e00da4041"/>
+    <p:sldId xmlns:r="http://schemas.openxmlformats.org/officeDocument/2006/relationships" id="256" r:id="R2a2e87fba8dc421a"/>
+    <p:sldId xmlns:r="http://schemas.openxmlformats.org/officeDocument/2006/relationships" id="257" r:id="R90603a2358d24bde"/>
+    <p:sldId xmlns:r="http://schemas.openxmlformats.org/officeDocument/2006/relationships" id="258" r:id="R73c4457fc63a4d82"/>
+    <p:sldId xmlns:r="http://schemas.openxmlformats.org/officeDocument/2006/relationships" id="259" r:id="Re791974500f24edc"/>
+    <p:sldId xmlns:r="http://schemas.openxmlformats.org/officeDocument/2006/relationships" id="260" r:id="R53aaa6f0d0c0433e"/>
+    <p:sldId xmlns:r="http://schemas.openxmlformats.org/officeDocument/2006/relationships" id="261" r:id="Rd11d48b5aa964723"/>
+    <p:sldId xmlns:r="http://schemas.openxmlformats.org/officeDocument/2006/relationships" id="262" r:id="R66eb8b31a8f9405c"/>
+    <p:sldId xmlns:r="http://schemas.openxmlformats.org/officeDocument/2006/relationships" id="263" r:id="R91c5714ccf7f4811"/>
+    <p:sldId xmlns:r="http://schemas.openxmlformats.org/officeDocument/2006/relationships" id="264" r:id="Rc2d5d5da96724373"/>
+    <p:sldId xmlns:r="http://schemas.openxmlformats.org/officeDocument/2006/relationships" id="265" r:id="Rb53f1064da764086"/>
+    <p:sldId xmlns:r="http://schemas.openxmlformats.org/officeDocument/2006/relationships" id="266" r:id="R0a6529cd86924d23"/>
+    <p:sldId xmlns:r="http://schemas.openxmlformats.org/officeDocument/2006/relationships" id="267" r:id="R2b4255b35a084372"/>
+    <p:sldId xmlns:r="http://schemas.openxmlformats.org/officeDocument/2006/relationships" id="268" r:id="R83e48d27e09f4de2"/>
+    <p:sldId xmlns:r="http://schemas.openxmlformats.org/officeDocument/2006/relationships" id="269" r:id="Rdcc93f5d8f5d4a43"/>
+    <p:sldId xmlns:r="http://schemas.openxmlformats.org/officeDocument/2006/relationships" id="270" r:id="R154a048bf7da4b63"/>
+    <p:sldId xmlns:r="http://schemas.openxmlformats.org/officeDocument/2006/relationships" id="271" r:id="R31d148c70fac4711"/>
+    <p:sldId xmlns:r="http://schemas.openxmlformats.org/officeDocument/2006/relationships" id="272" r:id="Rbe9a81c7e2ad4ee5"/>
+    <p:sldId xmlns:r="http://schemas.openxmlformats.org/officeDocument/2006/relationships" id="273" r:id="Rf469cf3c2f2f495c"/>
+    <p:sldId xmlns:r="http://schemas.openxmlformats.org/officeDocument/2006/relationships" id="274" r:id="Rd6ba85d1b2e142b2"/>
+    <p:sldId xmlns:r="http://schemas.openxmlformats.org/officeDocument/2006/relationships" id="275" r:id="R4c76c8645abf4faf"/>
+    <p:sldId xmlns:r="http://schemas.openxmlformats.org/officeDocument/2006/relationships" id="276" r:id="R30b8e2adb2f64004"/>
+    <p:sldId xmlns:r="http://schemas.openxmlformats.org/officeDocument/2006/relationships" id="277" r:id="R9ea44941c8e04200"/>
+    <p:sldId xmlns:r="http://schemas.openxmlformats.org/officeDocument/2006/relationships" id="278" r:id="Rb558a15d6ea24158"/>
+    <p:sldId xmlns:r="http://schemas.openxmlformats.org/officeDocument/2006/relationships" id="279" r:id="R81e3b20991bd4a6e"/>
+    <p:sldId xmlns:r="http://schemas.openxmlformats.org/officeDocument/2006/relationships" id="280" r:id="R46a0d3660c494edc"/>
+    <p:sldId xmlns:r="http://schemas.openxmlformats.org/officeDocument/2006/relationships" id="281" r:id="Re1c4b1140c004662"/>
+    <p:sldId xmlns:r="http://schemas.openxmlformats.org/officeDocument/2006/relationships" id="282" r:id="Rf283f40fd8564045"/>
+    <p:sldId xmlns:r="http://schemas.openxmlformats.org/officeDocument/2006/relationships" id="283" r:id="Rab4c5f6894ce460d"/>
+    <p:sldId xmlns:r="http://schemas.openxmlformats.org/officeDocument/2006/relationships" id="284" r:id="R7762def818ed4b8b"/>
+    <p:sldId xmlns:r="http://schemas.openxmlformats.org/officeDocument/2006/relationships" id="285" r:id="Rf784708f72964e7f"/>
+    <p:sldId xmlns:r="http://schemas.openxmlformats.org/officeDocument/2006/relationships" id="286" r:id="R5951faee087c4d96"/>
+    <p:sldId xmlns:r="http://schemas.openxmlformats.org/officeDocument/2006/relationships" id="287" r:id="R6c482599ebe74eac"/>
+    <p:sldId xmlns:r="http://schemas.openxmlformats.org/officeDocument/2006/relationships" id="288" r:id="R678997e01e494eac"/>
+    <p:sldId xmlns:r="http://schemas.openxmlformats.org/officeDocument/2006/relationships" id="289" r:id="Rffcfa9217512428a"/>
+    <p:sldId xmlns:r="http://schemas.openxmlformats.org/officeDocument/2006/relationships" id="290" r:id="R87fb6f732bc449d7"/>
+    <p:sldId xmlns:r="http://schemas.openxmlformats.org/officeDocument/2006/relationships" id="291" r:id="Ra2cd64c0e9d24087"/>
+    <p:sldId xmlns:r="http://schemas.openxmlformats.org/officeDocument/2006/relationships" id="292" r:id="R5b970584a1c1459f"/>
+    <p:sldId xmlns:r="http://schemas.openxmlformats.org/officeDocument/2006/relationships" id="293" r:id="Ra104539377b545df"/>
+    <p:sldId xmlns:r="http://schemas.openxmlformats.org/officeDocument/2006/relationships" id="294" r:id="Ra55c1241b194431d"/>
+    <p:sldId xmlns:r="http://schemas.openxmlformats.org/officeDocument/2006/relationships" id="295" r:id="Rabdbade4bc724f42"/>
   </p:sldIdLst>
   <p:sldSz cx="12192000" cy="6858000"/>
   <p:notesSz cx="6858000" cy="9144000"/>
@@ -1241,52 +1241,7 @@
           <a:lstStyle xmlns:a="http://schemas.openxmlformats.org/drawingml/2006/main"/>
           <a:p xmlns:a="http://schemas.openxmlformats.org/drawingml/2006/main">
             <a:r>
-              <a:t>Одинаковый протокол сравнения</a:t>
-            </a:r>
-          </a:p>
-          <a:p xmlns:a="http://schemas.openxmlformats.org/drawingml/2006/main">
-            <a:r>
-              <a:t/>
-            </a:r>
-          </a:p>
-          <a:p xmlns:a="http://schemas.openxmlformats.org/drawingml/2006/main">
-            <a:r>
-              <a:t>1. Одинаковые партии и метрика для всех моделей</a:t>
-            </a:r>
-          </a:p>
-          <a:p xmlns:a="http://schemas.openxmlformats.org/drawingml/2006/main">
-            <a:r>
-              <a:t>2. Подбор настроек внутри одной схемы CV</a:t>
-            </a:r>
-          </a:p>
-          <a:p xmlns:a="http://schemas.openxmlformats.org/drawingml/2006/main">
-            <a:r>
-              <a:t>3. Финальный тест после фиксации выбора</a:t>
-            </a:r>
-          </a:p>
-          <a:p xmlns:a="http://schemas.openxmlformats.org/drawingml/2006/main">
-            <a:r>
-              <a:t/>
-            </a:r>
-          </a:p>
-          <a:p xmlns:a="http://schemas.openxmlformats.org/drawingml/2006/main">
-            <a:r>
-              <a:t>Вывод: Иначе сравнение алгоритмов подменяется сравнением разбиений</a:t>
-            </a:r>
-          </a:p>
-          <a:p xmlns:a="http://schemas.openxmlformats.org/drawingml/2006/main">
-            <a:r>
-              <a:t/>
-            </a:r>
-          </a:p>
-          <a:p xmlns:a="http://schemas.openxmlformats.org/drawingml/2006/main">
-            <a:r>
-              <a:t>Подробное объяснение, методические ограничения и код: machine_learning/12-ml-methods_and_experiment.md</a:t>
-            </a:r>
-          </a:p>
-          <a:p xmlns:a="http://schemas.openxmlformats.org/drawingml/2006/main">
-            <a:r>
-              <a:t>Справка по методам: https://scikit-learn.org/stable/user_guide.html</a:t>
+              <a:t>Лес усредняет модели, построенные в основном независимо. Бустинг добавляет деревья последовательно для исправления потерь. Bootstrap строк одной партии не создаёт физическую независимость. Источник: https://scikit-learn.org/stable/modules/ensemble.html</a:t>
             </a:r>
           </a:p>
         </p:txBody>
@@ -1356,52 +1311,7 @@
           <a:lstStyle xmlns:a="http://schemas.openxmlformats.org/drawingml/2006/main"/>
           <a:p xmlns:a="http://schemas.openxmlformats.org/drawingml/2006/main">
             <a:r>
-              <a:t>Точность по подгруппам</a:t>
-            </a:r>
-          </a:p>
-          <a:p xmlns:a="http://schemas.openxmlformats.org/drawingml/2006/main">
-            <a:r>
-              <a:t/>
-            </a:r>
-          </a:p>
-          <a:p xmlns:a="http://schemas.openxmlformats.org/drawingml/2006/main">
-            <a:r>
-              <a:t>1. Разделите ошибки по сырью и прибору</a:t>
-            </a:r>
-          </a:p>
-          <a:p xmlns:a="http://schemas.openxmlformats.org/drawingml/2006/main">
-            <a:r>
-              <a:t>2. Покажите края диапазона концентраций</a:t>
-            </a:r>
-          </a:p>
-          <a:p xmlns:a="http://schemas.openxmlformats.org/drawingml/2006/main">
-            <a:r>
-              <a:t>3. Ищите систематические смещения и промахи</a:t>
-            </a:r>
-          </a:p>
-          <a:p xmlns:a="http://schemas.openxmlformats.org/drawingml/2006/main">
-            <a:r>
-              <a:t/>
-            </a:r>
-          </a:p>
-          <a:p xmlns:a="http://schemas.openxmlformats.org/drawingml/2006/main">
-            <a:r>
-              <a:t>Вывод: Средний MAE может скрывать непригодную область</a:t>
-            </a:r>
-          </a:p>
-          <a:p xmlns:a="http://schemas.openxmlformats.org/drawingml/2006/main">
-            <a:r>
-              <a:t/>
-            </a:r>
-          </a:p>
-          <a:p xmlns:a="http://schemas.openxmlformats.org/drawingml/2006/main">
-            <a:r>
-              <a:t>Подробное объяснение, методические ограничения и код: machine_learning/12-ml-methods_and_experiment.md</a:t>
-            </a:r>
-          </a:p>
-          <a:p xmlns:a="http://schemas.openxmlformats.org/drawingml/2006/main">
-            <a:r>
-              <a:t>Справка по методам: https://scikit-learn.org/stable/user_guide.html</a:t>
+              <a:t>Числа вымышлены. Среднее (4+6+10+12)/4 = 8; исходные абсолютные ошибки 4,2,2,4, MAE=3. Одна строка здесь обозначает один независимый учебный опыт.</a:t>
             </a:r>
           </a:p>
         </p:txBody>
@@ -1471,52 +1381,7 @@
           <a:lstStyle xmlns:a="http://schemas.openxmlformats.org/drawingml/2006/main"/>
           <a:p xmlns:a="http://schemas.openxmlformats.org/drawingml/2006/main">
             <a:r>
-              <a:t>Перестановочная важность</a:t>
-            </a:r>
-          </a:p>
-          <a:p xmlns:a="http://schemas.openxmlformats.org/drawingml/2006/main">
-            <a:r>
-              <a:t/>
-            </a:r>
-          </a:p>
-          <a:p xmlns:a="http://schemas.openxmlformats.org/drawingml/2006/main">
-            <a:r>
-              <a:t>1. Перемешайте признак и измерьте падение метрики</a:t>
-            </a:r>
-          </a:p>
-          <a:p xmlns:a="http://schemas.openxmlformats.org/drawingml/2006/main">
-            <a:r>
-              <a:t>2. Сильная корреляция может скрыть вклад каждого признака</a:t>
-            </a:r>
-          </a:p>
-          <a:p xmlns:a="http://schemas.openxmlformats.org/drawingml/2006/main">
-            <a:r>
-              <a:t>3. Используйте на модели с разумным качеством</a:t>
-            </a:r>
-          </a:p>
-          <a:p xmlns:a="http://schemas.openxmlformats.org/drawingml/2006/main">
-            <a:r>
-              <a:t/>
-            </a:r>
-          </a:p>
-          <a:p xmlns:a="http://schemas.openxmlformats.org/drawingml/2006/main">
-            <a:r>
-              <a:t>Вывод: Важность описывает прогноз, а не причинный эффект</a:t>
-            </a:r>
-          </a:p>
-          <a:p xmlns:a="http://schemas.openxmlformats.org/drawingml/2006/main">
-            <a:r>
-              <a:t/>
-            </a:r>
-          </a:p>
-          <a:p xmlns:a="http://schemas.openxmlformats.org/drawingml/2006/main">
-            <a:r>
-              <a:t>Подробное объяснение, методические ограничения и код: machine_learning/12-ml-methods_and_experiment.md</a:t>
-            </a:r>
-          </a:p>
-          <a:p xmlns:a="http://schemas.openxmlformats.org/drawingml/2006/main">
-            <a:r>
-              <a:t>Справка по методам: https://scikit-learn.org/stable/user_guide.html</a:t>
+              <a:t>Для квадратичной потери отрицательный градиент пропорционален остаткам. Слева от 90 °C среднее (−4−2)/2=−3, справа (2+4)/2=3. Для других потерь деревья обучаются на соответствующих направлениях изменения потери.</a:t>
             </a:r>
           </a:p>
         </p:txBody>
@@ -1586,52 +1451,7 @@
           <a:lstStyle xmlns:a="http://schemas.openxmlformats.org/drawingml/2006/main"/>
           <a:p xmlns:a="http://schemas.openxmlformats.org/drawingml/2006/main">
             <a:r>
-              <a:t>Частичная зависимость</a:t>
-            </a:r>
-          </a:p>
-          <a:p xmlns:a="http://schemas.openxmlformats.org/drawingml/2006/main">
-            <a:r>
-              <a:t/>
-            </a:r>
-          </a:p>
-          <a:p xmlns:a="http://schemas.openxmlformats.org/drawingml/2006/main">
-            <a:r>
-              <a:t>1. Меняем один признак, усредняя прогнозы модели</a:t>
-            </a:r>
-          </a:p>
-          <a:p xmlns:a="http://schemas.openxmlformats.org/drawingml/2006/main">
-            <a:r>
-              <a:t>2. Могут возникнуть несуществующие комбинации факторов</a:t>
-            </a:r>
-          </a:p>
-          <a:p xmlns:a="http://schemas.openxmlformats.org/drawingml/2006/main">
-            <a:r>
-              <a:t>3. Сопоставляйте график с областью реально измеренных условий</a:t>
-            </a:r>
-          </a:p>
-          <a:p xmlns:a="http://schemas.openxmlformats.org/drawingml/2006/main">
-            <a:r>
-              <a:t/>
-            </a:r>
-          </a:p>
-          <a:p xmlns:a="http://schemas.openxmlformats.org/drawingml/2006/main">
-            <a:r>
-              <a:t>Вывод: Удобная кривая не заменяет эксперимент</a:t>
-            </a:r>
-          </a:p>
-          <a:p xmlns:a="http://schemas.openxmlformats.org/drawingml/2006/main">
-            <a:r>
-              <a:t/>
-            </a:r>
-          </a:p>
-          <a:p xmlns:a="http://schemas.openxmlformats.org/drawingml/2006/main">
-            <a:r>
-              <a:t>Подробное объяснение, методические ограничения и код: machine_learning/12-ml-methods_and_experiment.md</a:t>
-            </a:r>
-          </a:p>
-          <a:p xmlns:a="http://schemas.openxmlformats.org/drawingml/2006/main">
-            <a:r>
-              <a:t>Справка по методам: https://scikit-learn.org/stable/user_guide.html</a:t>
+              <a:t>При скорости обучения 0,5 прогноз F1 = [6,5;6,5;9,5;9,5]; MAE=(2,5+0,5+0,5+2,5)/4=1,5. Новое дерево видит остатки [-2,5;-0,5;0,5;2,5]. На четырёх строках практическое обучение ансамбля не оправдано.</a:t>
             </a:r>
           </a:p>
         </p:txBody>
@@ -1816,52 +1636,7 @@
           <a:lstStyle xmlns:a="http://schemas.openxmlformats.org/drawingml/2006/main"/>
           <a:p xmlns:a="http://schemas.openxmlformats.org/drawingml/2006/main">
             <a:r>
-              <a:t>Область применимости</a:t>
-            </a:r>
-          </a:p>
-          <a:p xmlns:a="http://schemas.openxmlformats.org/drawingml/2006/main">
-            <a:r>
-              <a:t/>
-            </a:r>
-          </a:p>
-          <a:p xmlns:a="http://schemas.openxmlformats.org/drawingml/2006/main">
-            <a:r>
-              <a:t>1. Диапазон каждого фактора и комбинаций</a:t>
-            </a:r>
-          </a:p>
-          <a:p xmlns:a="http://schemas.openxmlformats.org/drawingml/2006/main">
-            <a:r>
-              <a:t>2. Типы сырья, прибор, режим приготовления</a:t>
-            </a:r>
-          </a:p>
-          <a:p xmlns:a="http://schemas.openxmlformats.org/drawingml/2006/main">
-            <a:r>
-              <a:t>3. Расстояние до исследованных рецептур</a:t>
-            </a:r>
-          </a:p>
-          <a:p xmlns:a="http://schemas.openxmlformats.org/drawingml/2006/main">
-            <a:r>
-              <a:t/>
-            </a:r>
-          </a:p>
-          <a:p xmlns:a="http://schemas.openxmlformats.org/drawingml/2006/main">
-            <a:r>
-              <a:t>Вывод: Вне области обучения вывод должен быть осторожным</a:t>
-            </a:r>
-          </a:p>
-          <a:p xmlns:a="http://schemas.openxmlformats.org/drawingml/2006/main">
-            <a:r>
-              <a:t/>
-            </a:r>
-          </a:p>
-          <a:p xmlns:a="http://schemas.openxmlformats.org/drawingml/2006/main">
-            <a:r>
-              <a:t>Подробное объяснение, методические ограничения и код: machine_learning/12-ml-methods_and_experiment.md</a:t>
-            </a:r>
-          </a:p>
-          <a:p xmlns:a="http://schemas.openxmlformats.org/drawingml/2006/main">
-            <a:r>
-              <a:t>Справка по методам: https://scikit-learn.org/stable/user_guide.html</a:t>
+              <a:t>Для небольшой лабораторной выборки контролируйте размер листа и глубину. Случайная ранняя остановка внутри модели может разбить кампании; число шагов выбирайте в групповых складках разработки. Источник: https://scikit-learn.org/stable/modules/ensemble.html</a:t>
             </a:r>
           </a:p>
         </p:txBody>
@@ -2621,52 +2396,7 @@
           <a:lstStyle xmlns:a="http://schemas.openxmlformats.org/drawingml/2006/main"/>
           <a:p xmlns:a="http://schemas.openxmlformats.org/drawingml/2006/main">
             <a:r>
-              <a:t>Несколько видов данных</a:t>
-            </a:r>
-          </a:p>
-          <a:p xmlns:a="http://schemas.openxmlformats.org/drawingml/2006/main">
-            <a:r>
-              <a:t/>
-            </a:r>
-          </a:p>
-          <a:p xmlns:a="http://schemas.openxmlformats.org/drawingml/2006/main">
-            <a:r>
-              <a:t>1. Рецепт, спектр и изображение могут дополнять друг друга</a:t>
-            </a:r>
-          </a:p>
-          <a:p xmlns:a="http://schemas.openxmlformats.org/drawingml/2006/main">
-            <a:r>
-              <a:t>2. Каждый источник имеет время доступности</a:t>
-            </a:r>
-          </a:p>
-          <a:p xmlns:a="http://schemas.openxmlformats.org/drawingml/2006/main">
-            <a:r>
-              <a:t>3. Дескрипторы агрегируют на уровне нужного объекта</a:t>
-            </a:r>
-          </a:p>
-          <a:p xmlns:a="http://schemas.openxmlformats.org/drawingml/2006/main">
-            <a:r>
-              <a:t/>
-            </a:r>
-          </a:p>
-          <a:p xmlns:a="http://schemas.openxmlformats.org/drawingml/2006/main">
-            <a:r>
-              <a:t>Вывод: Мультимодальность не отменяет независимости партий</a:t>
-            </a:r>
-          </a:p>
-          <a:p xmlns:a="http://schemas.openxmlformats.org/drawingml/2006/main">
-            <a:r>
-              <a:t/>
-            </a:r>
-          </a:p>
-          <a:p xmlns:a="http://schemas.openxmlformats.org/drawingml/2006/main">
-            <a:r>
-              <a:t>Подробное объяснение, методические ограничения и код: machine_learning/12-ml-methods_and_experiment.md</a:t>
-            </a:r>
-          </a:p>
-          <a:p xmlns:a="http://schemas.openxmlformats.org/drawingml/2006/main">
-            <a:r>
-              <a:t>Справка по методам: https://scikit-learn.org/stable/user_guide.html</a:t>
+              <a:t>Kaggle описывает задачу как прогноз pH по RGB, не следует из этого делать вывод о наличии файлов исходных изображений или ID независимых съемок. Источник: https://www.kaggle.com/datasets/robjan/ph-recognition</a:t>
             </a:r>
           </a:p>
         </p:txBody>
@@ -2736,52 +2466,7 @@
           <a:lstStyle xmlns:a="http://schemas.openxmlformats.org/drawingml/2006/main"/>
           <a:p xmlns:a="http://schemas.openxmlformats.org/drawingml/2006/main">
             <a:r>
-              <a:t>Куда направить следующий опыт</a:t>
-            </a:r>
-          </a:p>
-          <a:p xmlns:a="http://schemas.openxmlformats.org/drawingml/2006/main">
-            <a:r>
-              <a:t/>
-            </a:r>
-          </a:p>
-          <a:p xmlns:a="http://schemas.openxmlformats.org/drawingml/2006/main">
-            <a:r>
-              <a:t>1. Высокое ожидаемое свойство — эксплуатация</a:t>
-            </a:r>
-          </a:p>
-          <a:p xmlns:a="http://schemas.openxmlformats.org/drawingml/2006/main">
-            <a:r>
-              <a:t>2. Большая неопределённость — исследование</a:t>
-            </a:r>
-          </a:p>
-          <a:p xmlns:a="http://schemas.openxmlformats.org/drawingml/2006/main">
-            <a:r>
-              <a:t>3. Повторение спорного результата — проверка</a:t>
-            </a:r>
-          </a:p>
-          <a:p xmlns:a="http://schemas.openxmlformats.org/drawingml/2006/main">
-            <a:r>
-              <a:t/>
-            </a:r>
-          </a:p>
-          <a:p xmlns:a="http://schemas.openxmlformats.org/drawingml/2006/main">
-            <a:r>
-              <a:t>Вывод: Цель выбора опыта задают до чтения ранжирования</a:t>
-            </a:r>
-          </a:p>
-          <a:p xmlns:a="http://schemas.openxmlformats.org/drawingml/2006/main">
-            <a:r>
-              <a:t/>
-            </a:r>
-          </a:p>
-          <a:p xmlns:a="http://schemas.openxmlformats.org/drawingml/2006/main">
-            <a:r>
-              <a:t>Подробное объяснение, методические ограничения и код: machine_learning/12-ml-methods_and_experiment.md</a:t>
-            </a:r>
-          </a:p>
-          <a:p xmlns:a="http://schemas.openxmlformats.org/drawingml/2006/main">
-            <a:r>
-              <a:t>Справка по методам: https://scikit-learn.org/stable/user_guide.html</a:t>
+              <a:t>Если метаданные раствора, камеры и света отсутствуют, случайный тест показывает лишь качество на похожих строках. Внешнюю серию измеряют независимо с эталонным pH-метром и контролем света. Источник: https://www.kaggle.com/datasets/robjan/ph-recognition</a:t>
             </a:r>
           </a:p>
         </p:txBody>
@@ -3081,52 +2766,7 @@
           <a:lstStyle xmlns:a="http://schemas.openxmlformats.org/drawingml/2006/main"/>
           <a:p xmlns:a="http://schemas.openxmlformats.org/drawingml/2006/main">
             <a:r>
-              <a:t>Безопасный цикл рекомендаций</a:t>
-            </a:r>
-          </a:p>
-          <a:p xmlns:a="http://schemas.openxmlformats.org/drawingml/2006/main">
-            <a:r>
-              <a:t/>
-            </a:r>
-          </a:p>
-          <a:p xmlns:a="http://schemas.openxmlformats.org/drawingml/2006/main">
-            <a:r>
-              <a:t>1. Ограничения состава и оборудования задают заранее</a:t>
-            </a:r>
-          </a:p>
-          <a:p xmlns:a="http://schemas.openxmlformats.org/drawingml/2006/main">
-            <a:r>
-              <a:t>2. Рекомендацию утверждает экспериментатор</a:t>
-            </a:r>
-          </a:p>
-          <a:p xmlns:a="http://schemas.openxmlformats.org/drawingml/2006/main">
-            <a:r>
-              <a:t>3. Стоп-критерий и журнал отказов фиксируются</a:t>
-            </a:r>
-          </a:p>
-          <a:p xmlns:a="http://schemas.openxmlformats.org/drawingml/2006/main">
-            <a:r>
-              <a:t/>
-            </a:r>
-          </a:p>
-          <a:p xmlns:a="http://schemas.openxmlformats.org/drawingml/2006/main">
-            <a:r>
-              <a:t>Вывод: Модель не должна сама расширять разрешённые пределы</a:t>
-            </a:r>
-          </a:p>
-          <a:p xmlns:a="http://schemas.openxmlformats.org/drawingml/2006/main">
-            <a:r>
-              <a:t/>
-            </a:r>
-          </a:p>
-          <a:p xmlns:a="http://schemas.openxmlformats.org/drawingml/2006/main">
-            <a:r>
-              <a:t>Подробное объяснение, методические ограничения и код: machine_learning/12-ml-methods_and_experiment.md</a:t>
-            </a:r>
-          </a:p>
-          <a:p xmlns:a="http://schemas.openxmlformats.org/drawingml/2006/main">
-            <a:r>
-              <a:t>Справка по методам: https://scikit-learn.org/stable/user_guide.html</a:t>
+              <a:t>Пример 95 ± 2 и 90 ± 8 условный; ± обозначает выбранный показатель неопределенности, не доверительный интервал. При λ=1 критерий 97 и 98. Нужна проверка калибровки и допусков.</a:t>
             </a:r>
           </a:p>
         </p:txBody>
@@ -3311,52 +2951,7 @@
           <a:lstStyle xmlns:a="http://schemas.openxmlformats.org/drawingml/2006/main"/>
           <a:p xmlns:a="http://schemas.openxmlformats.org/drawingml/2006/main">
             <a:r>
-              <a:t>Нейронные сети: обзор</a:t>
-            </a:r>
-          </a:p>
-          <a:p xmlns:a="http://schemas.openxmlformats.org/drawingml/2006/main">
-            <a:r>
-              <a:t/>
-            </a:r>
-          </a:p>
-          <a:p xmlns:a="http://schemas.openxmlformats.org/drawingml/2006/main">
-            <a:r>
-              <a:t>1. Работают с изображениями, спектрами и графами</a:t>
-            </a:r>
-          </a:p>
-          <a:p xmlns:a="http://schemas.openxmlformats.org/drawingml/2006/main">
-            <a:r>
-              <a:t>2. Зависят от объёма и происхождения обучающих данных</a:t>
-            </a:r>
-          </a:p>
-          <a:p xmlns:a="http://schemas.openxmlformats.org/drawingml/2006/main">
-            <a:r>
-              <a:t>3. Сравнение со строгим baseline обязательно</a:t>
-            </a:r>
-          </a:p>
-          <a:p xmlns:a="http://schemas.openxmlformats.org/drawingml/2006/main">
-            <a:r>
-              <a:t/>
-            </a:r>
-          </a:p>
-          <a:p xmlns:a="http://schemas.openxmlformats.org/drawingml/2006/main">
-            <a:r>
-              <a:t>Вывод: Тысячи пикселей не равны тысячам независимых партий</a:t>
-            </a:r>
-          </a:p>
-          <a:p xmlns:a="http://schemas.openxmlformats.org/drawingml/2006/main">
-            <a:r>
-              <a:t/>
-            </a:r>
-          </a:p>
-          <a:p xmlns:a="http://schemas.openxmlformats.org/drawingml/2006/main">
-            <a:r>
-              <a:t>Подробное объяснение, методические ограничения и код: machine_learning/12-ml-methods_and_experiment.md</a:t>
-            </a:r>
-          </a:p>
-          <a:p xmlns:a="http://schemas.openxmlformats.org/drawingml/2006/main">
-            <a:r>
-              <a:t>Справка по методам: https://scikit-learn.org/stable/user_guide.html</a:t>
+              <a:t>Пример сети: h=ReLU(W1 x+b1), yhat=W2 h+b2; backprop вычисляет градиент ошибки по параметрам. Предобработка и выбор эпох должны происходить на train; независимая тестовая группа остается закрытой. Источник: https://scikit-learn.org/stable/modules/neural_networks_supervised.html</a:t>
             </a:r>
           </a:p>
         </p:txBody>
@@ -3426,52 +3021,7 @@
           <a:lstStyle xmlns:a="http://schemas.openxmlformats.org/drawingml/2006/main"/>
           <a:p xmlns:a="http://schemas.openxmlformats.org/drawingml/2006/main">
             <a:r>
-              <a:t>Когда предварительное обучение полезно</a:t>
-            </a:r>
-          </a:p>
-          <a:p xmlns:a="http://schemas.openxmlformats.org/drawingml/2006/main">
-            <a:r>
-              <a:t/>
-            </a:r>
-          </a:p>
-          <a:p xmlns:a="http://schemas.openxmlformats.org/drawingml/2006/main">
-            <a:r>
-              <a:t>1. Можно использовать представление из другой задачи</a:t>
-            </a:r>
-          </a:p>
-          <a:p xmlns:a="http://schemas.openxmlformats.org/drawingml/2006/main">
-            <a:r>
-              <a:t>2. Нужно проверить происхождение данных и весов</a:t>
-            </a:r>
-          </a:p>
-          <a:p xmlns:a="http://schemas.openxmlformats.org/drawingml/2006/main">
-            <a:r>
-              <a:t>3. Финальный тест не используют для адаптации</a:t>
-            </a:r>
-          </a:p>
-          <a:p xmlns:a="http://schemas.openxmlformats.org/drawingml/2006/main">
-            <a:r>
-              <a:t/>
-            </a:r>
-          </a:p>
-          <a:p xmlns:a="http://schemas.openxmlformats.org/drawingml/2006/main">
-            <a:r>
-              <a:t>Вывод: При переносе на новый прибор требуется отдельная проверка</a:t>
-            </a:r>
-          </a:p>
-          <a:p xmlns:a="http://schemas.openxmlformats.org/drawingml/2006/main">
-            <a:r>
-              <a:t/>
-            </a:r>
-          </a:p>
-          <a:p xmlns:a="http://schemas.openxmlformats.org/drawingml/2006/main">
-            <a:r>
-              <a:t>Подробное объяснение, методические ограничения и код: machine_learning/12-ml-methods_and_experiment.md</a:t>
-            </a:r>
-          </a:p>
-          <a:p xmlns:a="http://schemas.openxmlformats.org/drawingml/2006/main">
-            <a:r>
-              <a:t>Справка по методам: https://scikit-learn.org/stable/user_guide.html</a:t>
+              <a:t>Три RGB-входа, 8 скрытых нейронов, 1 числовой выход: (3+1)×8+(8+1)=41 параметр. Данные RGB не содержат пространственную структуру фото. Осмысленно сравнить с Ridge и бустингом на одном протоколе.</a:t>
             </a:r>
           </a:p>
         </p:txBody>
@@ -3541,52 +3091,7 @@
           <a:lstStyle xmlns:a="http://schemas.openxmlformats.org/drawingml/2006/main"/>
           <a:p xmlns:a="http://schemas.openxmlformats.org/drawingml/2006/main">
             <a:r>
-              <a:t>Проверяемое предложение опыта</a:t>
-            </a:r>
-          </a:p>
-          <a:p xmlns:a="http://schemas.openxmlformats.org/drawingml/2006/main">
-            <a:r>
-              <a:t/>
-            </a:r>
-          </a:p>
-          <a:p xmlns:a="http://schemas.openxmlformats.org/drawingml/2006/main">
-            <a:r>
-              <a:t>1. Укажите одну рецептуру в допустимых пределах</a:t>
-            </a:r>
-          </a:p>
-          <a:p xmlns:a="http://schemas.openxmlformats.org/drawingml/2006/main">
-            <a:r>
-              <a:t>2. Назовите предсказание и причину выбора</a:t>
-            </a:r>
-          </a:p>
-          <a:p xmlns:a="http://schemas.openxmlformats.org/drawingml/2006/main">
-            <a:r>
-              <a:t>3. Назначьте измерение и критерий опровержения</a:t>
-            </a:r>
-          </a:p>
-          <a:p xmlns:a="http://schemas.openxmlformats.org/drawingml/2006/main">
-            <a:r>
-              <a:t/>
-            </a:r>
-          </a:p>
-          <a:p xmlns:a="http://schemas.openxmlformats.org/drawingml/2006/main">
-            <a:r>
-              <a:t>Вывод: Эксперимент должен быть возможен и информативен</a:t>
-            </a:r>
-          </a:p>
-          <a:p xmlns:a="http://schemas.openxmlformats.org/drawingml/2006/main">
-            <a:r>
-              <a:t/>
-            </a:r>
-          </a:p>
-          <a:p xmlns:a="http://schemas.openxmlformats.org/drawingml/2006/main">
-            <a:r>
-              <a:t>Подробное объяснение, методические ограничения и код: machine_learning/12-ml-methods_and_experiment.md</a:t>
-            </a:r>
-          </a:p>
-          <a:p xmlns:a="http://schemas.openxmlformats.org/drawingml/2006/main">
-            <a:r>
-              <a:t>Справка по методам: https://scikit-learn.org/stable/user_guide.html</a:t>
+              <a:t>Опубликованный Kaggle notebook: цель logD при pH 7.4, используются дескрипторы, SVR, сеть Keras и модели на ее представлении. Источники: https://www.kaggle.com/code/mmelahi/physical-chemistry-lipophilicity ; https://doi.org/10.1039/C7SC02664A</a:t>
             </a:r>
           </a:p>
         </p:txBody>
@@ -3656,52 +3161,7 @@
           <a:lstStyle xmlns:a="http://schemas.openxmlformats.org/drawingml/2006/main"/>
           <a:p xmlns:a="http://schemas.openxmlformats.org/drawingml/2006/main">
             <a:r>
-              <a:t>Мини-проект: сравнение</a:t>
-            </a:r>
-          </a:p>
-          <a:p xmlns:a="http://schemas.openxmlformats.org/drawingml/2006/main">
-            <a:r>
-              <a:t/>
-            </a:r>
-          </a:p>
-          <a:p xmlns:a="http://schemas.openxmlformats.org/drawingml/2006/main">
-            <a:r>
-              <a:t>1. Baseline + две модели при одинаковых группах</a:t>
-            </a:r>
-          </a:p>
-          <a:p xmlns:a="http://schemas.openxmlformats.org/drawingml/2006/main">
-            <a:r>
-              <a:t>2. Ошибка на новых партиях и график промахов</a:t>
-            </a:r>
-          </a:p>
-          <a:p xmlns:a="http://schemas.openxmlformats.org/drawingml/2006/main">
-            <a:r>
-              <a:t>3. Область применимости и цена ошибки</a:t>
-            </a:r>
-          </a:p>
-          <a:p xmlns:a="http://schemas.openxmlformats.org/drawingml/2006/main">
-            <a:r>
-              <a:t/>
-            </a:r>
-          </a:p>
-          <a:p xmlns:a="http://schemas.openxmlformats.org/drawingml/2006/main">
-            <a:r>
-              <a:t>Вывод: Если партий мало, честно ограничьте заключение</a:t>
-            </a:r>
-          </a:p>
-          <a:p xmlns:a="http://schemas.openxmlformats.org/drawingml/2006/main">
-            <a:r>
-              <a:t/>
-            </a:r>
-          </a:p>
-          <a:p xmlns:a="http://schemas.openxmlformats.org/drawingml/2006/main">
-            <a:r>
-              <a:t>Подробное объяснение, методические ограничения и код: machine_learning/12-ml-methods_and_experiment.md</a:t>
-            </a:r>
-          </a:p>
-          <a:p xmlns:a="http://schemas.openxmlformats.org/drawingml/2006/main">
-            <a:r>
-              <a:t>Справка по методам: https://scikit-learn.org/stable/user_guide.html</a:t>
+              <a:t>В опубликованном источнике кода до train_test_split вызываются fit(StandardScaler) и fit(KernelPCA) на полной матрице. Это не доказывает меточную утечку, но тестовые признаки влияют на подготовку. Источник: https://www.kaggle.com/code/mmelahi/physical-chemistry-lipophilicity</a:t>
             </a:r>
           </a:p>
         </p:txBody>
@@ -3771,52 +3231,7 @@
           <a:lstStyle xmlns:a="http://schemas.openxmlformats.org/drawingml/2006/main"/>
           <a:p xmlns:a="http://schemas.openxmlformats.org/drawingml/2006/main">
             <a:r>
-              <a:t>Мини-проект: новый опыт</a:t>
-            </a:r>
-          </a:p>
-          <a:p xmlns:a="http://schemas.openxmlformats.org/drawingml/2006/main">
-            <a:r>
-              <a:t/>
-            </a:r>
-          </a:p>
-          <a:p xmlns:a="http://schemas.openxmlformats.org/drawingml/2006/main">
-            <a:r>
-              <a:t>1. Рецептура, ожидаемое свойство, причина</a:t>
-            </a:r>
-          </a:p>
-          <a:p xmlns:a="http://schemas.openxmlformats.org/drawingml/2006/main">
-            <a:r>
-              <a:t>2. План независимых и технических повторов</a:t>
-            </a:r>
-          </a:p>
-          <a:p xmlns:a="http://schemas.openxmlformats.org/drawingml/2006/main">
-            <a:r>
-              <a:t>3. Действие при несогласии результата с моделью</a:t>
-            </a:r>
-          </a:p>
-          <a:p xmlns:a="http://schemas.openxmlformats.org/drawingml/2006/main">
-            <a:r>
-              <a:t/>
-            </a:r>
-          </a:p>
-          <a:p xmlns:a="http://schemas.openxmlformats.org/drawingml/2006/main">
-            <a:r>
-              <a:t>Вывод: Не выбирайте опыт по прогнозу за пределами безопасной области</a:t>
-            </a:r>
-          </a:p>
-          <a:p xmlns:a="http://schemas.openxmlformats.org/drawingml/2006/main">
-            <a:r>
-              <a:t/>
-            </a:r>
-          </a:p>
-          <a:p xmlns:a="http://schemas.openxmlformats.org/drawingml/2006/main">
-            <a:r>
-              <a:t>Подробное объяснение, методические ограничения и код: machine_learning/12-ml-methods_and_experiment.md</a:t>
-            </a:r>
-          </a:p>
-          <a:p xmlns:a="http://schemas.openxmlformats.org/drawingml/2006/main">
-            <a:r>
-              <a:t>Справка по методам: https://scikit-learn.org/stable/user_guide.html</a:t>
+              <a:t>В том же notebook после нейросети X_train и X_test конкатенируют, а scaler и KernelPCA снова обучают на объединении. Правка: split до преобразований, fit внутри fold, один финальный тест. Для новых химических серий полезна независимая проверка по структурам. Источник: https://www.kaggle.com/code/mmelahi/physical-chemistry-lipophilicity</a:t>
             </a:r>
           </a:p>
         </p:txBody>
@@ -3886,52 +3301,7 @@
           <a:lstStyle xmlns:a="http://schemas.openxmlformats.org/drawingml/2006/main"/>
           <a:p xmlns:a="http://schemas.openxmlformats.org/drawingml/2006/main">
             <a:r>
-              <a:t>Примеры по направлениям</a:t>
-            </a:r>
-          </a:p>
-          <a:p xmlns:a="http://schemas.openxmlformats.org/drawingml/2006/main">
-            <a:r>
-              <a:t/>
-            </a:r>
-          </a:p>
-          <a:p xmlns:a="http://schemas.openxmlformats.org/drawingml/2006/main">
-            <a:r>
-              <a:t>1. Наноэмульсии: размер и стабильность</a:t>
-            </a:r>
-          </a:p>
-          <a:p xmlns:a="http://schemas.openxmlformats.org/drawingml/2006/main">
-            <a:r>
-              <a:t>2. SiO₂ и магнитные частицы: свойство после синтеза</a:t>
-            </a:r>
-          </a:p>
-          <a:p xmlns:a="http://schemas.openxmlformats.org/drawingml/2006/main">
-            <a:r>
-              <a:t>3. Покрытия и катализ: качество партии, спектральный отклик</a:t>
-            </a:r>
-          </a:p>
-          <a:p xmlns:a="http://schemas.openxmlformats.org/drawingml/2006/main">
-            <a:r>
-              <a:t/>
-            </a:r>
-          </a:p>
-          <a:p xmlns:a="http://schemas.openxmlformats.org/drawingml/2006/main">
-            <a:r>
-              <a:t>Вывод: Для каждого проекта заново определите единицу наблюдения</a:t>
-            </a:r>
-          </a:p>
-          <a:p xmlns:a="http://schemas.openxmlformats.org/drawingml/2006/main">
-            <a:r>
-              <a:t/>
-            </a:r>
-          </a:p>
-          <a:p xmlns:a="http://schemas.openxmlformats.org/drawingml/2006/main">
-            <a:r>
-              <a:t>Подробное объяснение, методические ограничения и код: machine_learning/12-ml-methods_and_experiment.md</a:t>
-            </a:r>
-          </a:p>
-          <a:p xmlns:a="http://schemas.openxmlformats.org/drawingml/2006/main">
-            <a:r>
-              <a:t>Справка по методам: https://scikit-learn.org/stable/user_guide.html</a:t>
+              <a:t>Markov decision process: s_t — доступное измеряемое состояние, a_t — разрешенное воздействие, r_t — результат с учетом качества и ресурсов. Данных рецепт–конечное свойство недостаточно для оценки альтернативных действий.</a:t>
             </a:r>
           </a:p>
         </p:txBody>
@@ -4001,52 +3371,7 @@
           <a:lstStyle xmlns:a="http://schemas.openxmlformats.org/drawingml/2006/main"/>
           <a:p xmlns:a="http://schemas.openxmlformats.org/drawingml/2006/main">
             <a:r>
-              <a:t>Контрольные вопросы</a:t>
-            </a:r>
-          </a:p>
-          <a:p xmlns:a="http://schemas.openxmlformats.org/drawingml/2006/main">
-            <a:r>
-              <a:t/>
-            </a:r>
-          </a:p>
-          <a:p xmlns:a="http://schemas.openxmlformats.org/drawingml/2006/main">
-            <a:r>
-              <a:t>1. Чем PLS отличается от PCA?</a:t>
-            </a:r>
-          </a:p>
-          <a:p xmlns:a="http://schemas.openxmlformats.org/drawingml/2006/main">
-            <a:r>
-              <a:t>2. Когда важность признака не означает механизм?</a:t>
-            </a:r>
-          </a:p>
-          <a:p xmlns:a="http://schemas.openxmlformats.org/drawingml/2006/main">
-            <a:r>
-              <a:t>3. Что именно проверяет новая независимая партия?</a:t>
-            </a:r>
-          </a:p>
-          <a:p xmlns:a="http://schemas.openxmlformats.org/drawingml/2006/main">
-            <a:r>
-              <a:t/>
-            </a:r>
-          </a:p>
-          <a:p xmlns:a="http://schemas.openxmlformats.org/drawingml/2006/main">
-            <a:r>
-              <a:t>Вывод: Ответ соединяет метод с экспериментальным дизайном</a:t>
-            </a:r>
-          </a:p>
-          <a:p xmlns:a="http://schemas.openxmlformats.org/drawingml/2006/main">
-            <a:r>
-              <a:t/>
-            </a:r>
-          </a:p>
-          <a:p xmlns:a="http://schemas.openxmlformats.org/drawingml/2006/main">
-            <a:r>
-              <a:t>Подробное объяснение, методические ограничения и код: machine_learning/12-ml-methods_and_experiment.md</a:t>
-            </a:r>
-          </a:p>
-          <a:p xmlns:a="http://schemas.openxmlformats.org/drawingml/2006/main">
-            <a:r>
-              <a:t>Справка по методам: https://scikit-learn.org/stable/user_guide.html</a:t>
+              <a:t>Q(быстро)=3+0,9·(−6)=−2,4; Q(плавно)=0+0,9·4=3,6. Это вымышленный двухшаговый пример. Проверенный симулятор, ограничения и оператор необходимы прежде онлайн управления.</a:t>
             </a:r>
           </a:p>
         </p:txBody>
@@ -4346,52 +3671,7 @@
           <a:lstStyle xmlns:a="http://schemas.openxmlformats.org/drawingml/2006/main"/>
           <a:p xmlns:a="http://schemas.openxmlformats.org/drawingml/2006/main">
             <a:r>
-              <a:t>Источники и дальнейшее чтение</a:t>
-            </a:r>
-          </a:p>
-          <a:p xmlns:a="http://schemas.openxmlformats.org/drawingml/2006/main">
-            <a:r>
-              <a:t/>
-            </a:r>
-          </a:p>
-          <a:p xmlns:a="http://schemas.openxmlformats.org/drawingml/2006/main">
-            <a:r>
-              <a:t>1. scikit-learn: linear_model и cross_decomposition</a:t>
-            </a:r>
-          </a:p>
-          <a:p xmlns:a="http://schemas.openxmlformats.org/drawingml/2006/main">
-            <a:r>
-              <a:t>2. scikit-learn: decomposition, clustering, inspection</a:t>
-            </a:r>
-          </a:p>
-          <a:p xmlns:a="http://schemas.openxmlformats.org/drawingml/2006/main">
-            <a:r>
-              <a:t>3. Конспект 12: код PLS и предметные ограничения</a:t>
-            </a:r>
-          </a:p>
-          <a:p xmlns:a="http://schemas.openxmlformats.org/drawingml/2006/main">
-            <a:r>
-              <a:t/>
-            </a:r>
-          </a:p>
-          <a:p xmlns:a="http://schemas.openxmlformats.org/drawingml/2006/main">
-            <a:r>
-              <a:t>Вывод: Ссылки и воспроизводимый пример — в Markdown-конспекте</a:t>
-            </a:r>
-          </a:p>
-          <a:p xmlns:a="http://schemas.openxmlformats.org/drawingml/2006/main">
-            <a:r>
-              <a:t/>
-            </a:r>
-          </a:p>
-          <a:p xmlns:a="http://schemas.openxmlformats.org/drawingml/2006/main">
-            <a:r>
-              <a:t>Подробное объяснение, методические ограничения и код: machine_learning/12-ml-methods_and_experiment.md</a:t>
-            </a:r>
-          </a:p>
-          <a:p xmlns:a="http://schemas.openxmlformats.org/drawingml/2006/main">
-            <a:r>
-              <a:t>Справка по методам: https://scikit-learn.org/stable/user_guide.html</a:t>
+              <a:t>Основные материалы: https://scikit-learn.org/stable/modules/linear_model.html ; https://scikit-learn.org/stable/modules/cross_decomposition.html ; https://scikit-learn.org/stable/modules/ensemble.html ; https://scikit-learn.org/stable/modules/neural_networks_supervised.html ; https://www.kaggle.com/datasets/robjan/ph-recognition ; https://www.kaggle.com/code/mmelahi/physical-chemistry-lipophilicity ; https://doi.org/10.1039/C7SC02664A</a:t>
             </a:r>
           </a:p>
         </p:txBody>
@@ -5034,7 +4314,7 @@
   </p:cSld>
   <p:clrMap bg1="lt1" tx1="dk1" bg2="lt2" tx2="dk2" accent1="accent1" accent2="accent2" accent3="accent3" accent4="accent4" accent5="accent5" accent6="accent6" hlink="hlink" folHlink="folHlink"/>
   <p:sldLayoutIdLst>
-    <p:sldLayoutId xmlns:r="http://schemas.openxmlformats.org/officeDocument/2006/relationships" id="2147483649" r:id="R6505a810e1c443db"/>
+    <p:sldLayoutId xmlns:r="http://schemas.openxmlformats.org/officeDocument/2006/relationships" id="2147483649" r:id="R1bcf20e3b85d4c9a"/>
   </p:sldLayoutIdLst>
   <p:txStyles>
     <p:titleStyle>
@@ -5697,6 +4977,7 @@
           <a:lstStyle xmlns:a="http://schemas.openxmlformats.org/drawingml/2006/main"/>
           <a:p xmlns:a="http://schemas.openxmlformats.org/drawingml/2006/main">
             <a:pPr algn="l">
+              <a:buNone/>
               <a:defRPr sz="1350" b="1">
                 <a:solidFill>
                   <a:srgbClr val="48CAE4"/>
@@ -5754,6 +5035,7 @@
           <a:lstStyle xmlns:a="http://schemas.openxmlformats.org/drawingml/2006/main"/>
           <a:p xmlns:a="http://schemas.openxmlformats.org/drawingml/2006/main">
             <a:pPr algn="l">
+              <a:buNone/>
               <a:defRPr sz="3225" b="1">
                 <a:solidFill>
                   <a:srgbClr val="F4F7FB"/>
@@ -5777,6 +5059,7 @@
           </a:p>
           <a:p xmlns:a="http://schemas.openxmlformats.org/drawingml/2006/main">
             <a:pPr algn="l">
+              <a:buNone/>
               <a:defRPr sz="3225" b="1">
                 <a:solidFill>
                   <a:srgbClr val="F4F7FB"/>
@@ -5834,6 +5117,7 @@
           <a:lstStyle xmlns:a="http://schemas.openxmlformats.org/drawingml/2006/main"/>
           <a:p xmlns:a="http://schemas.openxmlformats.org/drawingml/2006/main">
             <a:pPr algn="l">
+              <a:buNone/>
               <a:defRPr sz="1725" b="0">
                 <a:solidFill>
                   <a:srgbClr val="48CAE4"/>
@@ -5852,7 +5136,7 @@
                 <a:ea typeface="DejaVu Sans"/>
                 <a:cs typeface="DejaVu Sans"/>
               </a:rPr>
-              <a:t>Малые выборки, спектры и осмысленный выбор опыта</a:t>
+              <a:t>Ансамбли, нейросети и осмысленный выбор опыта</a:t>
             </a:r>
           </a:p>
         </p:txBody>
@@ -5891,6 +5175,7 @@
           <a:lstStyle xmlns:a="http://schemas.openxmlformats.org/drawingml/2006/main"/>
           <a:p xmlns:a="http://schemas.openxmlformats.org/drawingml/2006/main">
             <a:pPr algn="l">
+              <a:buNone/>
               <a:defRPr sz="1275" b="0">
                 <a:solidFill>
                   <a:srgbClr val="A6B7C9"/>
@@ -6730,6 +6015,7 @@
           <a:lstStyle xmlns:a="http://schemas.openxmlformats.org/drawingml/2006/main"/>
           <a:p xmlns:a="http://schemas.openxmlformats.org/drawingml/2006/main">
             <a:pPr algn="l">
+              <a:buNone/>
               <a:defRPr sz="975" b="0">
                 <a:solidFill>
                   <a:srgbClr val="A6B7C9"/>
@@ -6787,6 +6073,7 @@
           <a:lstStyle xmlns:a="http://schemas.openxmlformats.org/drawingml/2006/main"/>
           <a:p xmlns:a="http://schemas.openxmlformats.org/drawingml/2006/main">
             <a:pPr algn="l">
+              <a:buNone/>
               <a:defRPr sz="825" b="1">
                 <a:solidFill>
                   <a:srgbClr val="A6B7C9"/>
@@ -6844,6 +6131,7 @@
           <a:lstStyle xmlns:a="http://schemas.openxmlformats.org/drawingml/2006/main"/>
           <a:p xmlns:a="http://schemas.openxmlformats.org/drawingml/2006/main">
             <a:pPr algn="r">
+              <a:buNone/>
               <a:defRPr sz="900" b="0">
                 <a:solidFill>
                   <a:srgbClr val="A6B7C9"/>
@@ -6983,6 +6271,7 @@
           <a:lstStyle xmlns:a="http://schemas.openxmlformats.org/drawingml/2006/main"/>
           <a:p xmlns:a="http://schemas.openxmlformats.org/drawingml/2006/main">
             <a:pPr algn="l">
+              <a:buNone/>
               <a:defRPr sz="1050" b="1">
                 <a:solidFill>
                   <a:srgbClr val="48CAE4"/>
@@ -7040,6 +6329,7 @@
           <a:lstStyle xmlns:a="http://schemas.openxmlformats.org/drawingml/2006/main"/>
           <a:p xmlns:a="http://schemas.openxmlformats.org/drawingml/2006/main">
             <a:pPr algn="l">
+              <a:buNone/>
               <a:defRPr sz="2925" b="1">
                 <a:solidFill>
                   <a:srgbClr val="F4F7FB"/>
@@ -7127,6 +6417,7 @@
           <a:lstStyle xmlns:a="http://schemas.openxmlformats.org/drawingml/2006/main"/>
           <a:p xmlns:a="http://schemas.openxmlformats.org/drawingml/2006/main">
             <a:pPr algn="l">
+              <a:buNone/>
               <a:defRPr sz="825" b="1">
                 <a:solidFill>
                   <a:srgbClr val="A6B7C9"/>
@@ -7184,6 +6475,7 @@
           <a:lstStyle xmlns:a="http://schemas.openxmlformats.org/drawingml/2006/main"/>
           <a:p xmlns:a="http://schemas.openxmlformats.org/drawingml/2006/main">
             <a:pPr algn="r">
+              <a:buNone/>
               <a:defRPr sz="900" b="0">
                 <a:solidFill>
                   <a:srgbClr val="A6B7C9"/>
@@ -7303,6 +6595,7 @@
           <a:lstStyle xmlns:a="http://schemas.openxmlformats.org/drawingml/2006/main"/>
           <a:p xmlns:a="http://schemas.openxmlformats.org/drawingml/2006/main">
             <a:pPr algn="l">
+              <a:buNone/>
               <a:defRPr sz="2025" b="1">
                 <a:solidFill>
                   <a:srgbClr val="F4F7FB"/>
@@ -7422,6 +6715,7 @@
           <a:lstStyle xmlns:a="http://schemas.openxmlformats.org/drawingml/2006/main"/>
           <a:p xmlns:a="http://schemas.openxmlformats.org/drawingml/2006/main">
             <a:pPr algn="l">
+              <a:buNone/>
               <a:defRPr sz="2025" b="0">
                 <a:solidFill>
                   <a:srgbClr val="F4F7FB"/>
@@ -7541,6 +6835,7 @@
           <a:lstStyle xmlns:a="http://schemas.openxmlformats.org/drawingml/2006/main"/>
           <a:p xmlns:a="http://schemas.openxmlformats.org/drawingml/2006/main">
             <a:pPr algn="l">
+              <a:buNone/>
               <a:defRPr sz="2025" b="0">
                 <a:solidFill>
                   <a:srgbClr val="F4F7FB"/>
@@ -7630,6 +6925,7 @@
           <a:lstStyle xmlns:a="http://schemas.openxmlformats.org/drawingml/2006/main"/>
           <a:p xmlns:a="http://schemas.openxmlformats.org/drawingml/2006/main">
             <a:pPr algn="ctr">
+              <a:buNone/>
               <a:defRPr sz="1500" b="1">
                 <a:solidFill>
                   <a:srgbClr val="48CAE4"/>
@@ -7769,6 +7065,7 @@
           <a:lstStyle xmlns:a="http://schemas.openxmlformats.org/drawingml/2006/main"/>
           <a:p xmlns:a="http://schemas.openxmlformats.org/drawingml/2006/main">
             <a:pPr algn="l">
+              <a:buNone/>
               <a:defRPr sz="1050" b="1">
                 <a:solidFill>
                   <a:srgbClr val="48CAE4"/>
@@ -7826,6 +7123,7 @@
           <a:lstStyle xmlns:a="http://schemas.openxmlformats.org/drawingml/2006/main"/>
           <a:p xmlns:a="http://schemas.openxmlformats.org/drawingml/2006/main">
             <a:pPr algn="l">
+              <a:buNone/>
               <a:defRPr sz="2925" b="1">
                 <a:solidFill>
                   <a:srgbClr val="F4F7FB"/>
@@ -7913,6 +7211,7 @@
           <a:lstStyle xmlns:a="http://schemas.openxmlformats.org/drawingml/2006/main"/>
           <a:p xmlns:a="http://schemas.openxmlformats.org/drawingml/2006/main">
             <a:pPr algn="l">
+              <a:buNone/>
               <a:defRPr sz="825" b="1">
                 <a:solidFill>
                   <a:srgbClr val="A6B7C9"/>
@@ -7970,6 +7269,7 @@
           <a:lstStyle xmlns:a="http://schemas.openxmlformats.org/drawingml/2006/main"/>
           <a:p xmlns:a="http://schemas.openxmlformats.org/drawingml/2006/main">
             <a:pPr algn="r">
+              <a:buNone/>
               <a:defRPr sz="900" b="0">
                 <a:solidFill>
                   <a:srgbClr val="A6B7C9"/>
@@ -8057,6 +7357,7 @@
           <a:lstStyle xmlns:a="http://schemas.openxmlformats.org/drawingml/2006/main"/>
           <a:p xmlns:a="http://schemas.openxmlformats.org/drawingml/2006/main">
             <a:pPr algn="l">
+              <a:buNone/>
               <a:defRPr sz="1800" b="1">
                 <a:solidFill>
                   <a:srgbClr val="F4F7FB"/>
@@ -8144,6 +7445,7 @@
           <a:lstStyle xmlns:a="http://schemas.openxmlformats.org/drawingml/2006/main"/>
           <a:p xmlns:a="http://schemas.openxmlformats.org/drawingml/2006/main">
             <a:pPr algn="l">
+              <a:buNone/>
               <a:defRPr sz="1800" b="0">
                 <a:solidFill>
                   <a:srgbClr val="F4F7FB"/>
@@ -8231,6 +7533,7 @@
           <a:lstStyle xmlns:a="http://schemas.openxmlformats.org/drawingml/2006/main"/>
           <a:p xmlns:a="http://schemas.openxmlformats.org/drawingml/2006/main">
             <a:pPr algn="l">
+              <a:buNone/>
               <a:defRPr sz="1800" b="0">
                 <a:solidFill>
                   <a:srgbClr val="F4F7FB"/>
@@ -8352,6 +7655,7 @@
           <a:lstStyle xmlns:a="http://schemas.openxmlformats.org/drawingml/2006/main"/>
           <a:p xmlns:a="http://schemas.openxmlformats.org/drawingml/2006/main">
             <a:pPr algn="ctr">
+              <a:buNone/>
               <a:defRPr sz="1350" b="1">
                 <a:solidFill>
                   <a:srgbClr val="48CAE4"/>
@@ -8409,6 +7713,7 @@
           <a:lstStyle xmlns:a="http://schemas.openxmlformats.org/drawingml/2006/main"/>
           <a:p xmlns:a="http://schemas.openxmlformats.org/drawingml/2006/main">
             <a:pPr algn="ctr">
+              <a:buNone/>
               <a:defRPr sz="1950" b="1">
                 <a:solidFill>
                   <a:srgbClr val="A6B7C9"/>
@@ -8498,6 +7803,7 @@
           <a:lstStyle xmlns:a="http://schemas.openxmlformats.org/drawingml/2006/main"/>
           <a:p xmlns:a="http://schemas.openxmlformats.org/drawingml/2006/main">
             <a:pPr algn="ctr">
+              <a:buNone/>
               <a:defRPr sz="1350" b="1">
                 <a:solidFill>
                   <a:srgbClr val="C4A7FF"/>
@@ -8555,6 +7861,7 @@
           <a:lstStyle xmlns:a="http://schemas.openxmlformats.org/drawingml/2006/main"/>
           <a:p xmlns:a="http://schemas.openxmlformats.org/drawingml/2006/main">
             <a:pPr algn="ctr">
+              <a:buNone/>
               <a:defRPr sz="1950" b="1">
                 <a:solidFill>
                   <a:srgbClr val="A6B7C9"/>
@@ -8644,6 +7951,7 @@
           <a:lstStyle xmlns:a="http://schemas.openxmlformats.org/drawingml/2006/main"/>
           <a:p xmlns:a="http://schemas.openxmlformats.org/drawingml/2006/main">
             <a:pPr algn="ctr">
+              <a:buNone/>
               <a:defRPr sz="1350" b="1">
                 <a:solidFill>
                   <a:srgbClr val="80ED99"/>
@@ -8783,6 +8091,7 @@
           <a:lstStyle xmlns:a="http://schemas.openxmlformats.org/drawingml/2006/main"/>
           <a:p xmlns:a="http://schemas.openxmlformats.org/drawingml/2006/main">
             <a:pPr algn="l">
+              <a:buNone/>
               <a:defRPr sz="1050" b="1">
                 <a:solidFill>
                   <a:srgbClr val="48CAE4"/>
@@ -8840,6 +8149,7 @@
           <a:lstStyle xmlns:a="http://schemas.openxmlformats.org/drawingml/2006/main"/>
           <a:p xmlns:a="http://schemas.openxmlformats.org/drawingml/2006/main">
             <a:pPr algn="l">
+              <a:buNone/>
               <a:defRPr sz="2925" b="1">
                 <a:solidFill>
                   <a:srgbClr val="F4F7FB"/>
@@ -8927,6 +8237,7 @@
           <a:lstStyle xmlns:a="http://schemas.openxmlformats.org/drawingml/2006/main"/>
           <a:p xmlns:a="http://schemas.openxmlformats.org/drawingml/2006/main">
             <a:pPr algn="l">
+              <a:buNone/>
               <a:defRPr sz="825" b="1">
                 <a:solidFill>
                   <a:srgbClr val="A6B7C9"/>
@@ -8984,6 +8295,7 @@
           <a:lstStyle xmlns:a="http://schemas.openxmlformats.org/drawingml/2006/main"/>
           <a:p xmlns:a="http://schemas.openxmlformats.org/drawingml/2006/main">
             <a:pPr algn="r">
+              <a:buNone/>
               <a:defRPr sz="900" b="0">
                 <a:solidFill>
                   <a:srgbClr val="A6B7C9"/>
@@ -9041,6 +8353,7 @@
           <a:lstStyle xmlns:a="http://schemas.openxmlformats.org/drawingml/2006/main"/>
           <a:p xmlns:a="http://schemas.openxmlformats.org/drawingml/2006/main">
             <a:pPr algn="l">
+              <a:buNone/>
               <a:defRPr sz="2400" b="1">
                 <a:solidFill>
                   <a:srgbClr val="48CAE4"/>
@@ -9098,6 +8411,7 @@
           <a:lstStyle xmlns:a="http://schemas.openxmlformats.org/drawingml/2006/main"/>
           <a:p xmlns:a="http://schemas.openxmlformats.org/drawingml/2006/main">
             <a:pPr algn="l">
+              <a:buNone/>
               <a:defRPr sz="2025" b="1">
                 <a:solidFill>
                   <a:srgbClr val="F4F7FB"/>
@@ -9185,6 +8499,7 @@
           <a:lstStyle xmlns:a="http://schemas.openxmlformats.org/drawingml/2006/main"/>
           <a:p xmlns:a="http://schemas.openxmlformats.org/drawingml/2006/main">
             <a:pPr algn="l">
+              <a:buNone/>
               <a:defRPr sz="2400" b="1">
                 <a:solidFill>
                   <a:srgbClr val="80ED99"/>
@@ -9242,6 +8557,7 @@
           <a:lstStyle xmlns:a="http://schemas.openxmlformats.org/drawingml/2006/main"/>
           <a:p xmlns:a="http://schemas.openxmlformats.org/drawingml/2006/main">
             <a:pPr algn="l">
+              <a:buNone/>
               <a:defRPr sz="2025" b="0">
                 <a:solidFill>
                   <a:srgbClr val="F4F7FB"/>
@@ -9329,6 +8645,7 @@
           <a:lstStyle xmlns:a="http://schemas.openxmlformats.org/drawingml/2006/main"/>
           <a:p xmlns:a="http://schemas.openxmlformats.org/drawingml/2006/main">
             <a:pPr algn="l">
+              <a:buNone/>
               <a:defRPr sz="2400" b="1">
                 <a:solidFill>
                   <a:srgbClr val="C4A7FF"/>
@@ -9386,6 +8703,7 @@
           <a:lstStyle xmlns:a="http://schemas.openxmlformats.org/drawingml/2006/main"/>
           <a:p xmlns:a="http://schemas.openxmlformats.org/drawingml/2006/main">
             <a:pPr algn="l">
+              <a:buNone/>
               <a:defRPr sz="2025" b="0">
                 <a:solidFill>
                   <a:srgbClr val="F4F7FB"/>
@@ -9505,6 +8823,7 @@
           <a:lstStyle xmlns:a="http://schemas.openxmlformats.org/drawingml/2006/main"/>
           <a:p xmlns:a="http://schemas.openxmlformats.org/drawingml/2006/main">
             <a:pPr algn="ctr">
+              <a:buNone/>
               <a:defRPr sz="1500" b="1">
                 <a:solidFill>
                   <a:srgbClr val="48CAE4"/>
@@ -9644,6 +8963,7 @@
           <a:lstStyle xmlns:a="http://schemas.openxmlformats.org/drawingml/2006/main"/>
           <a:p xmlns:a="http://schemas.openxmlformats.org/drawingml/2006/main">
             <a:pPr algn="l">
+              <a:buNone/>
               <a:defRPr sz="1050" b="1">
                 <a:solidFill>
                   <a:srgbClr val="48CAE4"/>
@@ -9701,6 +9021,7 @@
           <a:lstStyle xmlns:a="http://schemas.openxmlformats.org/drawingml/2006/main"/>
           <a:p xmlns:a="http://schemas.openxmlformats.org/drawingml/2006/main">
             <a:pPr algn="l">
+              <a:buNone/>
               <a:defRPr sz="2925" b="1">
                 <a:solidFill>
                   <a:srgbClr val="F4F7FB"/>
@@ -9788,6 +9109,7 @@
           <a:lstStyle xmlns:a="http://schemas.openxmlformats.org/drawingml/2006/main"/>
           <a:p xmlns:a="http://schemas.openxmlformats.org/drawingml/2006/main">
             <a:pPr algn="l">
+              <a:buNone/>
               <a:defRPr sz="825" b="1">
                 <a:solidFill>
                   <a:srgbClr val="A6B7C9"/>
@@ -9845,6 +9167,7 @@
           <a:lstStyle xmlns:a="http://schemas.openxmlformats.org/drawingml/2006/main"/>
           <a:p xmlns:a="http://schemas.openxmlformats.org/drawingml/2006/main">
             <a:pPr algn="r">
+              <a:buNone/>
               <a:defRPr sz="900" b="0">
                 <a:solidFill>
                   <a:srgbClr val="A6B7C9"/>
@@ -9964,6 +9287,7 @@
           <a:lstStyle xmlns:a="http://schemas.openxmlformats.org/drawingml/2006/main"/>
           <a:p xmlns:a="http://schemas.openxmlformats.org/drawingml/2006/main">
             <a:pPr algn="l">
+              <a:buNone/>
               <a:defRPr sz="2850" b="1">
                 <a:solidFill>
                   <a:srgbClr val="48CAE4"/>
@@ -10021,6 +9345,7 @@
           <a:lstStyle xmlns:a="http://schemas.openxmlformats.org/drawingml/2006/main"/>
           <a:p xmlns:a="http://schemas.openxmlformats.org/drawingml/2006/main">
             <a:pPr algn="l">
+              <a:buNone/>
               <a:defRPr sz="2025" b="1">
                 <a:solidFill>
                   <a:srgbClr val="F4F7FB"/>
@@ -10140,6 +9465,7 @@
           <a:lstStyle xmlns:a="http://schemas.openxmlformats.org/drawingml/2006/main"/>
           <a:p xmlns:a="http://schemas.openxmlformats.org/drawingml/2006/main">
             <a:pPr algn="l">
+              <a:buNone/>
               <a:defRPr sz="2850" b="1">
                 <a:solidFill>
                   <a:srgbClr val="80ED99"/>
@@ -10197,6 +9523,7 @@
           <a:lstStyle xmlns:a="http://schemas.openxmlformats.org/drawingml/2006/main"/>
           <a:p xmlns:a="http://schemas.openxmlformats.org/drawingml/2006/main">
             <a:pPr algn="l">
+              <a:buNone/>
               <a:defRPr sz="2025" b="0">
                 <a:solidFill>
                   <a:srgbClr val="F4F7FB"/>
@@ -10316,6 +9643,7 @@
           <a:lstStyle xmlns:a="http://schemas.openxmlformats.org/drawingml/2006/main"/>
           <a:p xmlns:a="http://schemas.openxmlformats.org/drawingml/2006/main">
             <a:pPr algn="l">
+              <a:buNone/>
               <a:defRPr sz="2850" b="1">
                 <a:solidFill>
                   <a:srgbClr val="C4A7FF"/>
@@ -10373,6 +9701,7 @@
           <a:lstStyle xmlns:a="http://schemas.openxmlformats.org/drawingml/2006/main"/>
           <a:p xmlns:a="http://schemas.openxmlformats.org/drawingml/2006/main">
             <a:pPr algn="l">
+              <a:buNone/>
               <a:defRPr sz="2025" b="0">
                 <a:solidFill>
                   <a:srgbClr val="F4F7FB"/>
@@ -10462,6 +9791,7 @@
           <a:lstStyle xmlns:a="http://schemas.openxmlformats.org/drawingml/2006/main"/>
           <a:p xmlns:a="http://schemas.openxmlformats.org/drawingml/2006/main">
             <a:pPr algn="ctr">
+              <a:buNone/>
               <a:defRPr sz="1500" b="1">
                 <a:solidFill>
                   <a:srgbClr val="48CAE4"/>
@@ -10601,6 +9931,7 @@
           <a:lstStyle xmlns:a="http://schemas.openxmlformats.org/drawingml/2006/main"/>
           <a:p xmlns:a="http://schemas.openxmlformats.org/drawingml/2006/main">
             <a:pPr algn="l">
+              <a:buNone/>
               <a:defRPr sz="1050" b="1">
                 <a:solidFill>
                   <a:srgbClr val="48CAE4"/>
@@ -10658,6 +9989,7 @@
           <a:lstStyle xmlns:a="http://schemas.openxmlformats.org/drawingml/2006/main"/>
           <a:p xmlns:a="http://schemas.openxmlformats.org/drawingml/2006/main">
             <a:pPr algn="l">
+              <a:buNone/>
               <a:defRPr sz="2925" b="1">
                 <a:solidFill>
                   <a:srgbClr val="F4F7FB"/>
@@ -10745,6 +10077,7 @@
           <a:lstStyle xmlns:a="http://schemas.openxmlformats.org/drawingml/2006/main"/>
           <a:p xmlns:a="http://schemas.openxmlformats.org/drawingml/2006/main">
             <a:pPr algn="l">
+              <a:buNone/>
               <a:defRPr sz="825" b="1">
                 <a:solidFill>
                   <a:srgbClr val="A6B7C9"/>
@@ -10802,6 +10135,7 @@
           <a:lstStyle xmlns:a="http://schemas.openxmlformats.org/drawingml/2006/main"/>
           <a:p xmlns:a="http://schemas.openxmlformats.org/drawingml/2006/main">
             <a:pPr algn="r">
+              <a:buNone/>
               <a:defRPr sz="900" b="0">
                 <a:solidFill>
                   <a:srgbClr val="A6B7C9"/>
@@ -10921,6 +10255,7 @@
           <a:lstStyle xmlns:a="http://schemas.openxmlformats.org/drawingml/2006/main"/>
           <a:p xmlns:a="http://schemas.openxmlformats.org/drawingml/2006/main">
             <a:pPr algn="l">
+              <a:buNone/>
               <a:defRPr sz="1875" b="0">
                 <a:solidFill>
                   <a:srgbClr val="F4F7FB"/>
@@ -11008,6 +10343,7 @@
           <a:lstStyle xmlns:a="http://schemas.openxmlformats.org/drawingml/2006/main"/>
           <a:p xmlns:a="http://schemas.openxmlformats.org/drawingml/2006/main">
             <a:pPr algn="l">
+              <a:buNone/>
               <a:defRPr sz="1875" b="0">
                 <a:solidFill>
                   <a:srgbClr val="F4F7FB"/>
@@ -11095,6 +10431,7 @@
           <a:lstStyle xmlns:a="http://schemas.openxmlformats.org/drawingml/2006/main"/>
           <a:p xmlns:a="http://schemas.openxmlformats.org/drawingml/2006/main">
             <a:pPr algn="l">
+              <a:buNone/>
               <a:defRPr sz="1875" b="0">
                 <a:solidFill>
                   <a:srgbClr val="F4F7FB"/>
@@ -11152,6 +10489,7 @@
           <a:lstStyle xmlns:a="http://schemas.openxmlformats.org/drawingml/2006/main"/>
           <a:p xmlns:a="http://schemas.openxmlformats.org/drawingml/2006/main">
             <a:pPr algn="l">
+              <a:buNone/>
               <a:defRPr sz="1275" b="1">
                 <a:solidFill>
                   <a:srgbClr val="48CAE4"/>
@@ -11209,6 +10547,7 @@
           <a:lstStyle xmlns:a="http://schemas.openxmlformats.org/drawingml/2006/main"/>
           <a:p xmlns:a="http://schemas.openxmlformats.org/drawingml/2006/main">
             <a:pPr algn="l">
+              <a:buNone/>
               <a:defRPr sz="2025" b="1">
                 <a:solidFill>
                   <a:srgbClr val="F4F7FB"/>
@@ -11348,6 +10687,7 @@
           <a:lstStyle xmlns:a="http://schemas.openxmlformats.org/drawingml/2006/main"/>
           <a:p xmlns:a="http://schemas.openxmlformats.org/drawingml/2006/main">
             <a:pPr algn="l">
+              <a:buNone/>
               <a:defRPr sz="1050" b="1">
                 <a:solidFill>
                   <a:srgbClr val="48CAE4"/>
@@ -11405,6 +10745,7 @@
           <a:lstStyle xmlns:a="http://schemas.openxmlformats.org/drawingml/2006/main"/>
           <a:p xmlns:a="http://schemas.openxmlformats.org/drawingml/2006/main">
             <a:pPr algn="l">
+              <a:buNone/>
               <a:defRPr sz="2925" b="1">
                 <a:solidFill>
                   <a:srgbClr val="F4F7FB"/>
@@ -11492,6 +10833,7 @@
           <a:lstStyle xmlns:a="http://schemas.openxmlformats.org/drawingml/2006/main"/>
           <a:p xmlns:a="http://schemas.openxmlformats.org/drawingml/2006/main">
             <a:pPr algn="l">
+              <a:buNone/>
               <a:defRPr sz="825" b="1">
                 <a:solidFill>
                   <a:srgbClr val="A6B7C9"/>
@@ -11549,6 +10891,7 @@
           <a:lstStyle xmlns:a="http://schemas.openxmlformats.org/drawingml/2006/main"/>
           <a:p xmlns:a="http://schemas.openxmlformats.org/drawingml/2006/main">
             <a:pPr algn="r">
+              <a:buNone/>
               <a:defRPr sz="900" b="0">
                 <a:solidFill>
                   <a:srgbClr val="A6B7C9"/>
@@ -11636,6 +10979,7 @@
           <a:lstStyle xmlns:a="http://schemas.openxmlformats.org/drawingml/2006/main"/>
           <a:p xmlns:a="http://schemas.openxmlformats.org/drawingml/2006/main">
             <a:pPr algn="l">
+              <a:buNone/>
               <a:defRPr sz="1800" b="1">
                 <a:solidFill>
                   <a:srgbClr val="F4F7FB"/>
@@ -11654,7 +10998,7 @@
                 <a:ea typeface="DejaVu Sans"/>
                 <a:cs typeface="DejaVu Sans"/>
               </a:rPr>
-              <a:t>Уменьшает нестабильность одиночного дерева</a:t>
+              <a:t>Деревья обучаются на разных выборках и усредняются</a:t>
             </a:r>
           </a:p>
         </p:txBody>
@@ -11723,6 +11067,7 @@
           <a:lstStyle xmlns:a="http://schemas.openxmlformats.org/drawingml/2006/main"/>
           <a:p xmlns:a="http://schemas.openxmlformats.org/drawingml/2006/main">
             <a:pPr algn="l">
+              <a:buNone/>
               <a:defRPr sz="1800" b="0">
                 <a:solidFill>
                   <a:srgbClr val="F4F7FB"/>
@@ -11741,7 +11086,7 @@
                 <a:ea typeface="DejaVu Sans"/>
                 <a:cs typeface="DejaVu Sans"/>
               </a:rPr>
-              <a:t>Может описывать нелинейность внутри изученного диапазона</a:t>
+              <a:t>Каждое дерево строится без зависимости от остальных</a:t>
             </a:r>
           </a:p>
         </p:txBody>
@@ -11810,6 +11155,7 @@
           <a:lstStyle xmlns:a="http://schemas.openxmlformats.org/drawingml/2006/main"/>
           <a:p xmlns:a="http://schemas.openxmlformats.org/drawingml/2006/main">
             <a:pPr algn="l">
+              <a:buNone/>
               <a:defRPr sz="1800" b="0">
                 <a:solidFill>
                   <a:srgbClr val="F4F7FB"/>
@@ -11828,7 +11174,7 @@
                 <a:ea typeface="DejaVu Sans"/>
                 <a:cs typeface="DejaVu Sans"/>
               </a:rPr>
-              <a:t>Не создаёт независимых данных из технических повторов</a:t>
+              <a:t>Bootstrap строк не создаёт новых физических партий</a:t>
             </a:r>
           </a:p>
         </p:txBody>
@@ -11931,6 +11277,7 @@
           <a:lstStyle xmlns:a="http://schemas.openxmlformats.org/drawingml/2006/main"/>
           <a:p xmlns:a="http://schemas.openxmlformats.org/drawingml/2006/main">
             <a:pPr algn="ctr">
+              <a:buNone/>
               <a:defRPr sz="1350" b="1">
                 <a:solidFill>
                   <a:srgbClr val="48CAE4"/>
@@ -11988,6 +11335,7 @@
           <a:lstStyle xmlns:a="http://schemas.openxmlformats.org/drawingml/2006/main"/>
           <a:p xmlns:a="http://schemas.openxmlformats.org/drawingml/2006/main">
             <a:pPr algn="ctr">
+              <a:buNone/>
               <a:defRPr sz="2700" b="1">
                 <a:solidFill>
                   <a:srgbClr val="A6B7C9"/>
@@ -12045,6 +11393,7 @@
           <a:lstStyle xmlns:a="http://schemas.openxmlformats.org/drawingml/2006/main"/>
           <a:p xmlns:a="http://schemas.openxmlformats.org/drawingml/2006/main">
             <a:pPr algn="ctr">
+              <a:buNone/>
               <a:defRPr sz="2700" b="1">
                 <a:solidFill>
                   <a:srgbClr val="A6B7C9"/>
@@ -12134,6 +11483,7 @@
           <a:lstStyle xmlns:a="http://schemas.openxmlformats.org/drawingml/2006/main"/>
           <a:p xmlns:a="http://schemas.openxmlformats.org/drawingml/2006/main">
             <a:pPr algn="ctr">
+              <a:buNone/>
               <a:defRPr sz="1350" b="1">
                 <a:solidFill>
                   <a:srgbClr val="80ED99"/>
@@ -12223,6 +11573,7 @@
           <a:lstStyle xmlns:a="http://schemas.openxmlformats.org/drawingml/2006/main"/>
           <a:p xmlns:a="http://schemas.openxmlformats.org/drawingml/2006/main">
             <a:pPr algn="ctr">
+              <a:buNone/>
               <a:defRPr sz="1350" b="1">
                 <a:solidFill>
                   <a:srgbClr val="F9C74F"/>
@@ -12280,6 +11631,7 @@
           <a:lstStyle xmlns:a="http://schemas.openxmlformats.org/drawingml/2006/main"/>
           <a:p xmlns:a="http://schemas.openxmlformats.org/drawingml/2006/main">
             <a:pPr algn="ctr">
+              <a:buNone/>
               <a:defRPr sz="2250" b="1">
                 <a:solidFill>
                   <a:srgbClr val="A6B7C9"/>
@@ -12369,6 +11721,7 @@
           <a:lstStyle xmlns:a="http://schemas.openxmlformats.org/drawingml/2006/main"/>
           <a:p xmlns:a="http://schemas.openxmlformats.org/drawingml/2006/main">
             <a:pPr algn="ctr">
+              <a:buNone/>
               <a:defRPr sz="1350" b="1">
                 <a:solidFill>
                   <a:srgbClr val="C4A7FF"/>
@@ -12458,6 +11811,7 @@
           <a:lstStyle xmlns:a="http://schemas.openxmlformats.org/drawingml/2006/main"/>
           <a:p xmlns:a="http://schemas.openxmlformats.org/drawingml/2006/main">
             <a:pPr algn="ctr">
+              <a:buNone/>
               <a:defRPr sz="1350" b="1">
                 <a:solidFill>
                   <a:srgbClr val="FF7B7B"/>
@@ -12597,6 +11951,7 @@
           <a:lstStyle xmlns:a="http://schemas.openxmlformats.org/drawingml/2006/main"/>
           <a:p xmlns:a="http://schemas.openxmlformats.org/drawingml/2006/main">
             <a:pPr algn="l">
+              <a:buNone/>
               <a:defRPr sz="1050" b="1">
                 <a:solidFill>
                   <a:srgbClr val="48CAE4"/>
@@ -12654,6 +12009,7 @@
           <a:lstStyle xmlns:a="http://schemas.openxmlformats.org/drawingml/2006/main"/>
           <a:p xmlns:a="http://schemas.openxmlformats.org/drawingml/2006/main">
             <a:pPr algn="l">
+              <a:buNone/>
               <a:defRPr sz="2925" b="1">
                 <a:solidFill>
                   <a:srgbClr val="F4F7FB"/>
@@ -12672,7 +12028,7 @@
                 <a:ea typeface="DejaVu Sans"/>
                 <a:cs typeface="DejaVu Sans"/>
               </a:rPr>
-              <a:t>Одинаковый протокол сравнения</a:t>
+              <a:t>Лес и бустинг: два способа собрать деревья</a:t>
             </a:r>
           </a:p>
         </p:txBody>
@@ -12741,6 +12097,7 @@
           <a:lstStyle xmlns:a="http://schemas.openxmlformats.org/drawingml/2006/main"/>
           <a:p xmlns:a="http://schemas.openxmlformats.org/drawingml/2006/main">
             <a:pPr algn="l">
+              <a:buNone/>
               <a:defRPr sz="825" b="1">
                 <a:solidFill>
                   <a:srgbClr val="A6B7C9"/>
@@ -12798,6 +12155,7 @@
           <a:lstStyle xmlns:a="http://schemas.openxmlformats.org/drawingml/2006/main"/>
           <a:p xmlns:a="http://schemas.openxmlformats.org/drawingml/2006/main">
             <a:pPr algn="r">
+              <a:buNone/>
               <a:defRPr sz="900" b="0">
                 <a:solidFill>
                   <a:srgbClr val="A6B7C9"/>
@@ -12855,6 +12213,7 @@
           <a:lstStyle xmlns:a="http://schemas.openxmlformats.org/drawingml/2006/main"/>
           <a:p xmlns:a="http://schemas.openxmlformats.org/drawingml/2006/main">
             <a:pPr algn="l">
+              <a:buNone/>
               <a:defRPr sz="3825" b="1">
                 <a:solidFill>
                   <a:srgbClr val="48CAE4"/>
@@ -12942,6 +12301,7 @@
           <a:lstStyle xmlns:a="http://schemas.openxmlformats.org/drawingml/2006/main"/>
           <a:p xmlns:a="http://schemas.openxmlformats.org/drawingml/2006/main">
             <a:pPr algn="l">
+              <a:buNone/>
               <a:defRPr sz="1875" b="1">
                 <a:solidFill>
                   <a:srgbClr val="F4F7FB"/>
@@ -12960,7 +12320,7 @@
                 <a:ea typeface="DejaVu Sans"/>
                 <a:cs typeface="DejaVu Sans"/>
               </a:rPr>
-              <a:t>Одинаковые партии и метрика для всех моделей</a:t>
+              <a:t>Лес: независимые деревья, средний прогноз</a:t>
             </a:r>
           </a:p>
         </p:txBody>
@@ -12999,6 +12359,7 @@
           <a:lstStyle xmlns:a="http://schemas.openxmlformats.org/drawingml/2006/main"/>
           <a:p xmlns:a="http://schemas.openxmlformats.org/drawingml/2006/main">
             <a:pPr algn="l">
+              <a:buNone/>
               <a:defRPr sz="3825" b="1">
                 <a:solidFill>
                   <a:srgbClr val="80ED99"/>
@@ -13086,6 +12447,7 @@
           <a:lstStyle xmlns:a="http://schemas.openxmlformats.org/drawingml/2006/main"/>
           <a:p xmlns:a="http://schemas.openxmlformats.org/drawingml/2006/main">
             <a:pPr algn="l">
+              <a:buNone/>
               <a:defRPr sz="1875" b="0">
                 <a:solidFill>
                   <a:srgbClr val="F4F7FB"/>
@@ -13104,7 +12466,7 @@
                 <a:ea typeface="DejaVu Sans"/>
                 <a:cs typeface="DejaVu Sans"/>
               </a:rPr>
-              <a:t>Подбор настроек внутри одной схемы CV</a:t>
+              <a:t>Бустинг: каждое дерево исправляет прежние ошибки</a:t>
             </a:r>
           </a:p>
         </p:txBody>
@@ -13143,6 +12505,7 @@
           <a:lstStyle xmlns:a="http://schemas.openxmlformats.org/drawingml/2006/main"/>
           <a:p xmlns:a="http://schemas.openxmlformats.org/drawingml/2006/main">
             <a:pPr algn="l">
+              <a:buNone/>
               <a:defRPr sz="3825" b="1">
                 <a:solidFill>
                   <a:srgbClr val="C4A7FF"/>
@@ -13230,6 +12593,7 @@
           <a:lstStyle xmlns:a="http://schemas.openxmlformats.org/drawingml/2006/main"/>
           <a:p xmlns:a="http://schemas.openxmlformats.org/drawingml/2006/main">
             <a:pPr algn="l">
+              <a:buNone/>
               <a:defRPr sz="1875" b="0">
                 <a:solidFill>
                   <a:srgbClr val="F4F7FB"/>
@@ -13248,7 +12612,7 @@
                 <a:ea typeface="DejaVu Sans"/>
                 <a:cs typeface="DejaVu Sans"/>
               </a:rPr>
-              <a:t>Финальный тест после фиксации выбора</a:t>
+              <a:t>Оба метода проверяют на тех же новых партиях</a:t>
             </a:r>
           </a:p>
         </p:txBody>
@@ -13319,6 +12683,7 @@
           <a:lstStyle xmlns:a="http://schemas.openxmlformats.org/drawingml/2006/main"/>
           <a:p xmlns:a="http://schemas.openxmlformats.org/drawingml/2006/main">
             <a:pPr algn="ctr">
+              <a:buNone/>
               <a:defRPr sz="1500" b="1">
                 <a:solidFill>
                   <a:srgbClr val="48CAE4"/>
@@ -13337,7 +12702,7 @@
                 <a:ea typeface="DejaVu Sans"/>
                 <a:cs typeface="DejaVu Sans"/>
               </a:rPr>
-              <a:t>Иначе сравнение алгоритмов подменяется сравнением разбиений</a:t>
+              <a:t>Больше деревьев не означает больше экспериментов</a:t>
             </a:r>
           </a:p>
         </p:txBody>
@@ -13458,6 +12823,7 @@
           <a:lstStyle xmlns:a="http://schemas.openxmlformats.org/drawingml/2006/main"/>
           <a:p xmlns:a="http://schemas.openxmlformats.org/drawingml/2006/main">
             <a:pPr algn="l">
+              <a:buNone/>
               <a:defRPr sz="1050" b="1">
                 <a:solidFill>
                   <a:srgbClr val="48CAE4"/>
@@ -13515,6 +12881,7 @@
           <a:lstStyle xmlns:a="http://schemas.openxmlformats.org/drawingml/2006/main"/>
           <a:p xmlns:a="http://schemas.openxmlformats.org/drawingml/2006/main">
             <a:pPr algn="l">
+              <a:buNone/>
               <a:defRPr sz="2925" b="1">
                 <a:solidFill>
                   <a:srgbClr val="F4F7FB"/>
@@ -13533,7 +12900,7 @@
                 <a:ea typeface="DejaVu Sans"/>
                 <a:cs typeface="DejaVu Sans"/>
               </a:rPr>
-              <a:t>Точность по подгруппам</a:t>
+              <a:t>Бустинг: четыре условных опыта</a:t>
             </a:r>
           </a:p>
         </p:txBody>
@@ -13602,6 +12969,7 @@
           <a:lstStyle xmlns:a="http://schemas.openxmlformats.org/drawingml/2006/main"/>
           <a:p xmlns:a="http://schemas.openxmlformats.org/drawingml/2006/main">
             <a:pPr algn="l">
+              <a:buNone/>
               <a:defRPr sz="825" b="1">
                 <a:solidFill>
                   <a:srgbClr val="A6B7C9"/>
@@ -13659,6 +13027,7 @@
           <a:lstStyle xmlns:a="http://schemas.openxmlformats.org/drawingml/2006/main"/>
           <a:p xmlns:a="http://schemas.openxmlformats.org/drawingml/2006/main">
             <a:pPr algn="r">
+              <a:buNone/>
               <a:defRPr sz="900" b="0">
                 <a:solidFill>
                   <a:srgbClr val="A6B7C9"/>
@@ -13716,6 +13085,7 @@
           <a:lstStyle xmlns:a="http://schemas.openxmlformats.org/drawingml/2006/main"/>
           <a:p xmlns:a="http://schemas.openxmlformats.org/drawingml/2006/main">
             <a:pPr algn="l">
+              <a:buNone/>
               <a:defRPr sz="2400" b="1">
                 <a:solidFill>
                   <a:srgbClr val="48CAE4"/>
@@ -13773,6 +13143,7 @@
           <a:lstStyle xmlns:a="http://schemas.openxmlformats.org/drawingml/2006/main"/>
           <a:p xmlns:a="http://schemas.openxmlformats.org/drawingml/2006/main">
             <a:pPr algn="l">
+              <a:buNone/>
               <a:defRPr sz="2025" b="1">
                 <a:solidFill>
                   <a:srgbClr val="F4F7FB"/>
@@ -13791,7 +13162,7 @@
                 <a:ea typeface="DejaVu Sans"/>
                 <a:cs typeface="DejaVu Sans"/>
               </a:rPr>
-              <a:t>Разделите ошибки по сырью и прибору</a:t>
+              <a:t>Температура: 80, 85, 95, 100 °C</a:t>
             </a:r>
           </a:p>
         </p:txBody>
@@ -13860,6 +13231,7 @@
           <a:lstStyle xmlns:a="http://schemas.openxmlformats.org/drawingml/2006/main"/>
           <a:p xmlns:a="http://schemas.openxmlformats.org/drawingml/2006/main">
             <a:pPr algn="l">
+              <a:buNone/>
               <a:defRPr sz="2400" b="1">
                 <a:solidFill>
                   <a:srgbClr val="80ED99"/>
@@ -13917,6 +13289,7 @@
           <a:lstStyle xmlns:a="http://schemas.openxmlformats.org/drawingml/2006/main"/>
           <a:p xmlns:a="http://schemas.openxmlformats.org/drawingml/2006/main">
             <a:pPr algn="l">
+              <a:buNone/>
               <a:defRPr sz="2025" b="0">
                 <a:solidFill>
                   <a:srgbClr val="F4F7FB"/>
@@ -13935,7 +13308,7 @@
                 <a:ea typeface="DejaVu Sans"/>
                 <a:cs typeface="DejaVu Sans"/>
               </a:rPr>
-              <a:t>Покажите края диапазона концентраций</a:t>
+              <a:t>Свойство: 4, 6, 10, 12 усл. ед.</a:t>
             </a:r>
           </a:p>
         </p:txBody>
@@ -14004,6 +13377,7 @@
           <a:lstStyle xmlns:a="http://schemas.openxmlformats.org/drawingml/2006/main"/>
           <a:p xmlns:a="http://schemas.openxmlformats.org/drawingml/2006/main">
             <a:pPr algn="l">
+              <a:buNone/>
               <a:defRPr sz="2400" b="1">
                 <a:solidFill>
                   <a:srgbClr val="C4A7FF"/>
@@ -14061,6 +13435,7 @@
           <a:lstStyle xmlns:a="http://schemas.openxmlformats.org/drawingml/2006/main"/>
           <a:p xmlns:a="http://schemas.openxmlformats.org/drawingml/2006/main">
             <a:pPr algn="l">
+              <a:buNone/>
               <a:defRPr sz="2025" b="0">
                 <a:solidFill>
                   <a:srgbClr val="F4F7FB"/>
@@ -14079,7 +13454,7 @@
                 <a:ea typeface="DejaVu Sans"/>
                 <a:cs typeface="DejaVu Sans"/>
               </a:rPr>
-              <a:t>Ищите систематические смещения и промахи</a:t>
+              <a:t>Первая модель: среднее F₀ = 8 для всех</a:t>
             </a:r>
           </a:p>
         </p:txBody>
@@ -14180,6 +13555,7 @@
           <a:lstStyle xmlns:a="http://schemas.openxmlformats.org/drawingml/2006/main"/>
           <a:p xmlns:a="http://schemas.openxmlformats.org/drawingml/2006/main">
             <a:pPr algn="ctr">
+              <a:buNone/>
               <a:defRPr sz="1500" b="1">
                 <a:solidFill>
                   <a:srgbClr val="48CAE4"/>
@@ -14198,7 +13574,7 @@
                 <a:ea typeface="DejaVu Sans"/>
                 <a:cs typeface="DejaVu Sans"/>
               </a:rPr>
-              <a:t>Средний MAE может скрывать непригодную область</a:t>
+              <a:t>Исходный MAE = (4 + 2 + 2 + 4) / 4 = 3</a:t>
             </a:r>
           </a:p>
         </p:txBody>
@@ -14319,6 +13695,7 @@
           <a:lstStyle xmlns:a="http://schemas.openxmlformats.org/drawingml/2006/main"/>
           <a:p xmlns:a="http://schemas.openxmlformats.org/drawingml/2006/main">
             <a:pPr algn="l">
+              <a:buNone/>
               <a:defRPr sz="1050" b="1">
                 <a:solidFill>
                   <a:srgbClr val="48CAE4"/>
@@ -14376,6 +13753,7 @@
           <a:lstStyle xmlns:a="http://schemas.openxmlformats.org/drawingml/2006/main"/>
           <a:p xmlns:a="http://schemas.openxmlformats.org/drawingml/2006/main">
             <a:pPr algn="l">
+              <a:buNone/>
               <a:defRPr sz="2925" b="1">
                 <a:solidFill>
                   <a:srgbClr val="F4F7FB"/>
@@ -14394,7 +13772,7 @@
                 <a:ea typeface="DejaVu Sans"/>
                 <a:cs typeface="DejaVu Sans"/>
               </a:rPr>
-              <a:t>Перестановочная важность</a:t>
+              <a:t>Первое дерево учится на остатках</a:t>
             </a:r>
           </a:p>
         </p:txBody>
@@ -14463,6 +13841,7 @@
           <a:lstStyle xmlns:a="http://schemas.openxmlformats.org/drawingml/2006/main"/>
           <a:p xmlns:a="http://schemas.openxmlformats.org/drawingml/2006/main">
             <a:pPr algn="l">
+              <a:buNone/>
               <a:defRPr sz="825" b="1">
                 <a:solidFill>
                   <a:srgbClr val="A6B7C9"/>
@@ -14520,6 +13899,7 @@
           <a:lstStyle xmlns:a="http://schemas.openxmlformats.org/drawingml/2006/main"/>
           <a:p xmlns:a="http://schemas.openxmlformats.org/drawingml/2006/main">
             <a:pPr algn="r">
+              <a:buNone/>
               <a:defRPr sz="900" b="0">
                 <a:solidFill>
                   <a:srgbClr val="A6B7C9"/>
@@ -14639,6 +14019,7 @@
           <a:lstStyle xmlns:a="http://schemas.openxmlformats.org/drawingml/2006/main"/>
           <a:p xmlns:a="http://schemas.openxmlformats.org/drawingml/2006/main">
             <a:pPr algn="l">
+              <a:buNone/>
               <a:defRPr sz="2850" b="1">
                 <a:solidFill>
                   <a:srgbClr val="48CAE4"/>
@@ -14696,6 +14077,7 @@
           <a:lstStyle xmlns:a="http://schemas.openxmlformats.org/drawingml/2006/main"/>
           <a:p xmlns:a="http://schemas.openxmlformats.org/drawingml/2006/main">
             <a:pPr algn="l">
+              <a:buNone/>
               <a:defRPr sz="2025" b="1">
                 <a:solidFill>
                   <a:srgbClr val="F4F7FB"/>
@@ -14714,7 +14096,7 @@
                 <a:ea typeface="DejaVu Sans"/>
                 <a:cs typeface="DejaVu Sans"/>
               </a:rPr>
-              <a:t>Перемешайте признак и измерьте падение метрики</a:t>
+              <a:t>y − F₀ = −4, −2, +2, +4</a:t>
             </a:r>
           </a:p>
         </p:txBody>
@@ -14815,6 +14197,7 @@
           <a:lstStyle xmlns:a="http://schemas.openxmlformats.org/drawingml/2006/main"/>
           <a:p xmlns:a="http://schemas.openxmlformats.org/drawingml/2006/main">
             <a:pPr algn="l">
+              <a:buNone/>
               <a:defRPr sz="2850" b="1">
                 <a:solidFill>
                   <a:srgbClr val="80ED99"/>
@@ -14872,6 +14255,7 @@
           <a:lstStyle xmlns:a="http://schemas.openxmlformats.org/drawingml/2006/main"/>
           <a:p xmlns:a="http://schemas.openxmlformats.org/drawingml/2006/main">
             <a:pPr algn="l">
+              <a:buNone/>
               <a:defRPr sz="2025" b="0">
                 <a:solidFill>
                   <a:srgbClr val="F4F7FB"/>
@@ -14890,7 +14274,7 @@
                 <a:ea typeface="DejaVu Sans"/>
                 <a:cs typeface="DejaVu Sans"/>
               </a:rPr>
-              <a:t>Сильная корреляция может скрыть вклад каждого признака</a:t>
+              <a:t>Порог 90 °C разделяет низкие и высокие T</a:t>
             </a:r>
           </a:p>
         </p:txBody>
@@ -14991,6 +14375,7 @@
           <a:lstStyle xmlns:a="http://schemas.openxmlformats.org/drawingml/2006/main"/>
           <a:p xmlns:a="http://schemas.openxmlformats.org/drawingml/2006/main">
             <a:pPr algn="l">
+              <a:buNone/>
               <a:defRPr sz="2850" b="1">
                 <a:solidFill>
                   <a:srgbClr val="C4A7FF"/>
@@ -15048,6 +14433,7 @@
           <a:lstStyle xmlns:a="http://schemas.openxmlformats.org/drawingml/2006/main"/>
           <a:p xmlns:a="http://schemas.openxmlformats.org/drawingml/2006/main">
             <a:pPr algn="l">
+              <a:buNone/>
               <a:defRPr sz="2025" b="0">
                 <a:solidFill>
                   <a:srgbClr val="F4F7FB"/>
@@ -15066,7 +14452,7 @@
                 <a:ea typeface="DejaVu Sans"/>
                 <a:cs typeface="DejaVu Sans"/>
               </a:rPr>
-              <a:t>Используйте на модели с разумным качеством</a:t>
+              <a:t>Средний остаток: −3 слева, +3 справа</a:t>
             </a:r>
           </a:p>
         </p:txBody>
@@ -15137,6 +14523,7 @@
           <a:lstStyle xmlns:a="http://schemas.openxmlformats.org/drawingml/2006/main"/>
           <a:p xmlns:a="http://schemas.openxmlformats.org/drawingml/2006/main">
             <a:pPr algn="ctr">
+              <a:buNone/>
               <a:defRPr sz="1500" b="1">
                 <a:solidFill>
                   <a:srgbClr val="48CAE4"/>
@@ -15155,7 +14542,7 @@
                 <a:ea typeface="DejaVu Sans"/>
                 <a:cs typeface="DejaVu Sans"/>
               </a:rPr>
-              <a:t>Важность описывает прогноз, а не причинный эффект</a:t>
+              <a:t>Дерево моделирует то, что пока не объяснила сумма</a:t>
             </a:r>
           </a:p>
         </p:txBody>
@@ -15276,6 +14663,7 @@
           <a:lstStyle xmlns:a="http://schemas.openxmlformats.org/drawingml/2006/main"/>
           <a:p xmlns:a="http://schemas.openxmlformats.org/drawingml/2006/main">
             <a:pPr algn="l">
+              <a:buNone/>
               <a:defRPr sz="1050" b="1">
                 <a:solidFill>
                   <a:srgbClr val="48CAE4"/>
@@ -15333,6 +14721,7 @@
           <a:lstStyle xmlns:a="http://schemas.openxmlformats.org/drawingml/2006/main"/>
           <a:p xmlns:a="http://schemas.openxmlformats.org/drawingml/2006/main">
             <a:pPr algn="l">
+              <a:buNone/>
               <a:defRPr sz="2925" b="1">
                 <a:solidFill>
                   <a:srgbClr val="F4F7FB"/>
@@ -15351,7 +14740,7 @@
                 <a:ea typeface="DejaVu Sans"/>
                 <a:cs typeface="DejaVu Sans"/>
               </a:rPr>
-              <a:t>Частичная зависимость</a:t>
+              <a:t>После одного шага бустинга</a:t>
             </a:r>
           </a:p>
         </p:txBody>
@@ -15420,6 +14809,7 @@
           <a:lstStyle xmlns:a="http://schemas.openxmlformats.org/drawingml/2006/main"/>
           <a:p xmlns:a="http://schemas.openxmlformats.org/drawingml/2006/main">
             <a:pPr algn="l">
+              <a:buNone/>
               <a:defRPr sz="825" b="1">
                 <a:solidFill>
                   <a:srgbClr val="A6B7C9"/>
@@ -15477,6 +14867,7 @@
           <a:lstStyle xmlns:a="http://schemas.openxmlformats.org/drawingml/2006/main"/>
           <a:p xmlns:a="http://schemas.openxmlformats.org/drawingml/2006/main">
             <a:pPr algn="r">
+              <a:buNone/>
               <a:defRPr sz="900" b="0">
                 <a:solidFill>
                   <a:srgbClr val="A6B7C9"/>
@@ -15596,6 +14987,7 @@
           <a:lstStyle xmlns:a="http://schemas.openxmlformats.org/drawingml/2006/main"/>
           <a:p xmlns:a="http://schemas.openxmlformats.org/drawingml/2006/main">
             <a:pPr algn="l">
+              <a:buNone/>
               <a:defRPr sz="1875" b="0">
                 <a:solidFill>
                   <a:srgbClr val="F4F7FB"/>
@@ -15614,7 +15006,7 @@
                 <a:ea typeface="DejaVu Sans"/>
                 <a:cs typeface="DejaVu Sans"/>
               </a:rPr>
-              <a:t>Меняем один признак, усредняя прогнозы модели</a:t>
+              <a:t>F₁ = F₀ + 0,5 · дерево</a:t>
             </a:r>
           </a:p>
         </p:txBody>
@@ -15683,6 +15075,7 @@
           <a:lstStyle xmlns:a="http://schemas.openxmlformats.org/drawingml/2006/main"/>
           <a:p xmlns:a="http://schemas.openxmlformats.org/drawingml/2006/main">
             <a:pPr algn="l">
+              <a:buNone/>
               <a:defRPr sz="1875" b="0">
                 <a:solidFill>
                   <a:srgbClr val="F4F7FB"/>
@@ -15701,7 +15094,7 @@
                 <a:ea typeface="DejaVu Sans"/>
                 <a:cs typeface="DejaVu Sans"/>
               </a:rPr>
-              <a:t>Могут возникнуть несуществующие комбинации факторов</a:t>
+              <a:t>Прогноз: 6,5; 6,5; 9,5; 9,5</a:t>
             </a:r>
           </a:p>
         </p:txBody>
@@ -15770,6 +15163,7 @@
           <a:lstStyle xmlns:a="http://schemas.openxmlformats.org/drawingml/2006/main"/>
           <a:p xmlns:a="http://schemas.openxmlformats.org/drawingml/2006/main">
             <a:pPr algn="l">
+              <a:buNone/>
               <a:defRPr sz="1875" b="0">
                 <a:solidFill>
                   <a:srgbClr val="F4F7FB"/>
@@ -15788,7 +15182,7 @@
                 <a:ea typeface="DejaVu Sans"/>
                 <a:cs typeface="DejaVu Sans"/>
               </a:rPr>
-              <a:t>Сопоставляйте график с областью реально измеренных условий</a:t>
+              <a:t>Новые остатки: −2,5; −0,5; +0,5; +2,5</a:t>
             </a:r>
           </a:p>
         </p:txBody>
@@ -15827,6 +15221,7 @@
           <a:lstStyle xmlns:a="http://schemas.openxmlformats.org/drawingml/2006/main"/>
           <a:p xmlns:a="http://schemas.openxmlformats.org/drawingml/2006/main">
             <a:pPr algn="l">
+              <a:buNone/>
               <a:defRPr sz="1275" b="1">
                 <a:solidFill>
                   <a:srgbClr val="48CAE4"/>
@@ -15884,6 +15279,7 @@
           <a:lstStyle xmlns:a="http://schemas.openxmlformats.org/drawingml/2006/main"/>
           <a:p xmlns:a="http://schemas.openxmlformats.org/drawingml/2006/main">
             <a:pPr algn="l">
+              <a:buNone/>
               <a:defRPr sz="2025" b="1">
                 <a:solidFill>
                   <a:srgbClr val="F4F7FB"/>
@@ -15902,7 +15298,7 @@
                 <a:ea typeface="DejaVu Sans"/>
                 <a:cs typeface="DejaVu Sans"/>
               </a:rPr>
-              <a:t>Удобная кривая не заменяет эксперимент</a:t>
+              <a:t>MAE уменьшился с 3 до 1,5 усл. ед.</a:t>
             </a:r>
           </a:p>
         </p:txBody>
@@ -16023,6 +15419,7 @@
           <a:lstStyle xmlns:a="http://schemas.openxmlformats.org/drawingml/2006/main"/>
           <a:p xmlns:a="http://schemas.openxmlformats.org/drawingml/2006/main">
             <a:pPr algn="l">
+              <a:buNone/>
               <a:defRPr sz="1050" b="1">
                 <a:solidFill>
                   <a:srgbClr val="48CAE4"/>
@@ -16080,6 +15477,7 @@
           <a:lstStyle xmlns:a="http://schemas.openxmlformats.org/drawingml/2006/main"/>
           <a:p xmlns:a="http://schemas.openxmlformats.org/drawingml/2006/main">
             <a:pPr algn="l">
+              <a:buNone/>
               <a:defRPr sz="2925" b="1">
                 <a:solidFill>
                   <a:srgbClr val="F4F7FB"/>
@@ -16167,6 +15565,7 @@
           <a:lstStyle xmlns:a="http://schemas.openxmlformats.org/drawingml/2006/main"/>
           <a:p xmlns:a="http://schemas.openxmlformats.org/drawingml/2006/main">
             <a:pPr algn="l">
+              <a:buNone/>
               <a:defRPr sz="825" b="1">
                 <a:solidFill>
                   <a:srgbClr val="A6B7C9"/>
@@ -16224,6 +15623,7 @@
           <a:lstStyle xmlns:a="http://schemas.openxmlformats.org/drawingml/2006/main"/>
           <a:p xmlns:a="http://schemas.openxmlformats.org/drawingml/2006/main">
             <a:pPr algn="r">
+              <a:buNone/>
               <a:defRPr sz="900" b="0">
                 <a:solidFill>
                   <a:srgbClr val="A6B7C9"/>
@@ -16281,6 +15681,7 @@
           <a:lstStyle xmlns:a="http://schemas.openxmlformats.org/drawingml/2006/main"/>
           <a:p xmlns:a="http://schemas.openxmlformats.org/drawingml/2006/main">
             <a:pPr algn="l">
+              <a:buNone/>
               <a:defRPr sz="2400" b="1">
                 <a:solidFill>
                   <a:srgbClr val="48CAE4"/>
@@ -16338,6 +15739,7 @@
           <a:lstStyle xmlns:a="http://schemas.openxmlformats.org/drawingml/2006/main"/>
           <a:p xmlns:a="http://schemas.openxmlformats.org/drawingml/2006/main">
             <a:pPr algn="l">
+              <a:buNone/>
               <a:defRPr sz="2025" b="1">
                 <a:solidFill>
                   <a:srgbClr val="F4F7FB"/>
@@ -16425,6 +15827,7 @@
           <a:lstStyle xmlns:a="http://schemas.openxmlformats.org/drawingml/2006/main"/>
           <a:p xmlns:a="http://schemas.openxmlformats.org/drawingml/2006/main">
             <a:pPr algn="l">
+              <a:buNone/>
               <a:defRPr sz="2400" b="1">
                 <a:solidFill>
                   <a:srgbClr val="80ED99"/>
@@ -16482,6 +15885,7 @@
           <a:lstStyle xmlns:a="http://schemas.openxmlformats.org/drawingml/2006/main"/>
           <a:p xmlns:a="http://schemas.openxmlformats.org/drawingml/2006/main">
             <a:pPr algn="l">
+              <a:buNone/>
               <a:defRPr sz="2025" b="0">
                 <a:solidFill>
                   <a:srgbClr val="F4F7FB"/>
@@ -16569,6 +15973,7 @@
           <a:lstStyle xmlns:a="http://schemas.openxmlformats.org/drawingml/2006/main"/>
           <a:p xmlns:a="http://schemas.openxmlformats.org/drawingml/2006/main">
             <a:pPr algn="l">
+              <a:buNone/>
               <a:defRPr sz="2400" b="1">
                 <a:solidFill>
                   <a:srgbClr val="C4A7FF"/>
@@ -16626,6 +16031,7 @@
           <a:lstStyle xmlns:a="http://schemas.openxmlformats.org/drawingml/2006/main"/>
           <a:p xmlns:a="http://schemas.openxmlformats.org/drawingml/2006/main">
             <a:pPr algn="l">
+              <a:buNone/>
               <a:defRPr sz="2025" b="0">
                 <a:solidFill>
                   <a:srgbClr val="F4F7FB"/>
@@ -16745,6 +16151,7 @@
           <a:lstStyle xmlns:a="http://schemas.openxmlformats.org/drawingml/2006/main"/>
           <a:p xmlns:a="http://schemas.openxmlformats.org/drawingml/2006/main">
             <a:pPr algn="ctr">
+              <a:buNone/>
               <a:defRPr sz="1500" b="1">
                 <a:solidFill>
                   <a:srgbClr val="48CAE4"/>
@@ -16884,6 +16291,7 @@
           <a:lstStyle xmlns:a="http://schemas.openxmlformats.org/drawingml/2006/main"/>
           <a:p xmlns:a="http://schemas.openxmlformats.org/drawingml/2006/main">
             <a:pPr algn="l">
+              <a:buNone/>
               <a:defRPr sz="1050" b="1">
                 <a:solidFill>
                   <a:srgbClr val="48CAE4"/>
@@ -16941,6 +16349,7 @@
           <a:lstStyle xmlns:a="http://schemas.openxmlformats.org/drawingml/2006/main"/>
           <a:p xmlns:a="http://schemas.openxmlformats.org/drawingml/2006/main">
             <a:pPr algn="l">
+              <a:buNone/>
               <a:defRPr sz="2925" b="1">
                 <a:solidFill>
                   <a:srgbClr val="F4F7FB"/>
@@ -16959,7 +16368,7 @@
                 <a:ea typeface="DejaVu Sans"/>
                 <a:cs typeface="DejaVu Sans"/>
               </a:rPr>
-              <a:t>Область применимости</a:t>
+              <a:t>Что регулирует сложность бустинга</a:t>
             </a:r>
           </a:p>
         </p:txBody>
@@ -17028,6 +16437,7 @@
           <a:lstStyle xmlns:a="http://schemas.openxmlformats.org/drawingml/2006/main"/>
           <a:p xmlns:a="http://schemas.openxmlformats.org/drawingml/2006/main">
             <a:pPr algn="l">
+              <a:buNone/>
               <a:defRPr sz="825" b="1">
                 <a:solidFill>
                   <a:srgbClr val="A6B7C9"/>
@@ -17085,6 +16495,7 @@
           <a:lstStyle xmlns:a="http://schemas.openxmlformats.org/drawingml/2006/main"/>
           <a:p xmlns:a="http://schemas.openxmlformats.org/drawingml/2006/main">
             <a:pPr algn="r">
+              <a:buNone/>
               <a:defRPr sz="900" b="0">
                 <a:solidFill>
                   <a:srgbClr val="A6B7C9"/>
@@ -17204,6 +16615,7 @@
           <a:lstStyle xmlns:a="http://schemas.openxmlformats.org/drawingml/2006/main"/>
           <a:p xmlns:a="http://schemas.openxmlformats.org/drawingml/2006/main">
             <a:pPr algn="l">
+              <a:buNone/>
               <a:defRPr sz="2025" b="1">
                 <a:solidFill>
                   <a:srgbClr val="F4F7FB"/>
@@ -17222,7 +16634,7 @@
                 <a:ea typeface="DejaVu Sans"/>
                 <a:cs typeface="DejaVu Sans"/>
               </a:rPr>
-              <a:t>Диапазон каждого фактора и комбинаций</a:t>
+              <a:t>Мелкое дерево исправляет простой остаток</a:t>
             </a:r>
           </a:p>
         </p:txBody>
@@ -17323,6 +16735,7 @@
           <a:lstStyle xmlns:a="http://schemas.openxmlformats.org/drawingml/2006/main"/>
           <a:p xmlns:a="http://schemas.openxmlformats.org/drawingml/2006/main">
             <a:pPr algn="l">
+              <a:buNone/>
               <a:defRPr sz="2025" b="0">
                 <a:solidFill>
                   <a:srgbClr val="F4F7FB"/>
@@ -17341,7 +16754,7 @@
                 <a:ea typeface="DejaVu Sans"/>
                 <a:cs typeface="DejaVu Sans"/>
               </a:rPr>
-              <a:t>Типы сырья, прибор, режим приготовления</a:t>
+              <a:t>learning_rate задаёт размер каждого шага</a:t>
             </a:r>
           </a:p>
         </p:txBody>
@@ -17442,6 +16855,7 @@
           <a:lstStyle xmlns:a="http://schemas.openxmlformats.org/drawingml/2006/main"/>
           <a:p xmlns:a="http://schemas.openxmlformats.org/drawingml/2006/main">
             <a:pPr algn="l">
+              <a:buNone/>
               <a:defRPr sz="2025" b="0">
                 <a:solidFill>
                   <a:srgbClr val="F4F7FB"/>
@@ -17460,7 +16874,7 @@
                 <a:ea typeface="DejaVu Sans"/>
                 <a:cs typeface="DejaVu Sans"/>
               </a:rPr>
-              <a:t>Расстояние до исследованных рецептур</a:t>
+              <a:t>n_estimators задаёт число последовательных шагов</a:t>
             </a:r>
           </a:p>
         </p:txBody>
@@ -17531,6 +16945,7 @@
           <a:lstStyle xmlns:a="http://schemas.openxmlformats.org/drawingml/2006/main"/>
           <a:p xmlns:a="http://schemas.openxmlformats.org/drawingml/2006/main">
             <a:pPr algn="ctr">
+              <a:buNone/>
               <a:defRPr sz="1500" b="1">
                 <a:solidFill>
                   <a:srgbClr val="48CAE4"/>
@@ -17549,7 +16964,7 @@
                 <a:ea typeface="DejaVu Sans"/>
                 <a:cs typeface="DejaVu Sans"/>
               </a:rPr>
-              <a:t>Вне области обучения вывод должен быть осторожным</a:t>
+              <a:t>Выбирайте настройки на групповой проверке</a:t>
             </a:r>
           </a:p>
         </p:txBody>
@@ -17670,6 +17085,7 @@
           <a:lstStyle xmlns:a="http://schemas.openxmlformats.org/drawingml/2006/main"/>
           <a:p xmlns:a="http://schemas.openxmlformats.org/drawingml/2006/main">
             <a:pPr algn="l">
+              <a:buNone/>
               <a:defRPr sz="1050" b="1">
                 <a:solidFill>
                   <a:srgbClr val="48CAE4"/>
@@ -17727,6 +17143,7 @@
           <a:lstStyle xmlns:a="http://schemas.openxmlformats.org/drawingml/2006/main"/>
           <a:p xmlns:a="http://schemas.openxmlformats.org/drawingml/2006/main">
             <a:pPr algn="l">
+              <a:buNone/>
               <a:defRPr sz="2925" b="1">
                 <a:solidFill>
                   <a:srgbClr val="F4F7FB"/>
@@ -17745,7 +17162,7 @@
                 <a:ea typeface="DejaVu Sans"/>
                 <a:cs typeface="DejaVu Sans"/>
               </a:rPr>
-              <a:t>Диапазоны факторов недостаточны</a:t>
+              <a:t>Лес против бустинга: честный протокол</a:t>
             </a:r>
           </a:p>
         </p:txBody>
@@ -17814,6 +17231,7 @@
           <a:lstStyle xmlns:a="http://schemas.openxmlformats.org/drawingml/2006/main"/>
           <a:p xmlns:a="http://schemas.openxmlformats.org/drawingml/2006/main">
             <a:pPr algn="l">
+              <a:buNone/>
               <a:defRPr sz="825" b="1">
                 <a:solidFill>
                   <a:srgbClr val="A6B7C9"/>
@@ -17871,6 +17289,7 @@
           <a:lstStyle xmlns:a="http://schemas.openxmlformats.org/drawingml/2006/main"/>
           <a:p xmlns:a="http://schemas.openxmlformats.org/drawingml/2006/main">
             <a:pPr algn="r">
+              <a:buNone/>
               <a:defRPr sz="900" b="0">
                 <a:solidFill>
                   <a:srgbClr val="A6B7C9"/>
@@ -17928,6 +17347,7 @@
           <a:lstStyle xmlns:a="http://schemas.openxmlformats.org/drawingml/2006/main"/>
           <a:p xmlns:a="http://schemas.openxmlformats.org/drawingml/2006/main">
             <a:pPr algn="l">
+              <a:buNone/>
               <a:defRPr sz="3825" b="1">
                 <a:solidFill>
                   <a:srgbClr val="48CAE4"/>
@@ -18015,6 +17435,7 @@
           <a:lstStyle xmlns:a="http://schemas.openxmlformats.org/drawingml/2006/main"/>
           <a:p xmlns:a="http://schemas.openxmlformats.org/drawingml/2006/main">
             <a:pPr algn="l">
+              <a:buNone/>
               <a:defRPr sz="1875" b="1">
                 <a:solidFill>
                   <a:srgbClr val="F4F7FB"/>
@@ -18033,7 +17454,7 @@
                 <a:ea typeface="DejaVu Sans"/>
                 <a:cs typeface="DejaVu Sans"/>
               </a:rPr>
-              <a:t>Каждый фактор может попадать в свой диапазон</a:t>
+              <a:t>Один и тот же тест новых партий для всех моделей</a:t>
             </a:r>
           </a:p>
         </p:txBody>
@@ -18072,6 +17493,7 @@
           <a:lstStyle xmlns:a="http://schemas.openxmlformats.org/drawingml/2006/main"/>
           <a:p xmlns:a="http://schemas.openxmlformats.org/drawingml/2006/main">
             <a:pPr algn="l">
+              <a:buNone/>
               <a:defRPr sz="3825" b="1">
                 <a:solidFill>
                   <a:srgbClr val="80ED99"/>
@@ -18159,6 +17581,7 @@
           <a:lstStyle xmlns:a="http://schemas.openxmlformats.org/drawingml/2006/main"/>
           <a:p xmlns:a="http://schemas.openxmlformats.org/drawingml/2006/main">
             <a:pPr algn="l">
+              <a:buNone/>
               <a:defRPr sz="1875" b="0">
                 <a:solidFill>
                   <a:srgbClr val="F4F7FB"/>
@@ -18177,7 +17600,7 @@
                 <a:ea typeface="DejaVu Sans"/>
                 <a:cs typeface="DejaVu Sans"/>
               </a:rPr>
-              <a:t>Их сочетание может отсутствовать в плане</a:t>
+              <a:t>Одинаковая метрика и групповые складки разработки</a:t>
             </a:r>
           </a:p>
         </p:txBody>
@@ -18216,6 +17639,7 @@
           <a:lstStyle xmlns:a="http://schemas.openxmlformats.org/drawingml/2006/main"/>
           <a:p xmlns:a="http://schemas.openxmlformats.org/drawingml/2006/main">
             <a:pPr algn="l">
+              <a:buNone/>
               <a:defRPr sz="3825" b="1">
                 <a:solidFill>
                   <a:srgbClr val="C4A7FF"/>
@@ -18303,6 +17727,7 @@
           <a:lstStyle xmlns:a="http://schemas.openxmlformats.org/drawingml/2006/main"/>
           <a:p xmlns:a="http://schemas.openxmlformats.org/drawingml/2006/main">
             <a:pPr algn="l">
+              <a:buNone/>
               <a:defRPr sz="1875" b="0">
                 <a:solidFill>
                   <a:srgbClr val="F4F7FB"/>
@@ -18321,7 +17746,7 @@
                 <a:ea typeface="DejaVu Sans"/>
                 <a:cs typeface="DejaVu Sans"/>
               </a:rPr>
-              <a:t>Модель в таком углу фактически экстраполирует</a:t>
+              <a:t>Встроенную случайную остановку проверяйте отдельно</a:t>
             </a:r>
           </a:p>
         </p:txBody>
@@ -18392,6 +17817,7 @@
           <a:lstStyle xmlns:a="http://schemas.openxmlformats.org/drawingml/2006/main"/>
           <a:p xmlns:a="http://schemas.openxmlformats.org/drawingml/2006/main">
             <a:pPr algn="ctr">
+              <a:buNone/>
               <a:defRPr sz="1500" b="1">
                 <a:solidFill>
                   <a:srgbClr val="48CAE4"/>
@@ -18410,7 +17836,7 @@
                 <a:ea typeface="DejaVu Sans"/>
                 <a:cs typeface="DejaVu Sans"/>
               </a:rPr>
-              <a:t>Покажите плотность данных в пространстве рецептур</a:t>
+              <a:t>Сообщите ошибку каждой кампании, а не только среднюю</a:t>
             </a:r>
           </a:p>
         </p:txBody>
@@ -18531,6 +17957,7 @@
           <a:lstStyle xmlns:a="http://schemas.openxmlformats.org/drawingml/2006/main"/>
           <a:p xmlns:a="http://schemas.openxmlformats.org/drawingml/2006/main">
             <a:pPr algn="l">
+              <a:buNone/>
               <a:defRPr sz="1050" b="1">
                 <a:solidFill>
                   <a:srgbClr val="48CAE4"/>
@@ -18588,6 +18015,7 @@
           <a:lstStyle xmlns:a="http://schemas.openxmlformats.org/drawingml/2006/main"/>
           <a:p xmlns:a="http://schemas.openxmlformats.org/drawingml/2006/main">
             <a:pPr algn="l">
+              <a:buNone/>
               <a:defRPr sz="2925" b="1">
                 <a:solidFill>
                   <a:srgbClr val="F4F7FB"/>
@@ -18675,6 +18103,7 @@
           <a:lstStyle xmlns:a="http://schemas.openxmlformats.org/drawingml/2006/main"/>
           <a:p xmlns:a="http://schemas.openxmlformats.org/drawingml/2006/main">
             <a:pPr algn="l">
+              <a:buNone/>
               <a:defRPr sz="825" b="1">
                 <a:solidFill>
                   <a:srgbClr val="A6B7C9"/>
@@ -18732,6 +18161,7 @@
           <a:lstStyle xmlns:a="http://schemas.openxmlformats.org/drawingml/2006/main"/>
           <a:p xmlns:a="http://schemas.openxmlformats.org/drawingml/2006/main">
             <a:pPr algn="r">
+              <a:buNone/>
               <a:defRPr sz="900" b="0">
                 <a:solidFill>
                   <a:srgbClr val="A6B7C9"/>
@@ -18789,6 +18219,7 @@
           <a:lstStyle xmlns:a="http://schemas.openxmlformats.org/drawingml/2006/main"/>
           <a:p xmlns:a="http://schemas.openxmlformats.org/drawingml/2006/main">
             <a:pPr algn="l">
+              <a:buNone/>
               <a:defRPr sz="2400" b="1">
                 <a:solidFill>
                   <a:srgbClr val="48CAE4"/>
@@ -18846,6 +18277,7 @@
           <a:lstStyle xmlns:a="http://schemas.openxmlformats.org/drawingml/2006/main"/>
           <a:p xmlns:a="http://schemas.openxmlformats.org/drawingml/2006/main">
             <a:pPr algn="l">
+              <a:buNone/>
               <a:defRPr sz="2025" b="1">
                 <a:solidFill>
                   <a:srgbClr val="F4F7FB"/>
@@ -18933,6 +18365,7 @@
           <a:lstStyle xmlns:a="http://schemas.openxmlformats.org/drawingml/2006/main"/>
           <a:p xmlns:a="http://schemas.openxmlformats.org/drawingml/2006/main">
             <a:pPr algn="l">
+              <a:buNone/>
               <a:defRPr sz="2400" b="1">
                 <a:solidFill>
                   <a:srgbClr val="80ED99"/>
@@ -18990,6 +18423,7 @@
           <a:lstStyle xmlns:a="http://schemas.openxmlformats.org/drawingml/2006/main"/>
           <a:p xmlns:a="http://schemas.openxmlformats.org/drawingml/2006/main">
             <a:pPr algn="l">
+              <a:buNone/>
               <a:defRPr sz="2025" b="0">
                 <a:solidFill>
                   <a:srgbClr val="F4F7FB"/>
@@ -19077,6 +18511,7 @@
           <a:lstStyle xmlns:a="http://schemas.openxmlformats.org/drawingml/2006/main"/>
           <a:p xmlns:a="http://schemas.openxmlformats.org/drawingml/2006/main">
             <a:pPr algn="l">
+              <a:buNone/>
               <a:defRPr sz="2400" b="1">
                 <a:solidFill>
                   <a:srgbClr val="C4A7FF"/>
@@ -19134,6 +18569,7 @@
           <a:lstStyle xmlns:a="http://schemas.openxmlformats.org/drawingml/2006/main"/>
           <a:p xmlns:a="http://schemas.openxmlformats.org/drawingml/2006/main">
             <a:pPr algn="l">
+              <a:buNone/>
               <a:defRPr sz="2025" b="0">
                 <a:solidFill>
                   <a:srgbClr val="F4F7FB"/>
@@ -19253,6 +18689,7 @@
           <a:lstStyle xmlns:a="http://schemas.openxmlformats.org/drawingml/2006/main"/>
           <a:p xmlns:a="http://schemas.openxmlformats.org/drawingml/2006/main">
             <a:pPr algn="ctr">
+              <a:buNone/>
               <a:defRPr sz="1500" b="1">
                 <a:solidFill>
                   <a:srgbClr val="48CAE4"/>
@@ -19392,6 +18829,7 @@
           <a:lstStyle xmlns:a="http://schemas.openxmlformats.org/drawingml/2006/main"/>
           <a:p xmlns:a="http://schemas.openxmlformats.org/drawingml/2006/main">
             <a:pPr algn="l">
+              <a:buNone/>
               <a:defRPr sz="1050" b="1">
                 <a:solidFill>
                   <a:srgbClr val="48CAE4"/>
@@ -19449,6 +18887,7 @@
           <a:lstStyle xmlns:a="http://schemas.openxmlformats.org/drawingml/2006/main"/>
           <a:p xmlns:a="http://schemas.openxmlformats.org/drawingml/2006/main">
             <a:pPr algn="l">
+              <a:buNone/>
               <a:defRPr sz="2925" b="1">
                 <a:solidFill>
                   <a:srgbClr val="F4F7FB"/>
@@ -19536,6 +18975,7 @@
           <a:lstStyle xmlns:a="http://schemas.openxmlformats.org/drawingml/2006/main"/>
           <a:p xmlns:a="http://schemas.openxmlformats.org/drawingml/2006/main">
             <a:pPr algn="l">
+              <a:buNone/>
               <a:defRPr sz="825" b="1">
                 <a:solidFill>
                   <a:srgbClr val="A6B7C9"/>
@@ -19593,6 +19033,7 @@
           <a:lstStyle xmlns:a="http://schemas.openxmlformats.org/drawingml/2006/main"/>
           <a:p xmlns:a="http://schemas.openxmlformats.org/drawingml/2006/main">
             <a:pPr algn="r">
+              <a:buNone/>
               <a:defRPr sz="900" b="0">
                 <a:solidFill>
                   <a:srgbClr val="A6B7C9"/>
@@ -19712,6 +19153,7 @@
           <a:lstStyle xmlns:a="http://schemas.openxmlformats.org/drawingml/2006/main"/>
           <a:p xmlns:a="http://schemas.openxmlformats.org/drawingml/2006/main">
             <a:pPr algn="l">
+              <a:buNone/>
               <a:defRPr sz="2850" b="1">
                 <a:solidFill>
                   <a:srgbClr val="48CAE4"/>
@@ -19769,6 +19211,7 @@
           <a:lstStyle xmlns:a="http://schemas.openxmlformats.org/drawingml/2006/main"/>
           <a:p xmlns:a="http://schemas.openxmlformats.org/drawingml/2006/main">
             <a:pPr algn="l">
+              <a:buNone/>
               <a:defRPr sz="2025" b="1">
                 <a:solidFill>
                   <a:srgbClr val="F4F7FB"/>
@@ -19888,6 +19331,7 @@
           <a:lstStyle xmlns:a="http://schemas.openxmlformats.org/drawingml/2006/main"/>
           <a:p xmlns:a="http://schemas.openxmlformats.org/drawingml/2006/main">
             <a:pPr algn="l">
+              <a:buNone/>
               <a:defRPr sz="2850" b="1">
                 <a:solidFill>
                   <a:srgbClr val="80ED99"/>
@@ -19945,6 +19389,7 @@
           <a:lstStyle xmlns:a="http://schemas.openxmlformats.org/drawingml/2006/main"/>
           <a:p xmlns:a="http://schemas.openxmlformats.org/drawingml/2006/main">
             <a:pPr algn="l">
+              <a:buNone/>
               <a:defRPr sz="2025" b="0">
                 <a:solidFill>
                   <a:srgbClr val="F4F7FB"/>
@@ -20064,6 +19509,7 @@
           <a:lstStyle xmlns:a="http://schemas.openxmlformats.org/drawingml/2006/main"/>
           <a:p xmlns:a="http://schemas.openxmlformats.org/drawingml/2006/main">
             <a:pPr algn="l">
+              <a:buNone/>
               <a:defRPr sz="2850" b="1">
                 <a:solidFill>
                   <a:srgbClr val="C4A7FF"/>
@@ -20121,6 +19567,7 @@
           <a:lstStyle xmlns:a="http://schemas.openxmlformats.org/drawingml/2006/main"/>
           <a:p xmlns:a="http://schemas.openxmlformats.org/drawingml/2006/main">
             <a:pPr algn="l">
+              <a:buNone/>
               <a:defRPr sz="2025" b="0">
                 <a:solidFill>
                   <a:srgbClr val="F4F7FB"/>
@@ -20210,6 +19657,7 @@
           <a:lstStyle xmlns:a="http://schemas.openxmlformats.org/drawingml/2006/main"/>
           <a:p xmlns:a="http://schemas.openxmlformats.org/drawingml/2006/main">
             <a:pPr algn="ctr">
+              <a:buNone/>
               <a:defRPr sz="1500" b="1">
                 <a:solidFill>
                   <a:srgbClr val="48CAE4"/>
@@ -20349,6 +19797,7 @@
           <a:lstStyle xmlns:a="http://schemas.openxmlformats.org/drawingml/2006/main"/>
           <a:p xmlns:a="http://schemas.openxmlformats.org/drawingml/2006/main">
             <a:pPr algn="l">
+              <a:buNone/>
               <a:defRPr sz="1050" b="1">
                 <a:solidFill>
                   <a:srgbClr val="48CAE4"/>
@@ -20406,6 +19855,7 @@
           <a:lstStyle xmlns:a="http://schemas.openxmlformats.org/drawingml/2006/main"/>
           <a:p xmlns:a="http://schemas.openxmlformats.org/drawingml/2006/main">
             <a:pPr algn="l">
+              <a:buNone/>
               <a:defRPr sz="2925" b="1">
                 <a:solidFill>
                   <a:srgbClr val="F4F7FB"/>
@@ -20493,6 +19943,7 @@
           <a:lstStyle xmlns:a="http://schemas.openxmlformats.org/drawingml/2006/main"/>
           <a:p xmlns:a="http://schemas.openxmlformats.org/drawingml/2006/main">
             <a:pPr algn="l">
+              <a:buNone/>
               <a:defRPr sz="825" b="1">
                 <a:solidFill>
                   <a:srgbClr val="A6B7C9"/>
@@ -20550,6 +20001,7 @@
           <a:lstStyle xmlns:a="http://schemas.openxmlformats.org/drawingml/2006/main"/>
           <a:p xmlns:a="http://schemas.openxmlformats.org/drawingml/2006/main">
             <a:pPr algn="r">
+              <a:buNone/>
               <a:defRPr sz="900" b="0">
                 <a:solidFill>
                   <a:srgbClr val="A6B7C9"/>
@@ -20637,6 +20089,7 @@
           <a:lstStyle xmlns:a="http://schemas.openxmlformats.org/drawingml/2006/main"/>
           <a:p xmlns:a="http://schemas.openxmlformats.org/drawingml/2006/main">
             <a:pPr algn="l">
+              <a:buNone/>
               <a:defRPr sz="1800" b="1">
                 <a:solidFill>
                   <a:srgbClr val="F4F7FB"/>
@@ -20724,6 +20177,7 @@
           <a:lstStyle xmlns:a="http://schemas.openxmlformats.org/drawingml/2006/main"/>
           <a:p xmlns:a="http://schemas.openxmlformats.org/drawingml/2006/main">
             <a:pPr algn="l">
+              <a:buNone/>
               <a:defRPr sz="1800" b="0">
                 <a:solidFill>
                   <a:srgbClr val="F4F7FB"/>
@@ -20811,6 +20265,7 @@
           <a:lstStyle xmlns:a="http://schemas.openxmlformats.org/drawingml/2006/main"/>
           <a:p xmlns:a="http://schemas.openxmlformats.org/drawingml/2006/main">
             <a:pPr algn="l">
+              <a:buNone/>
               <a:defRPr sz="1800" b="0">
                 <a:solidFill>
                   <a:srgbClr val="F4F7FB"/>
@@ -21740,6 +21195,7 @@
           <a:lstStyle xmlns:a="http://schemas.openxmlformats.org/drawingml/2006/main"/>
           <a:p xmlns:a="http://schemas.openxmlformats.org/drawingml/2006/main">
             <a:pPr algn="ctr">
+              <a:buNone/>
               <a:defRPr sz="1275" b="1">
                 <a:solidFill>
                   <a:srgbClr val="F4F7FB"/>
@@ -21879,6 +21335,7 @@
           <a:lstStyle xmlns:a="http://schemas.openxmlformats.org/drawingml/2006/main"/>
           <a:p xmlns:a="http://schemas.openxmlformats.org/drawingml/2006/main">
             <a:pPr algn="l">
+              <a:buNone/>
               <a:defRPr sz="1050" b="1">
                 <a:solidFill>
                   <a:srgbClr val="48CAE4"/>
@@ -21936,6 +21393,7 @@
           <a:lstStyle xmlns:a="http://schemas.openxmlformats.org/drawingml/2006/main"/>
           <a:p xmlns:a="http://schemas.openxmlformats.org/drawingml/2006/main">
             <a:pPr algn="l">
+              <a:buNone/>
               <a:defRPr sz="2925" b="1">
                 <a:solidFill>
                   <a:srgbClr val="F4F7FB"/>
@@ -22023,6 +21481,7 @@
           <a:lstStyle xmlns:a="http://schemas.openxmlformats.org/drawingml/2006/main"/>
           <a:p xmlns:a="http://schemas.openxmlformats.org/drawingml/2006/main">
             <a:pPr algn="l">
+              <a:buNone/>
               <a:defRPr sz="825" b="1">
                 <a:solidFill>
                   <a:srgbClr val="A6B7C9"/>
@@ -22080,6 +21539,7 @@
           <a:lstStyle xmlns:a="http://schemas.openxmlformats.org/drawingml/2006/main"/>
           <a:p xmlns:a="http://schemas.openxmlformats.org/drawingml/2006/main">
             <a:pPr algn="r">
+              <a:buNone/>
               <a:defRPr sz="900" b="0">
                 <a:solidFill>
                   <a:srgbClr val="A6B7C9"/>
@@ -22199,6 +21659,7 @@
           <a:lstStyle xmlns:a="http://schemas.openxmlformats.org/drawingml/2006/main"/>
           <a:p xmlns:a="http://schemas.openxmlformats.org/drawingml/2006/main">
             <a:pPr algn="l">
+              <a:buNone/>
               <a:defRPr sz="2025" b="1">
                 <a:solidFill>
                   <a:srgbClr val="F4F7FB"/>
@@ -22318,6 +21779,7 @@
           <a:lstStyle xmlns:a="http://schemas.openxmlformats.org/drawingml/2006/main"/>
           <a:p xmlns:a="http://schemas.openxmlformats.org/drawingml/2006/main">
             <a:pPr algn="l">
+              <a:buNone/>
               <a:defRPr sz="2025" b="0">
                 <a:solidFill>
                   <a:srgbClr val="F4F7FB"/>
@@ -22437,6 +21899,7 @@
           <a:lstStyle xmlns:a="http://schemas.openxmlformats.org/drawingml/2006/main"/>
           <a:p xmlns:a="http://schemas.openxmlformats.org/drawingml/2006/main">
             <a:pPr algn="l">
+              <a:buNone/>
               <a:defRPr sz="2025" b="0">
                 <a:solidFill>
                   <a:srgbClr val="F4F7FB"/>
@@ -22526,6 +21989,7 @@
           <a:lstStyle xmlns:a="http://schemas.openxmlformats.org/drawingml/2006/main"/>
           <a:p xmlns:a="http://schemas.openxmlformats.org/drawingml/2006/main">
             <a:pPr algn="ctr">
+              <a:buNone/>
               <a:defRPr sz="1500" b="1">
                 <a:solidFill>
                   <a:srgbClr val="48CAE4"/>
@@ -22665,6 +22129,7 @@
           <a:lstStyle xmlns:a="http://schemas.openxmlformats.org/drawingml/2006/main"/>
           <a:p xmlns:a="http://schemas.openxmlformats.org/drawingml/2006/main">
             <a:pPr algn="l">
+              <a:buNone/>
               <a:defRPr sz="1050" b="1">
                 <a:solidFill>
                   <a:srgbClr val="48CAE4"/>
@@ -22722,6 +22187,7 @@
           <a:lstStyle xmlns:a="http://schemas.openxmlformats.org/drawingml/2006/main"/>
           <a:p xmlns:a="http://schemas.openxmlformats.org/drawingml/2006/main">
             <a:pPr algn="l">
+              <a:buNone/>
               <a:defRPr sz="2925" b="1">
                 <a:solidFill>
                   <a:srgbClr val="F4F7FB"/>
@@ -22809,6 +22275,7 @@
           <a:lstStyle xmlns:a="http://schemas.openxmlformats.org/drawingml/2006/main"/>
           <a:p xmlns:a="http://schemas.openxmlformats.org/drawingml/2006/main">
             <a:pPr algn="l">
+              <a:buNone/>
               <a:defRPr sz="825" b="1">
                 <a:solidFill>
                   <a:srgbClr val="A6B7C9"/>
@@ -22866,6 +22333,7 @@
           <a:lstStyle xmlns:a="http://schemas.openxmlformats.org/drawingml/2006/main"/>
           <a:p xmlns:a="http://schemas.openxmlformats.org/drawingml/2006/main">
             <a:pPr algn="r">
+              <a:buNone/>
               <a:defRPr sz="900" b="0">
                 <a:solidFill>
                   <a:srgbClr val="A6B7C9"/>
@@ -22923,6 +22391,7 @@
           <a:lstStyle xmlns:a="http://schemas.openxmlformats.org/drawingml/2006/main"/>
           <a:p xmlns:a="http://schemas.openxmlformats.org/drawingml/2006/main">
             <a:pPr algn="l">
+              <a:buNone/>
               <a:defRPr sz="3825" b="1">
                 <a:solidFill>
                   <a:srgbClr val="48CAE4"/>
@@ -23010,6 +22479,7 @@
           <a:lstStyle xmlns:a="http://schemas.openxmlformats.org/drawingml/2006/main"/>
           <a:p xmlns:a="http://schemas.openxmlformats.org/drawingml/2006/main">
             <a:pPr algn="l">
+              <a:buNone/>
               <a:defRPr sz="1875" b="1">
                 <a:solidFill>
                   <a:srgbClr val="F4F7FB"/>
@@ -23067,6 +22537,7 @@
           <a:lstStyle xmlns:a="http://schemas.openxmlformats.org/drawingml/2006/main"/>
           <a:p xmlns:a="http://schemas.openxmlformats.org/drawingml/2006/main">
             <a:pPr algn="l">
+              <a:buNone/>
               <a:defRPr sz="3825" b="1">
                 <a:solidFill>
                   <a:srgbClr val="80ED99"/>
@@ -23154,6 +22625,7 @@
           <a:lstStyle xmlns:a="http://schemas.openxmlformats.org/drawingml/2006/main"/>
           <a:p xmlns:a="http://schemas.openxmlformats.org/drawingml/2006/main">
             <a:pPr algn="l">
+              <a:buNone/>
               <a:defRPr sz="1875" b="0">
                 <a:solidFill>
                   <a:srgbClr val="F4F7FB"/>
@@ -23211,6 +22683,7 @@
           <a:lstStyle xmlns:a="http://schemas.openxmlformats.org/drawingml/2006/main"/>
           <a:p xmlns:a="http://schemas.openxmlformats.org/drawingml/2006/main">
             <a:pPr algn="l">
+              <a:buNone/>
               <a:defRPr sz="3825" b="1">
                 <a:solidFill>
                   <a:srgbClr val="C4A7FF"/>
@@ -23298,6 +22771,7 @@
           <a:lstStyle xmlns:a="http://schemas.openxmlformats.org/drawingml/2006/main"/>
           <a:p xmlns:a="http://schemas.openxmlformats.org/drawingml/2006/main">
             <a:pPr algn="l">
+              <a:buNone/>
               <a:defRPr sz="1875" b="0">
                 <a:solidFill>
                   <a:srgbClr val="F4F7FB"/>
@@ -23387,6 +22861,7 @@
           <a:lstStyle xmlns:a="http://schemas.openxmlformats.org/drawingml/2006/main"/>
           <a:p xmlns:a="http://schemas.openxmlformats.org/drawingml/2006/main">
             <a:pPr algn="ctr">
+              <a:buNone/>
               <a:defRPr sz="1500" b="1">
                 <a:solidFill>
                   <a:srgbClr val="48CAE4"/>
@@ -23526,6 +23001,7 @@
           <a:lstStyle xmlns:a="http://schemas.openxmlformats.org/drawingml/2006/main"/>
           <a:p xmlns:a="http://schemas.openxmlformats.org/drawingml/2006/main">
             <a:pPr algn="l">
+              <a:buNone/>
               <a:defRPr sz="1050" b="1">
                 <a:solidFill>
                   <a:srgbClr val="48CAE4"/>
@@ -23583,6 +23059,7 @@
           <a:lstStyle xmlns:a="http://schemas.openxmlformats.org/drawingml/2006/main"/>
           <a:p xmlns:a="http://schemas.openxmlformats.org/drawingml/2006/main">
             <a:pPr algn="l">
+              <a:buNone/>
               <a:defRPr sz="2925" b="1">
                 <a:solidFill>
                   <a:srgbClr val="F4F7FB"/>
@@ -23601,7 +23078,7 @@
                 <a:ea typeface="DejaVu Sans"/>
                 <a:cs typeface="DejaVu Sans"/>
               </a:rPr>
-              <a:t>Несколько видов данных</a:t>
+              <a:t>Kaggle: pH по трём каналам RGB</a:t>
             </a:r>
           </a:p>
         </p:txBody>
@@ -23670,6 +23147,7 @@
           <a:lstStyle xmlns:a="http://schemas.openxmlformats.org/drawingml/2006/main"/>
           <a:p xmlns:a="http://schemas.openxmlformats.org/drawingml/2006/main">
             <a:pPr algn="l">
+              <a:buNone/>
               <a:defRPr sz="825" b="1">
                 <a:solidFill>
                   <a:srgbClr val="A6B7C9"/>
@@ -23727,6 +23205,7 @@
           <a:lstStyle xmlns:a="http://schemas.openxmlformats.org/drawingml/2006/main"/>
           <a:p xmlns:a="http://schemas.openxmlformats.org/drawingml/2006/main">
             <a:pPr algn="r">
+              <a:buNone/>
               <a:defRPr sz="900" b="0">
                 <a:solidFill>
                   <a:srgbClr val="A6B7C9"/>
@@ -23784,6 +23263,7 @@
           <a:lstStyle xmlns:a="http://schemas.openxmlformats.org/drawingml/2006/main"/>
           <a:p xmlns:a="http://schemas.openxmlformats.org/drawingml/2006/main">
             <a:pPr algn="l">
+              <a:buNone/>
               <a:defRPr sz="2400" b="1">
                 <a:solidFill>
                   <a:srgbClr val="48CAE4"/>
@@ -23841,6 +23321,7 @@
           <a:lstStyle xmlns:a="http://schemas.openxmlformats.org/drawingml/2006/main"/>
           <a:p xmlns:a="http://schemas.openxmlformats.org/drawingml/2006/main">
             <a:pPr algn="l">
+              <a:buNone/>
               <a:defRPr sz="2025" b="1">
                 <a:solidFill>
                   <a:srgbClr val="F4F7FB"/>
@@ -23859,7 +23340,7 @@
                 <a:ea typeface="DejaVu Sans"/>
                 <a:cs typeface="DejaVu Sans"/>
               </a:rPr>
-              <a:t>Рецепт, спектр и изображение могут дополнять друг друга</a:t>
+              <a:t>Входы: R, G, B; цель: pH раствора</a:t>
             </a:r>
           </a:p>
         </p:txBody>
@@ -23928,6 +23409,7 @@
           <a:lstStyle xmlns:a="http://schemas.openxmlformats.org/drawingml/2006/main"/>
           <a:p xmlns:a="http://schemas.openxmlformats.org/drawingml/2006/main">
             <a:pPr algn="l">
+              <a:buNone/>
               <a:defRPr sz="2400" b="1">
                 <a:solidFill>
                   <a:srgbClr val="80ED99"/>
@@ -23985,6 +23467,7 @@
           <a:lstStyle xmlns:a="http://schemas.openxmlformats.org/drawingml/2006/main"/>
           <a:p xmlns:a="http://schemas.openxmlformats.org/drawingml/2006/main">
             <a:pPr algn="l">
+              <a:buNone/>
               <a:defRPr sz="2025" b="0">
                 <a:solidFill>
                   <a:srgbClr val="F4F7FB"/>
@@ -24003,7 +23486,7 @@
                 <a:ea typeface="DejaVu Sans"/>
                 <a:cs typeface="DejaVu Sans"/>
               </a:rPr>
-              <a:t>Каждый источник имеет время доступности</a:t>
+              <a:t>Это таблица цветов, исходные пиксели не заявлены</a:t>
             </a:r>
           </a:p>
         </p:txBody>
@@ -24072,6 +23555,7 @@
           <a:lstStyle xmlns:a="http://schemas.openxmlformats.org/drawingml/2006/main"/>
           <a:p xmlns:a="http://schemas.openxmlformats.org/drawingml/2006/main">
             <a:pPr algn="l">
+              <a:buNone/>
               <a:defRPr sz="2400" b="1">
                 <a:solidFill>
                   <a:srgbClr val="C4A7FF"/>
@@ -24129,6 +23613,7 @@
           <a:lstStyle xmlns:a="http://schemas.openxmlformats.org/drawingml/2006/main"/>
           <a:p xmlns:a="http://schemas.openxmlformats.org/drawingml/2006/main">
             <a:pPr algn="l">
+              <a:buNone/>
               <a:defRPr sz="2025" b="0">
                 <a:solidFill>
                   <a:srgbClr val="F4F7FB"/>
@@ -24147,7 +23632,7 @@
                 <a:ea typeface="DejaVu Sans"/>
                 <a:cs typeface="DejaVu Sans"/>
               </a:rPr>
-              <a:t>Дескрипторы агрегируют на уровне нужного объекта</a:t>
+              <a:t>Проверьте колонки, диапазоны и повторяющиеся строки</a:t>
             </a:r>
           </a:p>
         </p:txBody>
@@ -24248,6 +23733,7 @@
           <a:lstStyle xmlns:a="http://schemas.openxmlformats.org/drawingml/2006/main"/>
           <a:p xmlns:a="http://schemas.openxmlformats.org/drawingml/2006/main">
             <a:pPr algn="ctr">
+              <a:buNone/>
               <a:defRPr sz="1500" b="1">
                 <a:solidFill>
                   <a:srgbClr val="48CAE4"/>
@@ -24266,7 +23752,7 @@
                 <a:ea typeface="DejaVu Sans"/>
                 <a:cs typeface="DejaVu Sans"/>
               </a:rPr>
-              <a:t>Мультимодальность не отменяет независимости партий</a:t>
+              <a:t>Цвет зависит также от освещения и съёмки</a:t>
             </a:r>
           </a:p>
         </p:txBody>
@@ -24387,6 +23873,7 @@
           <a:lstStyle xmlns:a="http://schemas.openxmlformats.org/drawingml/2006/main"/>
           <a:p xmlns:a="http://schemas.openxmlformats.org/drawingml/2006/main">
             <a:pPr algn="l">
+              <a:buNone/>
               <a:defRPr sz="1050" b="1">
                 <a:solidFill>
                   <a:srgbClr val="48CAE4"/>
@@ -24444,6 +23931,7 @@
           <a:lstStyle xmlns:a="http://schemas.openxmlformats.org/drawingml/2006/main"/>
           <a:p xmlns:a="http://schemas.openxmlformats.org/drawingml/2006/main">
             <a:pPr algn="l">
+              <a:buNone/>
               <a:defRPr sz="2925" b="1">
                 <a:solidFill>
                   <a:srgbClr val="F4F7FB"/>
@@ -24462,7 +23950,7 @@
                 <a:ea typeface="DejaVu Sans"/>
                 <a:cs typeface="DejaVu Sans"/>
               </a:rPr>
-              <a:t>Куда направить следующий опыт</a:t>
+              <a:t>pH: какие модели сравнить</a:t>
             </a:r>
           </a:p>
         </p:txBody>
@@ -24531,6 +24019,7 @@
           <a:lstStyle xmlns:a="http://schemas.openxmlformats.org/drawingml/2006/main"/>
           <a:p xmlns:a="http://schemas.openxmlformats.org/drawingml/2006/main">
             <a:pPr algn="l">
+              <a:buNone/>
               <a:defRPr sz="825" b="1">
                 <a:solidFill>
                   <a:srgbClr val="A6B7C9"/>
@@ -24588,6 +24077,7 @@
           <a:lstStyle xmlns:a="http://schemas.openxmlformats.org/drawingml/2006/main"/>
           <a:p xmlns:a="http://schemas.openxmlformats.org/drawingml/2006/main">
             <a:pPr algn="r">
+              <a:buNone/>
               <a:defRPr sz="900" b="0">
                 <a:solidFill>
                   <a:srgbClr val="A6B7C9"/>
@@ -24707,6 +24197,7 @@
           <a:lstStyle xmlns:a="http://schemas.openxmlformats.org/drawingml/2006/main"/>
           <a:p xmlns:a="http://schemas.openxmlformats.org/drawingml/2006/main">
             <a:pPr algn="l">
+              <a:buNone/>
               <a:defRPr sz="2850" b="1">
                 <a:solidFill>
                   <a:srgbClr val="48CAE4"/>
@@ -24764,6 +24255,7 @@
           <a:lstStyle xmlns:a="http://schemas.openxmlformats.org/drawingml/2006/main"/>
           <a:p xmlns:a="http://schemas.openxmlformats.org/drawingml/2006/main">
             <a:pPr algn="l">
+              <a:buNone/>
               <a:defRPr sz="2025" b="1">
                 <a:solidFill>
                   <a:srgbClr val="F4F7FB"/>
@@ -24782,7 +24274,7 @@
                 <a:ea typeface="DejaVu Sans"/>
                 <a:cs typeface="DejaVu Sans"/>
               </a:rPr>
-              <a:t>Высокое ожидаемое свойство — эксплуатация</a:t>
+              <a:t>Константа и Ridge: простые отправные точки</a:t>
             </a:r>
           </a:p>
         </p:txBody>
@@ -24883,6 +24375,7 @@
           <a:lstStyle xmlns:a="http://schemas.openxmlformats.org/drawingml/2006/main"/>
           <a:p xmlns:a="http://schemas.openxmlformats.org/drawingml/2006/main">
             <a:pPr algn="l">
+              <a:buNone/>
               <a:defRPr sz="2850" b="1">
                 <a:solidFill>
                   <a:srgbClr val="80ED99"/>
@@ -24940,6 +24433,7 @@
           <a:lstStyle xmlns:a="http://schemas.openxmlformats.org/drawingml/2006/main"/>
           <a:p xmlns:a="http://schemas.openxmlformats.org/drawingml/2006/main">
             <a:pPr algn="l">
+              <a:buNone/>
               <a:defRPr sz="2025" b="0">
                 <a:solidFill>
                   <a:srgbClr val="F4F7FB"/>
@@ -24958,7 +24452,7 @@
                 <a:ea typeface="DejaVu Sans"/>
                 <a:cs typeface="DejaVu Sans"/>
               </a:rPr>
-              <a:t>Большая неопределённость — исследование</a:t>
+              <a:t>Неглубокий бустинг: нелинейная связь RGB и pH</a:t>
             </a:r>
           </a:p>
         </p:txBody>
@@ -25059,6 +24553,7 @@
           <a:lstStyle xmlns:a="http://schemas.openxmlformats.org/drawingml/2006/main"/>
           <a:p xmlns:a="http://schemas.openxmlformats.org/drawingml/2006/main">
             <a:pPr algn="l">
+              <a:buNone/>
               <a:defRPr sz="2850" b="1">
                 <a:solidFill>
                   <a:srgbClr val="C4A7FF"/>
@@ -25116,6 +24611,7 @@
           <a:lstStyle xmlns:a="http://schemas.openxmlformats.org/drawingml/2006/main"/>
           <a:p xmlns:a="http://schemas.openxmlformats.org/drawingml/2006/main">
             <a:pPr algn="l">
+              <a:buNone/>
               <a:defRPr sz="2025" b="0">
                 <a:solidFill>
                   <a:srgbClr val="F4F7FB"/>
@@ -25134,7 +24630,7 @@
                 <a:ea typeface="DejaVu Sans"/>
                 <a:cs typeface="DejaVu Sans"/>
               </a:rPr>
-              <a:t>Повторение спорного результата — проверка</a:t>
+              <a:t>Малая сеть 3 → 8 → 1: факультативное сравнение</a:t>
             </a:r>
           </a:p>
         </p:txBody>
@@ -25205,6 +24701,7 @@
           <a:lstStyle xmlns:a="http://schemas.openxmlformats.org/drawingml/2006/main"/>
           <a:p xmlns:a="http://schemas.openxmlformats.org/drawingml/2006/main">
             <a:pPr algn="ctr">
+              <a:buNone/>
               <a:defRPr sz="1500" b="1">
                 <a:solidFill>
                   <a:srgbClr val="48CAE4"/>
@@ -25223,7 +24720,7 @@
                 <a:ea typeface="DejaVu Sans"/>
                 <a:cs typeface="DejaVu Sans"/>
               </a:rPr>
-              <a:t>Цель выбора опыта задают до чтения ранжирования</a:t>
+              <a:t>MAE в pH; перенос на новый прибор требует новых съёмок</a:t>
             </a:r>
           </a:p>
         </p:txBody>
@@ -25344,6 +24841,7 @@
           <a:lstStyle xmlns:a="http://schemas.openxmlformats.org/drawingml/2006/main"/>
           <a:p xmlns:a="http://schemas.openxmlformats.org/drawingml/2006/main">
             <a:pPr algn="l">
+              <a:buNone/>
               <a:defRPr sz="1050" b="1">
                 <a:solidFill>
                   <a:srgbClr val="48CAE4"/>
@@ -25401,6 +24899,7 @@
           <a:lstStyle xmlns:a="http://schemas.openxmlformats.org/drawingml/2006/main"/>
           <a:p xmlns:a="http://schemas.openxmlformats.org/drawingml/2006/main">
             <a:pPr algn="l">
+              <a:buNone/>
               <a:defRPr sz="2925" b="1">
                 <a:solidFill>
                   <a:srgbClr val="F4F7FB"/>
@@ -25488,6 +24987,7 @@
           <a:lstStyle xmlns:a="http://schemas.openxmlformats.org/drawingml/2006/main"/>
           <a:p xmlns:a="http://schemas.openxmlformats.org/drawingml/2006/main">
             <a:pPr algn="l">
+              <a:buNone/>
               <a:defRPr sz="825" b="1">
                 <a:solidFill>
                   <a:srgbClr val="A6B7C9"/>
@@ -25545,6 +25045,7 @@
           <a:lstStyle xmlns:a="http://schemas.openxmlformats.org/drawingml/2006/main"/>
           <a:p xmlns:a="http://schemas.openxmlformats.org/drawingml/2006/main">
             <a:pPr algn="r">
+              <a:buNone/>
               <a:defRPr sz="900" b="0">
                 <a:solidFill>
                   <a:srgbClr val="A6B7C9"/>
@@ -25632,6 +25133,7 @@
           <a:lstStyle xmlns:a="http://schemas.openxmlformats.org/drawingml/2006/main"/>
           <a:p xmlns:a="http://schemas.openxmlformats.org/drawingml/2006/main">
             <a:pPr algn="l">
+              <a:buNone/>
               <a:defRPr sz="1800" b="1">
                 <a:solidFill>
                   <a:srgbClr val="F4F7FB"/>
@@ -25719,6 +25221,7 @@
           <a:lstStyle xmlns:a="http://schemas.openxmlformats.org/drawingml/2006/main"/>
           <a:p xmlns:a="http://schemas.openxmlformats.org/drawingml/2006/main">
             <a:pPr algn="l">
+              <a:buNone/>
               <a:defRPr sz="1800" b="0">
                 <a:solidFill>
                   <a:srgbClr val="F4F7FB"/>
@@ -25806,6 +25309,7 @@
           <a:lstStyle xmlns:a="http://schemas.openxmlformats.org/drawingml/2006/main"/>
           <a:p xmlns:a="http://schemas.openxmlformats.org/drawingml/2006/main">
             <a:pPr algn="l">
+              <a:buNone/>
               <a:defRPr sz="1800" b="0">
                 <a:solidFill>
                   <a:srgbClr val="F4F7FB"/>
@@ -25927,6 +25431,7 @@
           <a:lstStyle xmlns:a="http://schemas.openxmlformats.org/drawingml/2006/main"/>
           <a:p xmlns:a="http://schemas.openxmlformats.org/drawingml/2006/main">
             <a:pPr algn="ctr">
+              <a:buNone/>
               <a:defRPr sz="1350" b="1">
                 <a:solidFill>
                   <a:srgbClr val="48CAE4"/>
@@ -25984,6 +25489,7 @@
           <a:lstStyle xmlns:a="http://schemas.openxmlformats.org/drawingml/2006/main"/>
           <a:p xmlns:a="http://schemas.openxmlformats.org/drawingml/2006/main">
             <a:pPr algn="ctr">
+              <a:buNone/>
               <a:defRPr sz="1800" b="1">
                 <a:solidFill>
                   <a:srgbClr val="A6B7C9"/>
@@ -26073,6 +25579,7 @@
           <a:lstStyle xmlns:a="http://schemas.openxmlformats.org/drawingml/2006/main"/>
           <a:p xmlns:a="http://schemas.openxmlformats.org/drawingml/2006/main">
             <a:pPr algn="ctr">
+              <a:buNone/>
               <a:defRPr sz="1350" b="1">
                 <a:solidFill>
                   <a:srgbClr val="80ED99"/>
@@ -26130,6 +25637,7 @@
           <a:lstStyle xmlns:a="http://schemas.openxmlformats.org/drawingml/2006/main"/>
           <a:p xmlns:a="http://schemas.openxmlformats.org/drawingml/2006/main">
             <a:pPr algn="ctr">
+              <a:buNone/>
               <a:defRPr sz="1800" b="1">
                 <a:solidFill>
                   <a:srgbClr val="A6B7C9"/>
@@ -26219,6 +25727,7 @@
           <a:lstStyle xmlns:a="http://schemas.openxmlformats.org/drawingml/2006/main"/>
           <a:p xmlns:a="http://schemas.openxmlformats.org/drawingml/2006/main">
             <a:pPr algn="ctr">
+              <a:buNone/>
               <a:defRPr sz="1350" b="1">
                 <a:solidFill>
                   <a:srgbClr val="C4A7FF"/>
@@ -26276,6 +25785,7 @@
           <a:lstStyle xmlns:a="http://schemas.openxmlformats.org/drawingml/2006/main"/>
           <a:p xmlns:a="http://schemas.openxmlformats.org/drawingml/2006/main">
             <a:pPr algn="ctr">
+              <a:buNone/>
               <a:defRPr sz="1800" b="1">
                 <a:solidFill>
                   <a:srgbClr val="A6B7C9"/>
@@ -26365,6 +25875,7 @@
           <a:lstStyle xmlns:a="http://schemas.openxmlformats.org/drawingml/2006/main"/>
           <a:p xmlns:a="http://schemas.openxmlformats.org/drawingml/2006/main">
             <a:pPr algn="ctr">
+              <a:buNone/>
               <a:defRPr sz="1350" b="1">
                 <a:solidFill>
                   <a:srgbClr val="F9C74F"/>
@@ -26504,6 +26015,7 @@
           <a:lstStyle xmlns:a="http://schemas.openxmlformats.org/drawingml/2006/main"/>
           <a:p xmlns:a="http://schemas.openxmlformats.org/drawingml/2006/main">
             <a:pPr algn="l">
+              <a:buNone/>
               <a:defRPr sz="1050" b="1">
                 <a:solidFill>
                   <a:srgbClr val="48CAE4"/>
@@ -26561,6 +26073,7 @@
           <a:lstStyle xmlns:a="http://schemas.openxmlformats.org/drawingml/2006/main"/>
           <a:p xmlns:a="http://schemas.openxmlformats.org/drawingml/2006/main">
             <a:pPr algn="l">
+              <a:buNone/>
               <a:defRPr sz="2925" b="1">
                 <a:solidFill>
                   <a:srgbClr val="F4F7FB"/>
@@ -26648,6 +26161,7 @@
           <a:lstStyle xmlns:a="http://schemas.openxmlformats.org/drawingml/2006/main"/>
           <a:p xmlns:a="http://schemas.openxmlformats.org/drawingml/2006/main">
             <a:pPr algn="l">
+              <a:buNone/>
               <a:defRPr sz="825" b="1">
                 <a:solidFill>
                   <a:srgbClr val="A6B7C9"/>
@@ -26705,6 +26219,7 @@
           <a:lstStyle xmlns:a="http://schemas.openxmlformats.org/drawingml/2006/main"/>
           <a:p xmlns:a="http://schemas.openxmlformats.org/drawingml/2006/main">
             <a:pPr algn="r">
+              <a:buNone/>
               <a:defRPr sz="900" b="0">
                 <a:solidFill>
                   <a:srgbClr val="A6B7C9"/>
@@ -26824,6 +26339,7 @@
           <a:lstStyle xmlns:a="http://schemas.openxmlformats.org/drawingml/2006/main"/>
           <a:p xmlns:a="http://schemas.openxmlformats.org/drawingml/2006/main">
             <a:pPr algn="l">
+              <a:buNone/>
               <a:defRPr sz="2850" b="1">
                 <a:solidFill>
                   <a:srgbClr val="48CAE4"/>
@@ -26881,6 +26397,7 @@
           <a:lstStyle xmlns:a="http://schemas.openxmlformats.org/drawingml/2006/main"/>
           <a:p xmlns:a="http://schemas.openxmlformats.org/drawingml/2006/main">
             <a:pPr algn="l">
+              <a:buNone/>
               <a:defRPr sz="2025" b="1">
                 <a:solidFill>
                   <a:srgbClr val="F4F7FB"/>
@@ -27000,6 +26517,7 @@
           <a:lstStyle xmlns:a="http://schemas.openxmlformats.org/drawingml/2006/main"/>
           <a:p xmlns:a="http://schemas.openxmlformats.org/drawingml/2006/main">
             <a:pPr algn="l">
+              <a:buNone/>
               <a:defRPr sz="2850" b="1">
                 <a:solidFill>
                   <a:srgbClr val="80ED99"/>
@@ -27057,6 +26575,7 @@
           <a:lstStyle xmlns:a="http://schemas.openxmlformats.org/drawingml/2006/main"/>
           <a:p xmlns:a="http://schemas.openxmlformats.org/drawingml/2006/main">
             <a:pPr algn="l">
+              <a:buNone/>
               <a:defRPr sz="2025" b="0">
                 <a:solidFill>
                   <a:srgbClr val="F4F7FB"/>
@@ -27176,6 +26695,7 @@
           <a:lstStyle xmlns:a="http://schemas.openxmlformats.org/drawingml/2006/main"/>
           <a:p xmlns:a="http://schemas.openxmlformats.org/drawingml/2006/main">
             <a:pPr algn="l">
+              <a:buNone/>
               <a:defRPr sz="2850" b="1">
                 <a:solidFill>
                   <a:srgbClr val="C4A7FF"/>
@@ -27233,6 +26753,7 @@
           <a:lstStyle xmlns:a="http://schemas.openxmlformats.org/drawingml/2006/main"/>
           <a:p xmlns:a="http://schemas.openxmlformats.org/drawingml/2006/main">
             <a:pPr algn="l">
+              <a:buNone/>
               <a:defRPr sz="2025" b="0">
                 <a:solidFill>
                   <a:srgbClr val="F4F7FB"/>
@@ -27251,7 +26772,7 @@
                 <a:ea typeface="DejaVu Sans"/>
                 <a:cs typeface="DejaVu Sans"/>
               </a:rPr>
-              <a:t>PLS для спектров; деревья и лес для нелинейности</a:t>
+              <a:t>PLS для спектров; лес и бустинг для нелинейности</a:t>
             </a:r>
           </a:p>
         </p:txBody>
@@ -27322,6 +26843,7 @@
           <a:lstStyle xmlns:a="http://schemas.openxmlformats.org/drawingml/2006/main"/>
           <a:p xmlns:a="http://schemas.openxmlformats.org/drawingml/2006/main">
             <a:pPr algn="ctr">
+              <a:buNone/>
               <a:defRPr sz="1500" b="1">
                 <a:solidFill>
                   <a:srgbClr val="48CAE4"/>
@@ -27461,6 +26983,7 @@
           <a:lstStyle xmlns:a="http://schemas.openxmlformats.org/drawingml/2006/main"/>
           <a:p xmlns:a="http://schemas.openxmlformats.org/drawingml/2006/main">
             <a:pPr algn="l">
+              <a:buNone/>
               <a:defRPr sz="1050" b="1">
                 <a:solidFill>
                   <a:srgbClr val="48CAE4"/>
@@ -27518,6 +27041,7 @@
           <a:lstStyle xmlns:a="http://schemas.openxmlformats.org/drawingml/2006/main"/>
           <a:p xmlns:a="http://schemas.openxmlformats.org/drawingml/2006/main">
             <a:pPr algn="l">
+              <a:buNone/>
               <a:defRPr sz="2925" b="1">
                 <a:solidFill>
                   <a:srgbClr val="F4F7FB"/>
@@ -27536,7 +27060,7 @@
                 <a:ea typeface="DejaVu Sans"/>
                 <a:cs typeface="DejaVu Sans"/>
               </a:rPr>
-              <a:t>Безопасный цикл рекомендаций</a:t>
+              <a:t>Активный выбор: прогноз и неопределённость</a:t>
             </a:r>
           </a:p>
         </p:txBody>
@@ -27605,6 +27129,7 @@
           <a:lstStyle xmlns:a="http://schemas.openxmlformats.org/drawingml/2006/main"/>
           <a:p xmlns:a="http://schemas.openxmlformats.org/drawingml/2006/main">
             <a:pPr algn="l">
+              <a:buNone/>
               <a:defRPr sz="825" b="1">
                 <a:solidFill>
                   <a:srgbClr val="A6B7C9"/>
@@ -27662,6 +27187,7 @@
           <a:lstStyle xmlns:a="http://schemas.openxmlformats.org/drawingml/2006/main"/>
           <a:p xmlns:a="http://schemas.openxmlformats.org/drawingml/2006/main">
             <a:pPr algn="r">
+              <a:buNone/>
               <a:defRPr sz="900" b="0">
                 <a:solidFill>
                   <a:srgbClr val="A6B7C9"/>
@@ -27781,6 +27307,7 @@
           <a:lstStyle xmlns:a="http://schemas.openxmlformats.org/drawingml/2006/main"/>
           <a:p xmlns:a="http://schemas.openxmlformats.org/drawingml/2006/main">
             <a:pPr algn="l">
+              <a:buNone/>
               <a:defRPr sz="2025" b="1">
                 <a:solidFill>
                   <a:srgbClr val="F4F7FB"/>
@@ -27799,7 +27326,7 @@
                 <a:ea typeface="DejaVu Sans"/>
                 <a:cs typeface="DejaVu Sans"/>
               </a:rPr>
-              <a:t>Ограничения состава и оборудования задают заранее</a:t>
+              <a:t>A: 95 ± 2; B: 90 ± 8; числа условные</a:t>
             </a:r>
           </a:p>
         </p:txBody>
@@ -27900,6 +27427,7 @@
           <a:lstStyle xmlns:a="http://schemas.openxmlformats.org/drawingml/2006/main"/>
           <a:p xmlns:a="http://schemas.openxmlformats.org/drawingml/2006/main">
             <a:pPr algn="l">
+              <a:buNone/>
               <a:defRPr sz="2025" b="0">
                 <a:solidFill>
                   <a:srgbClr val="F4F7FB"/>
@@ -27918,7 +27446,7 @@
                 <a:ea typeface="DejaVu Sans"/>
                 <a:cs typeface="DejaVu Sans"/>
               </a:rPr>
-              <a:t>Рекомендацию утверждает экспериментатор</a:t>
+              <a:t>При score = прогноз + неопределённость: 97 и 98</a:t>
             </a:r>
           </a:p>
         </p:txBody>
@@ -28019,6 +27547,7 @@
           <a:lstStyle xmlns:a="http://schemas.openxmlformats.org/drawingml/2006/main"/>
           <a:p xmlns:a="http://schemas.openxmlformats.org/drawingml/2006/main">
             <a:pPr algn="l">
+              <a:buNone/>
               <a:defRPr sz="2025" b="0">
                 <a:solidFill>
                   <a:srgbClr val="F4F7FB"/>
@@ -28037,7 +27566,7 @@
                 <a:ea typeface="DejaVu Sans"/>
                 <a:cs typeface="DejaVu Sans"/>
               </a:rPr>
-              <a:t>Стоп-критерий и журнал отказов фиксируются</a:t>
+              <a:t>B изучает более неопределённый участок</a:t>
             </a:r>
           </a:p>
         </p:txBody>
@@ -28108,6 +27637,7 @@
           <a:lstStyle xmlns:a="http://schemas.openxmlformats.org/drawingml/2006/main"/>
           <a:p xmlns:a="http://schemas.openxmlformats.org/drawingml/2006/main">
             <a:pPr algn="ctr">
+              <a:buNone/>
               <a:defRPr sz="1500" b="1">
                 <a:solidFill>
                   <a:srgbClr val="48CAE4"/>
@@ -28126,7 +27656,7 @@
                 <a:ea typeface="DejaVu Sans"/>
                 <a:cs typeface="DejaVu Sans"/>
               </a:rPr>
-              <a:t>Модель не должна сама расширять разрешённые пределы</a:t>
+              <a:t>Оцените допустимость и повторите спорный опыт</a:t>
             </a:r>
           </a:p>
         </p:txBody>
@@ -28247,6 +27777,7 @@
           <a:lstStyle xmlns:a="http://schemas.openxmlformats.org/drawingml/2006/main"/>
           <a:p xmlns:a="http://schemas.openxmlformats.org/drawingml/2006/main">
             <a:pPr algn="l">
+              <a:buNone/>
               <a:defRPr sz="1050" b="1">
                 <a:solidFill>
                   <a:srgbClr val="48CAE4"/>
@@ -28304,6 +27835,7 @@
           <a:lstStyle xmlns:a="http://schemas.openxmlformats.org/drawingml/2006/main"/>
           <a:p xmlns:a="http://schemas.openxmlformats.org/drawingml/2006/main">
             <a:pPr algn="l">
+              <a:buNone/>
               <a:defRPr sz="2925" b="1">
                 <a:solidFill>
                   <a:srgbClr val="F4F7FB"/>
@@ -28391,6 +27923,7 @@
           <a:lstStyle xmlns:a="http://schemas.openxmlformats.org/drawingml/2006/main"/>
           <a:p xmlns:a="http://schemas.openxmlformats.org/drawingml/2006/main">
             <a:pPr algn="l">
+              <a:buNone/>
               <a:defRPr sz="825" b="1">
                 <a:solidFill>
                   <a:srgbClr val="A6B7C9"/>
@@ -28448,6 +27981,7 @@
           <a:lstStyle xmlns:a="http://schemas.openxmlformats.org/drawingml/2006/main"/>
           <a:p xmlns:a="http://schemas.openxmlformats.org/drawingml/2006/main">
             <a:pPr algn="r">
+              <a:buNone/>
               <a:defRPr sz="900" b="0">
                 <a:solidFill>
                   <a:srgbClr val="A6B7C9"/>
@@ -28535,6 +28069,7 @@
           <a:lstStyle xmlns:a="http://schemas.openxmlformats.org/drawingml/2006/main"/>
           <a:p xmlns:a="http://schemas.openxmlformats.org/drawingml/2006/main">
             <a:pPr algn="l">
+              <a:buNone/>
               <a:defRPr sz="1800" b="1">
                 <a:solidFill>
                   <a:srgbClr val="F4F7FB"/>
@@ -28622,6 +28157,7 @@
           <a:lstStyle xmlns:a="http://schemas.openxmlformats.org/drawingml/2006/main"/>
           <a:p xmlns:a="http://schemas.openxmlformats.org/drawingml/2006/main">
             <a:pPr algn="l">
+              <a:buNone/>
               <a:defRPr sz="1800" b="0">
                 <a:solidFill>
                   <a:srgbClr val="F4F7FB"/>
@@ -28709,6 +28245,7 @@
           <a:lstStyle xmlns:a="http://schemas.openxmlformats.org/drawingml/2006/main"/>
           <a:p xmlns:a="http://schemas.openxmlformats.org/drawingml/2006/main">
             <a:pPr algn="l">
+              <a:buNone/>
               <a:defRPr sz="1800" b="0">
                 <a:solidFill>
                   <a:srgbClr val="F4F7FB"/>
@@ -28830,6 +28367,7 @@
           <a:lstStyle xmlns:a="http://schemas.openxmlformats.org/drawingml/2006/main"/>
           <a:p xmlns:a="http://schemas.openxmlformats.org/drawingml/2006/main">
             <a:pPr algn="ctr">
+              <a:buNone/>
               <a:defRPr sz="1350" b="1">
                 <a:solidFill>
                   <a:srgbClr val="48CAE4"/>
@@ -28887,6 +28425,7 @@
           <a:lstStyle xmlns:a="http://schemas.openxmlformats.org/drawingml/2006/main"/>
           <a:p xmlns:a="http://schemas.openxmlformats.org/drawingml/2006/main">
             <a:pPr algn="ctr">
+              <a:buNone/>
               <a:defRPr sz="2850" b="1">
                 <a:solidFill>
                   <a:srgbClr val="F4F7FB"/>
@@ -28976,6 +28515,7 @@
           <a:lstStyle xmlns:a="http://schemas.openxmlformats.org/drawingml/2006/main"/>
           <a:p xmlns:a="http://schemas.openxmlformats.org/drawingml/2006/main">
             <a:pPr algn="ctr">
+              <a:buNone/>
               <a:defRPr sz="1350" b="1">
                 <a:solidFill>
                   <a:srgbClr val="C4A7FF"/>
@@ -29115,6 +28655,7 @@
           <a:lstStyle xmlns:a="http://schemas.openxmlformats.org/drawingml/2006/main"/>
           <a:p xmlns:a="http://schemas.openxmlformats.org/drawingml/2006/main">
             <a:pPr algn="l">
+              <a:buNone/>
               <a:defRPr sz="1050" b="1">
                 <a:solidFill>
                   <a:srgbClr val="48CAE4"/>
@@ -29172,6 +28713,7 @@
           <a:lstStyle xmlns:a="http://schemas.openxmlformats.org/drawingml/2006/main"/>
           <a:p xmlns:a="http://schemas.openxmlformats.org/drawingml/2006/main">
             <a:pPr algn="l">
+              <a:buNone/>
               <a:defRPr sz="2925" b="1">
                 <a:solidFill>
                   <a:srgbClr val="F4F7FB"/>
@@ -29190,7 +28732,7 @@
                 <a:ea typeface="DejaVu Sans"/>
                 <a:cs typeface="DejaVu Sans"/>
               </a:rPr>
-              <a:t>Нейронные сети: обзор</a:t>
+              <a:t>Нейронная сеть вычисляет прогноз</a:t>
             </a:r>
           </a:p>
         </p:txBody>
@@ -29259,6 +28801,7 @@
           <a:lstStyle xmlns:a="http://schemas.openxmlformats.org/drawingml/2006/main"/>
           <a:p xmlns:a="http://schemas.openxmlformats.org/drawingml/2006/main">
             <a:pPr algn="l">
+              <a:buNone/>
               <a:defRPr sz="825" b="1">
                 <a:solidFill>
                   <a:srgbClr val="A6B7C9"/>
@@ -29316,6 +28859,7 @@
           <a:lstStyle xmlns:a="http://schemas.openxmlformats.org/drawingml/2006/main"/>
           <a:p xmlns:a="http://schemas.openxmlformats.org/drawingml/2006/main">
             <a:pPr algn="r">
+              <a:buNone/>
               <a:defRPr sz="900" b="0">
                 <a:solidFill>
                   <a:srgbClr val="A6B7C9"/>
@@ -29373,6 +28917,7 @@
           <a:lstStyle xmlns:a="http://schemas.openxmlformats.org/drawingml/2006/main"/>
           <a:p xmlns:a="http://schemas.openxmlformats.org/drawingml/2006/main">
             <a:pPr algn="l">
+              <a:buNone/>
               <a:defRPr sz="2400" b="1">
                 <a:solidFill>
                   <a:srgbClr val="48CAE4"/>
@@ -29430,6 +28975,7 @@
           <a:lstStyle xmlns:a="http://schemas.openxmlformats.org/drawingml/2006/main"/>
           <a:p xmlns:a="http://schemas.openxmlformats.org/drawingml/2006/main">
             <a:pPr algn="l">
+              <a:buNone/>
               <a:defRPr sz="2025" b="1">
                 <a:solidFill>
                   <a:srgbClr val="F4F7FB"/>
@@ -29448,7 +28994,7 @@
                 <a:ea typeface="DejaVu Sans"/>
                 <a:cs typeface="DejaVu Sans"/>
               </a:rPr>
-              <a:t>Работают с изображениями, спектрами и графами</a:t>
+              <a:t>Скрытый слой: h = ReLU(W₁x + b₁)</a:t>
             </a:r>
           </a:p>
         </p:txBody>
@@ -29517,6 +29063,7 @@
           <a:lstStyle xmlns:a="http://schemas.openxmlformats.org/drawingml/2006/main"/>
           <a:p xmlns:a="http://schemas.openxmlformats.org/drawingml/2006/main">
             <a:pPr algn="l">
+              <a:buNone/>
               <a:defRPr sz="2400" b="1">
                 <a:solidFill>
                   <a:srgbClr val="80ED99"/>
@@ -29574,6 +29121,7 @@
           <a:lstStyle xmlns:a="http://schemas.openxmlformats.org/drawingml/2006/main"/>
           <a:p xmlns:a="http://schemas.openxmlformats.org/drawingml/2006/main">
             <a:pPr algn="l">
+              <a:buNone/>
               <a:defRPr sz="2025" b="0">
                 <a:solidFill>
                   <a:srgbClr val="F4F7FB"/>
@@ -29592,7 +29140,7 @@
                 <a:ea typeface="DejaVu Sans"/>
                 <a:cs typeface="DejaVu Sans"/>
               </a:rPr>
-              <a:t>Зависят от объёма и происхождения обучающих данных</a:t>
+              <a:t>Выход регрессии: ŷ = W₂h + b₂</a:t>
             </a:r>
           </a:p>
         </p:txBody>
@@ -29661,6 +29209,7 @@
           <a:lstStyle xmlns:a="http://schemas.openxmlformats.org/drawingml/2006/main"/>
           <a:p xmlns:a="http://schemas.openxmlformats.org/drawingml/2006/main">
             <a:pPr algn="l">
+              <a:buNone/>
               <a:defRPr sz="2400" b="1">
                 <a:solidFill>
                   <a:srgbClr val="C4A7FF"/>
@@ -29718,6 +29267,7 @@
           <a:lstStyle xmlns:a="http://schemas.openxmlformats.org/drawingml/2006/main"/>
           <a:p xmlns:a="http://schemas.openxmlformats.org/drawingml/2006/main">
             <a:pPr algn="l">
+              <a:buNone/>
               <a:defRPr sz="2025" b="0">
                 <a:solidFill>
                   <a:srgbClr val="F4F7FB"/>
@@ -29736,7 +29286,7 @@
                 <a:ea typeface="DejaVu Sans"/>
                 <a:cs typeface="DejaVu Sans"/>
               </a:rPr>
-              <a:t>Сравнение со строгим baseline обязательно</a:t>
+              <a:t>Веса обновляются по градиенту функции потерь</a:t>
             </a:r>
           </a:p>
         </p:txBody>
@@ -29837,6 +29387,7 @@
           <a:lstStyle xmlns:a="http://schemas.openxmlformats.org/drawingml/2006/main"/>
           <a:p xmlns:a="http://schemas.openxmlformats.org/drawingml/2006/main">
             <a:pPr algn="ctr">
+              <a:buNone/>
               <a:defRPr sz="1500" b="1">
                 <a:solidFill>
                   <a:srgbClr val="48CAE4"/>
@@ -29855,7 +29406,7 @@
                 <a:ea typeface="DejaVu Sans"/>
                 <a:cs typeface="DejaVu Sans"/>
               </a:rPr>
-              <a:t>Тысячи пикселей не равны тысячам независимых партий</a:t>
+              <a:t>Нелинейность даёт гибкость и риск переобучения</a:t>
             </a:r>
           </a:p>
         </p:txBody>
@@ -29976,6 +29527,7 @@
           <a:lstStyle xmlns:a="http://schemas.openxmlformats.org/drawingml/2006/main"/>
           <a:p xmlns:a="http://schemas.openxmlformats.org/drawingml/2006/main">
             <a:pPr algn="l">
+              <a:buNone/>
               <a:defRPr sz="1050" b="1">
                 <a:solidFill>
                   <a:srgbClr val="48CAE4"/>
@@ -30033,6 +29585,7 @@
           <a:lstStyle xmlns:a="http://schemas.openxmlformats.org/drawingml/2006/main"/>
           <a:p xmlns:a="http://schemas.openxmlformats.org/drawingml/2006/main">
             <a:pPr algn="l">
+              <a:buNone/>
               <a:defRPr sz="2925" b="1">
                 <a:solidFill>
                   <a:srgbClr val="F4F7FB"/>
@@ -30051,7 +29604,7 @@
                 <a:ea typeface="DejaVu Sans"/>
                 <a:cs typeface="DejaVu Sans"/>
               </a:rPr>
-              <a:t>Когда предварительное обучение полезно</a:t>
+              <a:t>Малая сеть для RGB: 3 → 8 → 1</a:t>
             </a:r>
           </a:p>
         </p:txBody>
@@ -30120,6 +29673,7 @@
           <a:lstStyle xmlns:a="http://schemas.openxmlformats.org/drawingml/2006/main"/>
           <a:p xmlns:a="http://schemas.openxmlformats.org/drawingml/2006/main">
             <a:pPr algn="l">
+              <a:buNone/>
               <a:defRPr sz="825" b="1">
                 <a:solidFill>
                   <a:srgbClr val="A6B7C9"/>
@@ -30177,6 +29731,7 @@
           <a:lstStyle xmlns:a="http://schemas.openxmlformats.org/drawingml/2006/main"/>
           <a:p xmlns:a="http://schemas.openxmlformats.org/drawingml/2006/main">
             <a:pPr algn="r">
+              <a:buNone/>
               <a:defRPr sz="900" b="0">
                 <a:solidFill>
                   <a:srgbClr val="A6B7C9"/>
@@ -30296,6 +29851,7 @@
           <a:lstStyle xmlns:a="http://schemas.openxmlformats.org/drawingml/2006/main"/>
           <a:p xmlns:a="http://schemas.openxmlformats.org/drawingml/2006/main">
             <a:pPr algn="l">
+              <a:buNone/>
               <a:defRPr sz="2850" b="1">
                 <a:solidFill>
                   <a:srgbClr val="48CAE4"/>
@@ -30353,6 +29909,7 @@
           <a:lstStyle xmlns:a="http://schemas.openxmlformats.org/drawingml/2006/main"/>
           <a:p xmlns:a="http://schemas.openxmlformats.org/drawingml/2006/main">
             <a:pPr algn="l">
+              <a:buNone/>
               <a:defRPr sz="2025" b="1">
                 <a:solidFill>
                   <a:srgbClr val="F4F7FB"/>
@@ -30371,7 +29928,7 @@
                 <a:ea typeface="DejaVu Sans"/>
                 <a:cs typeface="DejaVu Sans"/>
               </a:rPr>
-              <a:t>Можно использовать представление из другой задачи</a:t>
+              <a:t>Три входа и восемь скрытых нейронов</a:t>
             </a:r>
           </a:p>
         </p:txBody>
@@ -30472,6 +30029,7 @@
           <a:lstStyle xmlns:a="http://schemas.openxmlformats.org/drawingml/2006/main"/>
           <a:p xmlns:a="http://schemas.openxmlformats.org/drawingml/2006/main">
             <a:pPr algn="l">
+              <a:buNone/>
               <a:defRPr sz="2850" b="1">
                 <a:solidFill>
                   <a:srgbClr val="80ED99"/>
@@ -30529,6 +30087,7 @@
           <a:lstStyle xmlns:a="http://schemas.openxmlformats.org/drawingml/2006/main"/>
           <a:p xmlns:a="http://schemas.openxmlformats.org/drawingml/2006/main">
             <a:pPr algn="l">
+              <a:buNone/>
               <a:defRPr sz="2025" b="0">
                 <a:solidFill>
                   <a:srgbClr val="F4F7FB"/>
@@ -30547,7 +30106,7 @@
                 <a:ea typeface="DejaVu Sans"/>
                 <a:cs typeface="DejaVu Sans"/>
               </a:rPr>
-              <a:t>Нужно проверить происхождение данных и весов</a:t>
+              <a:t>(3 + 1) × 8 + (8 + 1) = 41 параметр</a:t>
             </a:r>
           </a:p>
         </p:txBody>
@@ -30648,6 +30207,7 @@
           <a:lstStyle xmlns:a="http://schemas.openxmlformats.org/drawingml/2006/main"/>
           <a:p xmlns:a="http://schemas.openxmlformats.org/drawingml/2006/main">
             <a:pPr algn="l">
+              <a:buNone/>
               <a:defRPr sz="2850" b="1">
                 <a:solidFill>
                   <a:srgbClr val="C4A7FF"/>
@@ -30705,6 +30265,7 @@
           <a:lstStyle xmlns:a="http://schemas.openxmlformats.org/drawingml/2006/main"/>
           <a:p xmlns:a="http://schemas.openxmlformats.org/drawingml/2006/main">
             <a:pPr algn="l">
+              <a:buNone/>
               <a:defRPr sz="2025" b="0">
                 <a:solidFill>
                   <a:srgbClr val="F4F7FB"/>
@@ -30723,7 +30284,7 @@
                 <a:ea typeface="DejaVu Sans"/>
                 <a:cs typeface="DejaVu Sans"/>
               </a:rPr>
-              <a:t>Финальный тест не используют для адаптации</a:t>
+              <a:t>Масштаб и подбор эпох учатся только на train</a:t>
             </a:r>
           </a:p>
         </p:txBody>
@@ -30794,6 +30355,7 @@
           <a:lstStyle xmlns:a="http://schemas.openxmlformats.org/drawingml/2006/main"/>
           <a:p xmlns:a="http://schemas.openxmlformats.org/drawingml/2006/main">
             <a:pPr algn="ctr">
+              <a:buNone/>
               <a:defRPr sz="1500" b="1">
                 <a:solidFill>
                   <a:srgbClr val="48CAE4"/>
@@ -30812,7 +30374,7 @@
                 <a:ea typeface="DejaVu Sans"/>
                 <a:cs typeface="DejaVu Sans"/>
               </a:rPr>
-              <a:t>При переносе на новый прибор требуется отдельная проверка</a:t>
+              <a:t>На небольшой таблице Ridge может быть устойчивее</a:t>
             </a:r>
           </a:p>
         </p:txBody>
@@ -30933,6 +30495,7 @@
           <a:lstStyle xmlns:a="http://schemas.openxmlformats.org/drawingml/2006/main"/>
           <a:p xmlns:a="http://schemas.openxmlformats.org/drawingml/2006/main">
             <a:pPr algn="l">
+              <a:buNone/>
               <a:defRPr sz="1050" b="1">
                 <a:solidFill>
                   <a:srgbClr val="48CAE4"/>
@@ -30990,6 +30553,7 @@
           <a:lstStyle xmlns:a="http://schemas.openxmlformats.org/drawingml/2006/main"/>
           <a:p xmlns:a="http://schemas.openxmlformats.org/drawingml/2006/main">
             <a:pPr algn="l">
+              <a:buNone/>
               <a:defRPr sz="2925" b="1">
                 <a:solidFill>
                   <a:srgbClr val="F4F7FB"/>
@@ -31008,7 +30572,7 @@
                 <a:ea typeface="DejaVu Sans"/>
                 <a:cs typeface="DejaVu Sans"/>
               </a:rPr>
-              <a:t>Проверяемое предложение опыта</a:t>
+              <a:t>Kaggle: липофильность молекул</a:t>
             </a:r>
           </a:p>
         </p:txBody>
@@ -31077,6 +30641,7 @@
           <a:lstStyle xmlns:a="http://schemas.openxmlformats.org/drawingml/2006/main"/>
           <a:p xmlns:a="http://schemas.openxmlformats.org/drawingml/2006/main">
             <a:pPr algn="l">
+              <a:buNone/>
               <a:defRPr sz="825" b="1">
                 <a:solidFill>
                   <a:srgbClr val="A6B7C9"/>
@@ -31134,6 +30699,7 @@
           <a:lstStyle xmlns:a="http://schemas.openxmlformats.org/drawingml/2006/main"/>
           <a:p xmlns:a="http://schemas.openxmlformats.org/drawingml/2006/main">
             <a:pPr algn="r">
+              <a:buNone/>
               <a:defRPr sz="900" b="0">
                 <a:solidFill>
                   <a:srgbClr val="A6B7C9"/>
@@ -31253,6 +30819,7 @@
           <a:lstStyle xmlns:a="http://schemas.openxmlformats.org/drawingml/2006/main"/>
           <a:p xmlns:a="http://schemas.openxmlformats.org/drawingml/2006/main">
             <a:pPr algn="l">
+              <a:buNone/>
               <a:defRPr sz="1875" b="0">
                 <a:solidFill>
                   <a:srgbClr val="F4F7FB"/>
@@ -31271,7 +30838,7 @@
                 <a:ea typeface="DejaVu Sans"/>
                 <a:cs typeface="DejaVu Sans"/>
               </a:rPr>
-              <a:t>Укажите одну рецептуру в допустимых пределах</a:t>
+              <a:t>Цель: экспериментальный log D при pH 7,4</a:t>
             </a:r>
           </a:p>
         </p:txBody>
@@ -31340,6 +30907,7 @@
           <a:lstStyle xmlns:a="http://schemas.openxmlformats.org/drawingml/2006/main"/>
           <a:p xmlns:a="http://schemas.openxmlformats.org/drawingml/2006/main">
             <a:pPr algn="l">
+              <a:buNone/>
               <a:defRPr sz="1875" b="0">
                 <a:solidFill>
                   <a:srgbClr val="F4F7FB"/>
@@ -31358,7 +30926,7 @@
                 <a:ea typeface="DejaVu Sans"/>
                 <a:cs typeface="DejaVu Sans"/>
               </a:rPr>
-              <a:t>Назовите предсказание и причину выбора</a:t>
+              <a:t>Вход: молекулярные дескрипторы и структура</a:t>
             </a:r>
           </a:p>
         </p:txBody>
@@ -31427,6 +30995,7 @@
           <a:lstStyle xmlns:a="http://schemas.openxmlformats.org/drawingml/2006/main"/>
           <a:p xmlns:a="http://schemas.openxmlformats.org/drawingml/2006/main">
             <a:pPr algn="l">
+              <a:buNone/>
               <a:defRPr sz="1875" b="0">
                 <a:solidFill>
                   <a:srgbClr val="F4F7FB"/>
@@ -31445,7 +31014,7 @@
                 <a:ea typeface="DejaVu Sans"/>
                 <a:cs typeface="DejaVu Sans"/>
               </a:rPr>
-              <a:t>Назначьте измерение и критерий опровержения</a:t>
+              <a:t>Ноутбук сравнивает SVR, Keras и модели поверх неё</a:t>
             </a:r>
           </a:p>
         </p:txBody>
@@ -31484,6 +31053,7 @@
           <a:lstStyle xmlns:a="http://schemas.openxmlformats.org/drawingml/2006/main"/>
           <a:p xmlns:a="http://schemas.openxmlformats.org/drawingml/2006/main">
             <a:pPr algn="l">
+              <a:buNone/>
               <a:defRPr sz="1275" b="1">
                 <a:solidFill>
                   <a:srgbClr val="48CAE4"/>
@@ -31541,6 +31111,7 @@
           <a:lstStyle xmlns:a="http://schemas.openxmlformats.org/drawingml/2006/main"/>
           <a:p xmlns:a="http://schemas.openxmlformats.org/drawingml/2006/main">
             <a:pPr algn="l">
+              <a:buNone/>
               <a:defRPr sz="2025" b="1">
                 <a:solidFill>
                   <a:srgbClr val="F4F7FB"/>
@@ -31559,7 +31130,7 @@
                 <a:ea typeface="DejaVu Sans"/>
                 <a:cs typeface="DejaVu Sans"/>
               </a:rPr>
-              <a:t>Эксперимент должен быть возможен и информативен</a:t>
+              <a:t>Новая химическая серия — отдельный тест переноса</a:t>
             </a:r>
           </a:p>
         </p:txBody>
@@ -31680,6 +31251,7 @@
           <a:lstStyle xmlns:a="http://schemas.openxmlformats.org/drawingml/2006/main"/>
           <a:p xmlns:a="http://schemas.openxmlformats.org/drawingml/2006/main">
             <a:pPr algn="l">
+              <a:buNone/>
               <a:defRPr sz="1050" b="1">
                 <a:solidFill>
                   <a:srgbClr val="48CAE4"/>
@@ -31737,6 +31309,7 @@
           <a:lstStyle xmlns:a="http://schemas.openxmlformats.org/drawingml/2006/main"/>
           <a:p xmlns:a="http://schemas.openxmlformats.org/drawingml/2006/main">
             <a:pPr algn="l">
+              <a:buNone/>
               <a:defRPr sz="2925" b="1">
                 <a:solidFill>
                   <a:srgbClr val="F4F7FB"/>
@@ -31755,7 +31328,7 @@
                 <a:ea typeface="DejaVu Sans"/>
                 <a:cs typeface="DejaVu Sans"/>
               </a:rPr>
-              <a:t>Мини-проект: сравнение</a:t>
+              <a:t>Утечка: преобразование до разбиения</a:t>
             </a:r>
           </a:p>
         </p:txBody>
@@ -31824,6 +31397,7 @@
           <a:lstStyle xmlns:a="http://schemas.openxmlformats.org/drawingml/2006/main"/>
           <a:p xmlns:a="http://schemas.openxmlformats.org/drawingml/2006/main">
             <a:pPr algn="l">
+              <a:buNone/>
               <a:defRPr sz="825" b="1">
                 <a:solidFill>
                   <a:srgbClr val="A6B7C9"/>
@@ -31881,6 +31455,7 @@
           <a:lstStyle xmlns:a="http://schemas.openxmlformats.org/drawingml/2006/main"/>
           <a:p xmlns:a="http://schemas.openxmlformats.org/drawingml/2006/main">
             <a:pPr algn="r">
+              <a:buNone/>
               <a:defRPr sz="900" b="0">
                 <a:solidFill>
                   <a:srgbClr val="A6B7C9"/>
@@ -32000,6 +31575,7 @@
           <a:lstStyle xmlns:a="http://schemas.openxmlformats.org/drawingml/2006/main"/>
           <a:p xmlns:a="http://schemas.openxmlformats.org/drawingml/2006/main">
             <a:pPr algn="l">
+              <a:buNone/>
               <a:defRPr sz="2025" b="1">
                 <a:solidFill>
                   <a:srgbClr val="F4F7FB"/>
@@ -32018,7 +31594,7 @@
                 <a:ea typeface="DejaVu Sans"/>
                 <a:cs typeface="DejaVu Sans"/>
               </a:rPr>
-              <a:t>Baseline + две модели при одинаковых группах</a:t>
+              <a:t>StandardScaler.fit на всех дескрипторах</a:t>
             </a:r>
           </a:p>
         </p:txBody>
@@ -32119,6 +31695,7 @@
           <a:lstStyle xmlns:a="http://schemas.openxmlformats.org/drawingml/2006/main"/>
           <a:p xmlns:a="http://schemas.openxmlformats.org/drawingml/2006/main">
             <a:pPr algn="l">
+              <a:buNone/>
               <a:defRPr sz="2025" b="0">
                 <a:solidFill>
                   <a:srgbClr val="F4F7FB"/>
@@ -32137,7 +31714,7 @@
                 <a:ea typeface="DejaVu Sans"/>
                 <a:cs typeface="DejaVu Sans"/>
               </a:rPr>
-              <a:t>Ошибка на новых партиях и график промахов</a:t>
+              <a:t>KernelPCA.fit тоже до train_test_split</a:t>
             </a:r>
           </a:p>
         </p:txBody>
@@ -32238,6 +31815,7 @@
           <a:lstStyle xmlns:a="http://schemas.openxmlformats.org/drawingml/2006/main"/>
           <a:p xmlns:a="http://schemas.openxmlformats.org/drawingml/2006/main">
             <a:pPr algn="l">
+              <a:buNone/>
               <a:defRPr sz="2025" b="0">
                 <a:solidFill>
                   <a:srgbClr val="F4F7FB"/>
@@ -32256,7 +31834,7 @@
                 <a:ea typeface="DejaVu Sans"/>
                 <a:cs typeface="DejaVu Sans"/>
               </a:rPr>
-              <a:t>Область применимости и цена ошибки</a:t>
+              <a:t>Тестовые X участвуют в подготовке модели</a:t>
             </a:r>
           </a:p>
         </p:txBody>
@@ -32327,6 +31905,7 @@
           <a:lstStyle xmlns:a="http://schemas.openxmlformats.org/drawingml/2006/main"/>
           <a:p xmlns:a="http://schemas.openxmlformats.org/drawingml/2006/main">
             <a:pPr algn="ctr">
+              <a:buNone/>
               <a:defRPr sz="1500" b="1">
                 <a:solidFill>
                   <a:srgbClr val="48CAE4"/>
@@ -32345,7 +31924,7 @@
                 <a:ea typeface="DejaVu Sans"/>
                 <a:cs typeface="DejaVu Sans"/>
               </a:rPr>
-              <a:t>Если партий мало, честно ограничьте заключение</a:t>
+              <a:t>Преобразования без y также влияют на честность теста</a:t>
             </a:r>
           </a:p>
         </p:txBody>
@@ -32466,6 +32045,7 @@
           <a:lstStyle xmlns:a="http://schemas.openxmlformats.org/drawingml/2006/main"/>
           <a:p xmlns:a="http://schemas.openxmlformats.org/drawingml/2006/main">
             <a:pPr algn="l">
+              <a:buNone/>
               <a:defRPr sz="1050" b="1">
                 <a:solidFill>
                   <a:srgbClr val="48CAE4"/>
@@ -32523,6 +32103,7 @@
           <a:lstStyle xmlns:a="http://schemas.openxmlformats.org/drawingml/2006/main"/>
           <a:p xmlns:a="http://schemas.openxmlformats.org/drawingml/2006/main">
             <a:pPr algn="l">
+              <a:buNone/>
               <a:defRPr sz="2925" b="1">
                 <a:solidFill>
                   <a:srgbClr val="F4F7FB"/>
@@ -32541,7 +32122,7 @@
                 <a:ea typeface="DejaVu Sans"/>
                 <a:cs typeface="DejaVu Sans"/>
               </a:rPr>
-              <a:t>Мини-проект: новый опыт</a:t>
+              <a:t>Вторая утечка и исправленный порядок</a:t>
             </a:r>
           </a:p>
         </p:txBody>
@@ -32610,6 +32191,7 @@
           <a:lstStyle xmlns:a="http://schemas.openxmlformats.org/drawingml/2006/main"/>
           <a:p xmlns:a="http://schemas.openxmlformats.org/drawingml/2006/main">
             <a:pPr algn="l">
+              <a:buNone/>
               <a:defRPr sz="825" b="1">
                 <a:solidFill>
                   <a:srgbClr val="A6B7C9"/>
@@ -32667,6 +32249,7 @@
           <a:lstStyle xmlns:a="http://schemas.openxmlformats.org/drawingml/2006/main"/>
           <a:p xmlns:a="http://schemas.openxmlformats.org/drawingml/2006/main">
             <a:pPr algn="r">
+              <a:buNone/>
               <a:defRPr sz="900" b="0">
                 <a:solidFill>
                   <a:srgbClr val="A6B7C9"/>
@@ -32724,6 +32307,7 @@
           <a:lstStyle xmlns:a="http://schemas.openxmlformats.org/drawingml/2006/main"/>
           <a:p xmlns:a="http://schemas.openxmlformats.org/drawingml/2006/main">
             <a:pPr algn="l">
+              <a:buNone/>
               <a:defRPr sz="3825" b="1">
                 <a:solidFill>
                   <a:srgbClr val="48CAE4"/>
@@ -32811,6 +32395,7 @@
           <a:lstStyle xmlns:a="http://schemas.openxmlformats.org/drawingml/2006/main"/>
           <a:p xmlns:a="http://schemas.openxmlformats.org/drawingml/2006/main">
             <a:pPr algn="l">
+              <a:buNone/>
               <a:defRPr sz="1875" b="1">
                 <a:solidFill>
                   <a:srgbClr val="F4F7FB"/>
@@ -32829,7 +32414,7 @@
                 <a:ea typeface="DejaVu Sans"/>
                 <a:cs typeface="DejaVu Sans"/>
               </a:rPr>
-              <a:t>Рецептура, ожидаемое свойство, причина</a:t>
+              <a:t>После split снова объединены X_train и X_test</a:t>
             </a:r>
           </a:p>
         </p:txBody>
@@ -32868,6 +32453,7 @@
           <a:lstStyle xmlns:a="http://schemas.openxmlformats.org/drawingml/2006/main"/>
           <a:p xmlns:a="http://schemas.openxmlformats.org/drawingml/2006/main">
             <a:pPr algn="l">
+              <a:buNone/>
               <a:defRPr sz="3825" b="1">
                 <a:solidFill>
                   <a:srgbClr val="80ED99"/>
@@ -32955,6 +32541,7 @@
           <a:lstStyle xmlns:a="http://schemas.openxmlformats.org/drawingml/2006/main"/>
           <a:p xmlns:a="http://schemas.openxmlformats.org/drawingml/2006/main">
             <a:pPr algn="l">
+              <a:buNone/>
               <a:defRPr sz="1875" b="0">
                 <a:solidFill>
                   <a:srgbClr val="F4F7FB"/>
@@ -32973,7 +32560,7 @@
                 <a:ea typeface="DejaVu Sans"/>
                 <a:cs typeface="DejaVu Sans"/>
               </a:rPr>
-              <a:t>План независимых и технических повторов</a:t>
+              <a:t>Scaler и KernelPCA обучены на объединении</a:t>
             </a:r>
           </a:p>
         </p:txBody>
@@ -33012,6 +32599,7 @@
           <a:lstStyle xmlns:a="http://schemas.openxmlformats.org/drawingml/2006/main"/>
           <a:p xmlns:a="http://schemas.openxmlformats.org/drawingml/2006/main">
             <a:pPr algn="l">
+              <a:buNone/>
               <a:defRPr sz="3825" b="1">
                 <a:solidFill>
                   <a:srgbClr val="C4A7FF"/>
@@ -33099,6 +32687,7 @@
           <a:lstStyle xmlns:a="http://schemas.openxmlformats.org/drawingml/2006/main"/>
           <a:p xmlns:a="http://schemas.openxmlformats.org/drawingml/2006/main">
             <a:pPr algn="l">
+              <a:buNone/>
               <a:defRPr sz="1875" b="0">
                 <a:solidFill>
                   <a:srgbClr val="F4F7FB"/>
@@ -33117,7 +32706,7 @@
                 <a:ea typeface="DejaVu Sans"/>
                 <a:cs typeface="DejaVu Sans"/>
               </a:rPr>
-              <a:t>Действие при несогласии результата с моделью</a:t>
+              <a:t>Сначала split, затем каждый fit внутри CV на train</a:t>
             </a:r>
           </a:p>
         </p:txBody>
@@ -33188,6 +32777,7 @@
           <a:lstStyle xmlns:a="http://schemas.openxmlformats.org/drawingml/2006/main"/>
           <a:p xmlns:a="http://schemas.openxmlformats.org/drawingml/2006/main">
             <a:pPr algn="ctr">
+              <a:buNone/>
               <a:defRPr sz="1500" b="1">
                 <a:solidFill>
                   <a:srgbClr val="48CAE4"/>
@@ -33206,7 +32796,7 @@
                 <a:ea typeface="DejaVu Sans"/>
                 <a:cs typeface="DejaVu Sans"/>
               </a:rPr>
-              <a:t>Не выбирайте опыт по прогнозу за пределами безопасной области</a:t>
+              <a:t>Удержанный тест оценивают однократно после выбора</a:t>
             </a:r>
           </a:p>
         </p:txBody>
@@ -33327,6 +32917,7 @@
           <a:lstStyle xmlns:a="http://schemas.openxmlformats.org/drawingml/2006/main"/>
           <a:p xmlns:a="http://schemas.openxmlformats.org/drawingml/2006/main">
             <a:pPr algn="l">
+              <a:buNone/>
               <a:defRPr sz="1050" b="1">
                 <a:solidFill>
                   <a:srgbClr val="48CAE4"/>
@@ -33384,6 +32975,7 @@
           <a:lstStyle xmlns:a="http://schemas.openxmlformats.org/drawingml/2006/main"/>
           <a:p xmlns:a="http://schemas.openxmlformats.org/drawingml/2006/main">
             <a:pPr algn="l">
+              <a:buNone/>
               <a:defRPr sz="2925" b="1">
                 <a:solidFill>
                   <a:srgbClr val="F4F7FB"/>
@@ -33402,7 +32994,7 @@
                 <a:ea typeface="DejaVu Sans"/>
                 <a:cs typeface="DejaVu Sans"/>
               </a:rPr>
-              <a:t>Примеры по направлениям</a:t>
+              <a:t>RL: постановка для процесса во времени</a:t>
             </a:r>
           </a:p>
         </p:txBody>
@@ -33471,6 +33063,7 @@
           <a:lstStyle xmlns:a="http://schemas.openxmlformats.org/drawingml/2006/main"/>
           <a:p xmlns:a="http://schemas.openxmlformats.org/drawingml/2006/main">
             <a:pPr algn="l">
+              <a:buNone/>
               <a:defRPr sz="825" b="1">
                 <a:solidFill>
                   <a:srgbClr val="A6B7C9"/>
@@ -33528,6 +33121,7 @@
           <a:lstStyle xmlns:a="http://schemas.openxmlformats.org/drawingml/2006/main"/>
           <a:p xmlns:a="http://schemas.openxmlformats.org/drawingml/2006/main">
             <a:pPr algn="r">
+              <a:buNone/>
               <a:defRPr sz="900" b="0">
                 <a:solidFill>
                   <a:srgbClr val="A6B7C9"/>
@@ -33585,6 +33179,7 @@
           <a:lstStyle xmlns:a="http://schemas.openxmlformats.org/drawingml/2006/main"/>
           <a:p xmlns:a="http://schemas.openxmlformats.org/drawingml/2006/main">
             <a:pPr algn="l">
+              <a:buNone/>
               <a:defRPr sz="2400" b="1">
                 <a:solidFill>
                   <a:srgbClr val="48CAE4"/>
@@ -33642,6 +33237,7 @@
           <a:lstStyle xmlns:a="http://schemas.openxmlformats.org/drawingml/2006/main"/>
           <a:p xmlns:a="http://schemas.openxmlformats.org/drawingml/2006/main">
             <a:pPr algn="l">
+              <a:buNone/>
               <a:defRPr sz="2025" b="1">
                 <a:solidFill>
                   <a:srgbClr val="F4F7FB"/>
@@ -33660,7 +33256,7 @@
                 <a:ea typeface="DejaVu Sans"/>
                 <a:cs typeface="DejaVu Sans"/>
               </a:rPr>
-              <a:t>Наноэмульсии: размер и стабильность</a:t>
+              <a:t>Состояние: доступная сейчас T и показания датчика</a:t>
             </a:r>
           </a:p>
         </p:txBody>
@@ -33729,6 +33325,7 @@
           <a:lstStyle xmlns:a="http://schemas.openxmlformats.org/drawingml/2006/main"/>
           <a:p xmlns:a="http://schemas.openxmlformats.org/drawingml/2006/main">
             <a:pPr algn="l">
+              <a:buNone/>
               <a:defRPr sz="2400" b="1">
                 <a:solidFill>
                   <a:srgbClr val="80ED99"/>
@@ -33786,6 +33383,7 @@
           <a:lstStyle xmlns:a="http://schemas.openxmlformats.org/drawingml/2006/main"/>
           <a:p xmlns:a="http://schemas.openxmlformats.org/drawingml/2006/main">
             <a:pPr algn="l">
+              <a:buNone/>
               <a:defRPr sz="2025" b="0">
                 <a:solidFill>
                   <a:srgbClr val="F4F7FB"/>
@@ -33804,7 +33402,7 @@
                 <a:ea typeface="DejaVu Sans"/>
                 <a:cs typeface="DejaVu Sans"/>
               </a:rPr>
-              <a:t>SiO₂ и магнитные частицы: свойство после синтеза</a:t>
+              <a:t>Действие: разрешённое изменение мощности нагрева</a:t>
             </a:r>
           </a:p>
         </p:txBody>
@@ -33873,6 +33471,7 @@
           <a:lstStyle xmlns:a="http://schemas.openxmlformats.org/drawingml/2006/main"/>
           <a:p xmlns:a="http://schemas.openxmlformats.org/drawingml/2006/main">
             <a:pPr algn="l">
+              <a:buNone/>
               <a:defRPr sz="2400" b="1">
                 <a:solidFill>
                   <a:srgbClr val="C4A7FF"/>
@@ -33930,6 +33529,7 @@
           <a:lstStyle xmlns:a="http://schemas.openxmlformats.org/drawingml/2006/main"/>
           <a:p xmlns:a="http://schemas.openxmlformats.org/drawingml/2006/main">
             <a:pPr algn="l">
+              <a:buNone/>
               <a:defRPr sz="2025" b="0">
                 <a:solidFill>
                   <a:srgbClr val="F4F7FB"/>
@@ -33948,7 +33548,7 @@
                 <a:ea typeface="DejaVu Sans"/>
                 <a:cs typeface="DejaVu Sans"/>
               </a:rPr>
-              <a:t>Покрытия и катализ: качество партии, спектральный отклик</a:t>
+              <a:t>Награда: итоговое качество с затратой и штрафом</a:t>
             </a:r>
           </a:p>
         </p:txBody>
@@ -34049,6 +33649,7 @@
           <a:lstStyle xmlns:a="http://schemas.openxmlformats.org/drawingml/2006/main"/>
           <a:p xmlns:a="http://schemas.openxmlformats.org/drawingml/2006/main">
             <a:pPr algn="ctr">
+              <a:buNone/>
               <a:defRPr sz="1500" b="1">
                 <a:solidFill>
                   <a:srgbClr val="48CAE4"/>
@@ -34067,7 +33668,7 @@
                 <a:ea typeface="DejaVu Sans"/>
                 <a:cs typeface="DejaVu Sans"/>
               </a:rPr>
-              <a:t>Для каждого проекта заново определите единицу наблюдения</a:t>
+              <a:t>Нужны траектории и проверенный симулятор</a:t>
             </a:r>
           </a:p>
         </p:txBody>
@@ -34188,6 +33789,7 @@
           <a:lstStyle xmlns:a="http://schemas.openxmlformats.org/drawingml/2006/main"/>
           <a:p xmlns:a="http://schemas.openxmlformats.org/drawingml/2006/main">
             <a:pPr algn="l">
+              <a:buNone/>
               <a:defRPr sz="1050" b="1">
                 <a:solidFill>
                   <a:srgbClr val="48CAE4"/>
@@ -34245,6 +33847,7 @@
           <a:lstStyle xmlns:a="http://schemas.openxmlformats.org/drawingml/2006/main"/>
           <a:p xmlns:a="http://schemas.openxmlformats.org/drawingml/2006/main">
             <a:pPr algn="l">
+              <a:buNone/>
               <a:defRPr sz="2925" b="1">
                 <a:solidFill>
                   <a:srgbClr val="F4F7FB"/>
@@ -34263,7 +33866,7 @@
                 <a:ea typeface="DejaVu Sans"/>
                 <a:cs typeface="DejaVu Sans"/>
               </a:rPr>
-              <a:t>Контрольные вопросы</a:t>
+              <a:t>Два действия и отложенный результат</a:t>
             </a:r>
           </a:p>
         </p:txBody>
@@ -34332,6 +33935,7 @@
           <a:lstStyle xmlns:a="http://schemas.openxmlformats.org/drawingml/2006/main"/>
           <a:p xmlns:a="http://schemas.openxmlformats.org/drawingml/2006/main">
             <a:pPr algn="l">
+              <a:buNone/>
               <a:defRPr sz="825" b="1">
                 <a:solidFill>
                   <a:srgbClr val="A6B7C9"/>
@@ -34389,6 +33993,7 @@
           <a:lstStyle xmlns:a="http://schemas.openxmlformats.org/drawingml/2006/main"/>
           <a:p xmlns:a="http://schemas.openxmlformats.org/drawingml/2006/main">
             <a:pPr algn="r">
+              <a:buNone/>
               <a:defRPr sz="900" b="0">
                 <a:solidFill>
                   <a:srgbClr val="A6B7C9"/>
@@ -34508,6 +34113,7 @@
           <a:lstStyle xmlns:a="http://schemas.openxmlformats.org/drawingml/2006/main"/>
           <a:p xmlns:a="http://schemas.openxmlformats.org/drawingml/2006/main">
             <a:pPr algn="l">
+              <a:buNone/>
               <a:defRPr sz="2850" b="1">
                 <a:solidFill>
                   <a:srgbClr val="48CAE4"/>
@@ -34565,6 +34171,7 @@
           <a:lstStyle xmlns:a="http://schemas.openxmlformats.org/drawingml/2006/main"/>
           <a:p xmlns:a="http://schemas.openxmlformats.org/drawingml/2006/main">
             <a:pPr algn="l">
+              <a:buNone/>
               <a:defRPr sz="2025" b="1">
                 <a:solidFill>
                   <a:srgbClr val="F4F7FB"/>
@@ -34583,7 +34190,7 @@
                 <a:ea typeface="DejaVu Sans"/>
                 <a:cs typeface="DejaVu Sans"/>
               </a:rPr>
-              <a:t>Чем PLS отличается от PCA?</a:t>
+              <a:t>Быстро: сейчас +3, затем лучший итог −6</a:t>
             </a:r>
           </a:p>
         </p:txBody>
@@ -34684,6 +34291,7 @@
           <a:lstStyle xmlns:a="http://schemas.openxmlformats.org/drawingml/2006/main"/>
           <a:p xmlns:a="http://schemas.openxmlformats.org/drawingml/2006/main">
             <a:pPr algn="l">
+              <a:buNone/>
               <a:defRPr sz="2850" b="1">
                 <a:solidFill>
                   <a:srgbClr val="80ED99"/>
@@ -34741,6 +34349,7 @@
           <a:lstStyle xmlns:a="http://schemas.openxmlformats.org/drawingml/2006/main"/>
           <a:p xmlns:a="http://schemas.openxmlformats.org/drawingml/2006/main">
             <a:pPr algn="l">
+              <a:buNone/>
               <a:defRPr sz="2025" b="0">
                 <a:solidFill>
                   <a:srgbClr val="F4F7FB"/>
@@ -34759,7 +34368,7 @@
                 <a:ea typeface="DejaVu Sans"/>
                 <a:cs typeface="DejaVu Sans"/>
               </a:rPr>
-              <a:t>Когда важность признака не означает механизм?</a:t>
+              <a:t>Плавно: сейчас 0, затем лучший итог +4</a:t>
             </a:r>
           </a:p>
         </p:txBody>
@@ -34860,6 +34469,7 @@
           <a:lstStyle xmlns:a="http://schemas.openxmlformats.org/drawingml/2006/main"/>
           <a:p xmlns:a="http://schemas.openxmlformats.org/drawingml/2006/main">
             <a:pPr algn="l">
+              <a:buNone/>
               <a:defRPr sz="2850" b="1">
                 <a:solidFill>
                   <a:srgbClr val="C4A7FF"/>
@@ -34917,6 +34527,7 @@
           <a:lstStyle xmlns:a="http://schemas.openxmlformats.org/drawingml/2006/main"/>
           <a:p xmlns:a="http://schemas.openxmlformats.org/drawingml/2006/main">
             <a:pPr algn="l">
+              <a:buNone/>
               <a:defRPr sz="2025" b="0">
                 <a:solidFill>
                   <a:srgbClr val="F4F7FB"/>
@@ -34935,7 +34546,7 @@
                 <a:ea typeface="DejaVu Sans"/>
                 <a:cs typeface="DejaVu Sans"/>
               </a:rPr>
-              <a:t>Что именно проверяет новая независимая партия?</a:t>
+              <a:t>При γ = 0,9: Q = −2,4 против +3,6</a:t>
             </a:r>
           </a:p>
         </p:txBody>
@@ -35006,6 +34617,7 @@
           <a:lstStyle xmlns:a="http://schemas.openxmlformats.org/drawingml/2006/main"/>
           <a:p xmlns:a="http://schemas.openxmlformats.org/drawingml/2006/main">
             <a:pPr algn="ctr">
+              <a:buNone/>
               <a:defRPr sz="1500" b="1">
                 <a:solidFill>
                   <a:srgbClr val="48CAE4"/>
@@ -35024,7 +34636,7 @@
                 <a:ea typeface="DejaVu Sans"/>
                 <a:cs typeface="DejaVu Sans"/>
               </a:rPr>
-              <a:t>Ответ соединяет метод с экспериментальным дизайном</a:t>
+              <a:t>Числа условные; это не режим для установки</a:t>
             </a:r>
           </a:p>
         </p:txBody>
@@ -35145,6 +34757,7 @@
           <a:lstStyle xmlns:a="http://schemas.openxmlformats.org/drawingml/2006/main"/>
           <a:p xmlns:a="http://schemas.openxmlformats.org/drawingml/2006/main">
             <a:pPr algn="l">
+              <a:buNone/>
               <a:defRPr sz="1050" b="1">
                 <a:solidFill>
                   <a:srgbClr val="48CAE4"/>
@@ -35202,6 +34815,7 @@
           <a:lstStyle xmlns:a="http://schemas.openxmlformats.org/drawingml/2006/main"/>
           <a:p xmlns:a="http://schemas.openxmlformats.org/drawingml/2006/main">
             <a:pPr algn="l">
+              <a:buNone/>
               <a:defRPr sz="2925" b="1">
                 <a:solidFill>
                   <a:srgbClr val="F4F7FB"/>
@@ -35220,7 +34834,7 @@
                 <a:ea typeface="DejaVu Sans"/>
                 <a:cs typeface="DejaVu Sans"/>
               </a:rPr>
-              <a:t>Итоговая схема</a:t>
+              <a:t>Метод выбирают по задаче и проверке</a:t>
             </a:r>
           </a:p>
         </p:txBody>
@@ -35289,6 +34903,7 @@
           <a:lstStyle xmlns:a="http://schemas.openxmlformats.org/drawingml/2006/main"/>
           <a:p xmlns:a="http://schemas.openxmlformats.org/drawingml/2006/main">
             <a:pPr algn="l">
+              <a:buNone/>
               <a:defRPr sz="825" b="1">
                 <a:solidFill>
                   <a:srgbClr val="A6B7C9"/>
@@ -35346,6 +34961,7 @@
           <a:lstStyle xmlns:a="http://schemas.openxmlformats.org/drawingml/2006/main"/>
           <a:p xmlns:a="http://schemas.openxmlformats.org/drawingml/2006/main">
             <a:pPr algn="r">
+              <a:buNone/>
               <a:defRPr sz="900" b="0">
                 <a:solidFill>
                   <a:srgbClr val="A6B7C9"/>
@@ -35465,6 +35081,7 @@
           <a:lstStyle xmlns:a="http://schemas.openxmlformats.org/drawingml/2006/main"/>
           <a:p xmlns:a="http://schemas.openxmlformats.org/drawingml/2006/main">
             <a:pPr algn="l">
+              <a:buNone/>
               <a:defRPr sz="1875" b="0">
                 <a:solidFill>
                   <a:srgbClr val="F4F7FB"/>
@@ -35483,7 +35100,7 @@
                 <a:ea typeface="DejaVu Sans"/>
                 <a:cs typeface="DejaVu Sans"/>
               </a:rPr>
-              <a:t>Данные → простой baseline → групповая проверка</a:t>
+              <a:t>Ансамбли и сеть сравнивают на одном честном тесте</a:t>
             </a:r>
           </a:p>
         </p:txBody>
@@ -35552,6 +35169,7 @@
           <a:lstStyle xmlns:a="http://schemas.openxmlformats.org/drawingml/2006/main"/>
           <a:p xmlns:a="http://schemas.openxmlformats.org/drawingml/2006/main">
             <a:pPr algn="l">
+              <a:buNone/>
               <a:defRPr sz="1875" b="0">
                 <a:solidFill>
                   <a:srgbClr val="F4F7FB"/>
@@ -35570,7 +35188,7 @@
                 <a:ea typeface="DejaVu Sans"/>
                 <a:cs typeface="DejaVu Sans"/>
               </a:rPr>
-              <a:t>Интерпретация и область применения → рекомендация</a:t>
+              <a:t>Активный выбор предлагает следующий эксперимент</a:t>
             </a:r>
           </a:p>
         </p:txBody>
@@ -35639,6 +35257,7 @@
           <a:lstStyle xmlns:a="http://schemas.openxmlformats.org/drawingml/2006/main"/>
           <a:p xmlns:a="http://schemas.openxmlformats.org/drawingml/2006/main">
             <a:pPr algn="l">
+              <a:buNone/>
               <a:defRPr sz="1875" b="0">
                 <a:solidFill>
                   <a:srgbClr val="F4F7FB"/>
@@ -35657,7 +35276,7 @@
                 <a:ea typeface="DejaVu Sans"/>
                 <a:cs typeface="DejaVu Sans"/>
               </a:rPr>
-              <a:t>Новый опыт → обновление модели и протокола</a:t>
+              <a:t>RL задаёт последовательность действий во времени</a:t>
             </a:r>
           </a:p>
         </p:txBody>
@@ -35696,6 +35315,7 @@
           <a:lstStyle xmlns:a="http://schemas.openxmlformats.org/drawingml/2006/main"/>
           <a:p xmlns:a="http://schemas.openxmlformats.org/drawingml/2006/main">
             <a:pPr algn="l">
+              <a:buNone/>
               <a:defRPr sz="1275" b="1">
                 <a:solidFill>
                   <a:srgbClr val="48CAE4"/>
@@ -35753,6 +35373,7 @@
           <a:lstStyle xmlns:a="http://schemas.openxmlformats.org/drawingml/2006/main"/>
           <a:p xmlns:a="http://schemas.openxmlformats.org/drawingml/2006/main">
             <a:pPr algn="l">
+              <a:buNone/>
               <a:defRPr sz="2025" b="1">
                 <a:solidFill>
                   <a:srgbClr val="F4F7FB"/>
@@ -35771,7 +35392,7 @@
                 <a:ea typeface="DejaVu Sans"/>
                 <a:cs typeface="DejaVu Sans"/>
               </a:rPr>
-              <a:t>Ценность модели измеряется улучшением проверяемого решения</a:t>
+              <a:t>Код и задания по Kaggle — в конспекте и домашней работе</a:t>
             </a:r>
           </a:p>
         </p:txBody>
@@ -35892,6 +35513,7 @@
           <a:lstStyle xmlns:a="http://schemas.openxmlformats.org/drawingml/2006/main"/>
           <a:p xmlns:a="http://schemas.openxmlformats.org/drawingml/2006/main">
             <a:pPr algn="l">
+              <a:buNone/>
               <a:defRPr sz="1050" b="1">
                 <a:solidFill>
                   <a:srgbClr val="48CAE4"/>
@@ -35949,6 +35571,7 @@
           <a:lstStyle xmlns:a="http://schemas.openxmlformats.org/drawingml/2006/main"/>
           <a:p xmlns:a="http://schemas.openxmlformats.org/drawingml/2006/main">
             <a:pPr algn="l">
+              <a:buNone/>
               <a:defRPr sz="2925" b="1">
                 <a:solidFill>
                   <a:srgbClr val="F4F7FB"/>
@@ -36036,6 +35659,7 @@
           <a:lstStyle xmlns:a="http://schemas.openxmlformats.org/drawingml/2006/main"/>
           <a:p xmlns:a="http://schemas.openxmlformats.org/drawingml/2006/main">
             <a:pPr algn="l">
+              <a:buNone/>
               <a:defRPr sz="825" b="1">
                 <a:solidFill>
                   <a:srgbClr val="A6B7C9"/>
@@ -36093,6 +35717,7 @@
           <a:lstStyle xmlns:a="http://schemas.openxmlformats.org/drawingml/2006/main"/>
           <a:p xmlns:a="http://schemas.openxmlformats.org/drawingml/2006/main">
             <a:pPr algn="r">
+              <a:buNone/>
               <a:defRPr sz="900" b="0">
                 <a:solidFill>
                   <a:srgbClr val="A6B7C9"/>
@@ -36212,6 +35837,7 @@
           <a:lstStyle xmlns:a="http://schemas.openxmlformats.org/drawingml/2006/main"/>
           <a:p xmlns:a="http://schemas.openxmlformats.org/drawingml/2006/main">
             <a:pPr algn="l">
+              <a:buNone/>
               <a:defRPr sz="1875" b="0">
                 <a:solidFill>
                   <a:srgbClr val="F4F7FB"/>
@@ -36299,6 +35925,7 @@
           <a:lstStyle xmlns:a="http://schemas.openxmlformats.org/drawingml/2006/main"/>
           <a:p xmlns:a="http://schemas.openxmlformats.org/drawingml/2006/main">
             <a:pPr algn="l">
+              <a:buNone/>
               <a:defRPr sz="1875" b="0">
                 <a:solidFill>
                   <a:srgbClr val="F4F7FB"/>
@@ -36386,6 +36013,7 @@
           <a:lstStyle xmlns:a="http://schemas.openxmlformats.org/drawingml/2006/main"/>
           <a:p xmlns:a="http://schemas.openxmlformats.org/drawingml/2006/main">
             <a:pPr algn="l">
+              <a:buNone/>
               <a:defRPr sz="1875" b="0">
                 <a:solidFill>
                   <a:srgbClr val="F4F7FB"/>
@@ -36443,6 +36071,7 @@
           <a:lstStyle xmlns:a="http://schemas.openxmlformats.org/drawingml/2006/main"/>
           <a:p xmlns:a="http://schemas.openxmlformats.org/drawingml/2006/main">
             <a:pPr algn="l">
+              <a:buNone/>
               <a:defRPr sz="1275" b="1">
                 <a:solidFill>
                   <a:srgbClr val="48CAE4"/>
@@ -36500,6 +36129,7 @@
           <a:lstStyle xmlns:a="http://schemas.openxmlformats.org/drawingml/2006/main"/>
           <a:p xmlns:a="http://schemas.openxmlformats.org/drawingml/2006/main">
             <a:pPr algn="l">
+              <a:buNone/>
               <a:defRPr sz="2025" b="1">
                 <a:solidFill>
                   <a:srgbClr val="F4F7FB"/>
@@ -36639,6 +36269,7 @@
           <a:lstStyle xmlns:a="http://schemas.openxmlformats.org/drawingml/2006/main"/>
           <a:p xmlns:a="http://schemas.openxmlformats.org/drawingml/2006/main">
             <a:pPr algn="l">
+              <a:buNone/>
               <a:defRPr sz="1050" b="1">
                 <a:solidFill>
                   <a:srgbClr val="48CAE4"/>
@@ -36696,6 +36327,7 @@
           <a:lstStyle xmlns:a="http://schemas.openxmlformats.org/drawingml/2006/main"/>
           <a:p xmlns:a="http://schemas.openxmlformats.org/drawingml/2006/main">
             <a:pPr algn="l">
+              <a:buNone/>
               <a:defRPr sz="2925" b="1">
                 <a:solidFill>
                   <a:srgbClr val="F4F7FB"/>
@@ -36783,6 +36415,7 @@
           <a:lstStyle xmlns:a="http://schemas.openxmlformats.org/drawingml/2006/main"/>
           <a:p xmlns:a="http://schemas.openxmlformats.org/drawingml/2006/main">
             <a:pPr algn="l">
+              <a:buNone/>
               <a:defRPr sz="825" b="1">
                 <a:solidFill>
                   <a:srgbClr val="A6B7C9"/>
@@ -36840,6 +36473,7 @@
           <a:lstStyle xmlns:a="http://schemas.openxmlformats.org/drawingml/2006/main"/>
           <a:p xmlns:a="http://schemas.openxmlformats.org/drawingml/2006/main">
             <a:pPr algn="r">
+              <a:buNone/>
               <a:defRPr sz="900" b="0">
                 <a:solidFill>
                   <a:srgbClr val="A6B7C9"/>
@@ -36959,6 +36593,7 @@
           <a:lstStyle xmlns:a="http://schemas.openxmlformats.org/drawingml/2006/main"/>
           <a:p xmlns:a="http://schemas.openxmlformats.org/drawingml/2006/main">
             <a:pPr algn="l">
+              <a:buNone/>
               <a:defRPr sz="2025" b="1">
                 <a:solidFill>
                   <a:srgbClr val="F4F7FB"/>
@@ -36977,7 +36612,7 @@
                 <a:ea typeface="DejaVu Sans"/>
                 <a:cs typeface="DejaVu Sans"/>
               </a:rPr>
-              <a:t>scikit-learn: linear_model и cross_decomposition</a:t>
+              <a:t>scikit-learn: PLS, ensembles и MLP</a:t>
             </a:r>
           </a:p>
         </p:txBody>
@@ -37078,6 +36713,7 @@
           <a:lstStyle xmlns:a="http://schemas.openxmlformats.org/drawingml/2006/main"/>
           <a:p xmlns:a="http://schemas.openxmlformats.org/drawingml/2006/main">
             <a:pPr algn="l">
+              <a:buNone/>
               <a:defRPr sz="2025" b="0">
                 <a:solidFill>
                   <a:srgbClr val="F4F7FB"/>
@@ -37096,7 +36732,7 @@
                 <a:ea typeface="DejaVu Sans"/>
                 <a:cs typeface="DejaVu Sans"/>
               </a:rPr>
-              <a:t>scikit-learn: decomposition, clustering, inspection</a:t>
+              <a:t>Kaggle: pH-recognition; Lipophilicity notebook</a:t>
             </a:r>
           </a:p>
         </p:txBody>
@@ -37197,6 +36833,7 @@
           <a:lstStyle xmlns:a="http://schemas.openxmlformats.org/drawingml/2006/main"/>
           <a:p xmlns:a="http://schemas.openxmlformats.org/drawingml/2006/main">
             <a:pPr algn="l">
+              <a:buNone/>
               <a:defRPr sz="2025" b="0">
                 <a:solidFill>
                   <a:srgbClr val="F4F7FB"/>
@@ -37215,7 +36852,7 @@
                 <a:ea typeface="DejaVu Sans"/>
                 <a:cs typeface="DejaVu Sans"/>
               </a:rPr>
-              <a:t>Конспект 12: код PLS и предметные ограничения</a:t>
+              <a:t>MoleculeNet: исходная задача log D</a:t>
             </a:r>
           </a:p>
         </p:txBody>
@@ -37286,6 +36923,7 @@
           <a:lstStyle xmlns:a="http://schemas.openxmlformats.org/drawingml/2006/main"/>
           <a:p xmlns:a="http://schemas.openxmlformats.org/drawingml/2006/main">
             <a:pPr algn="ctr">
+              <a:buNone/>
               <a:defRPr sz="1500" b="1">
                 <a:solidFill>
                   <a:srgbClr val="48CAE4"/>
@@ -37304,7 +36942,7 @@
                 <a:ea typeface="DejaVu Sans"/>
                 <a:cs typeface="DejaVu Sans"/>
               </a:rPr>
-              <a:t>Ссылки и воспроизводимый пример — в Markdown-конспекте</a:t>
+              <a:t>Подробности и задания — в конспекте лекции 12</a:t>
             </a:r>
           </a:p>
         </p:txBody>
@@ -37425,6 +37063,7 @@
           <a:lstStyle xmlns:a="http://schemas.openxmlformats.org/drawingml/2006/main"/>
           <a:p xmlns:a="http://schemas.openxmlformats.org/drawingml/2006/main">
             <a:pPr algn="l">
+              <a:buNone/>
               <a:defRPr sz="1050" b="1">
                 <a:solidFill>
                   <a:srgbClr val="48CAE4"/>
@@ -37482,6 +37121,7 @@
           <a:lstStyle xmlns:a="http://schemas.openxmlformats.org/drawingml/2006/main"/>
           <a:p xmlns:a="http://schemas.openxmlformats.org/drawingml/2006/main">
             <a:pPr algn="l">
+              <a:buNone/>
               <a:defRPr sz="2925" b="1">
                 <a:solidFill>
                   <a:srgbClr val="F4F7FB"/>
@@ -37569,6 +37209,7 @@
           <a:lstStyle xmlns:a="http://schemas.openxmlformats.org/drawingml/2006/main"/>
           <a:p xmlns:a="http://schemas.openxmlformats.org/drawingml/2006/main">
             <a:pPr algn="l">
+              <a:buNone/>
               <a:defRPr sz="825" b="1">
                 <a:solidFill>
                   <a:srgbClr val="A6B7C9"/>
@@ -37626,6 +37267,7 @@
           <a:lstStyle xmlns:a="http://schemas.openxmlformats.org/drawingml/2006/main"/>
           <a:p xmlns:a="http://schemas.openxmlformats.org/drawingml/2006/main">
             <a:pPr algn="r">
+              <a:buNone/>
               <a:defRPr sz="900" b="0">
                 <a:solidFill>
                   <a:srgbClr val="A6B7C9"/>
@@ -37745,6 +37387,7 @@
           <a:lstStyle xmlns:a="http://schemas.openxmlformats.org/drawingml/2006/main"/>
           <a:p xmlns:a="http://schemas.openxmlformats.org/drawingml/2006/main">
             <a:pPr algn="l">
+              <a:buNone/>
               <a:defRPr sz="2025" b="1">
                 <a:solidFill>
                   <a:srgbClr val="F4F7FB"/>
@@ -37864,6 +37507,7 @@
           <a:lstStyle xmlns:a="http://schemas.openxmlformats.org/drawingml/2006/main"/>
           <a:p xmlns:a="http://schemas.openxmlformats.org/drawingml/2006/main">
             <a:pPr algn="l">
+              <a:buNone/>
               <a:defRPr sz="2025" b="0">
                 <a:solidFill>
                   <a:srgbClr val="F4F7FB"/>
@@ -37983,6 +37627,7 @@
           <a:lstStyle xmlns:a="http://schemas.openxmlformats.org/drawingml/2006/main"/>
           <a:p xmlns:a="http://schemas.openxmlformats.org/drawingml/2006/main">
             <a:pPr algn="l">
+              <a:buNone/>
               <a:defRPr sz="2025" b="0">
                 <a:solidFill>
                   <a:srgbClr val="F4F7FB"/>
@@ -38072,6 +37717,7 @@
           <a:lstStyle xmlns:a="http://schemas.openxmlformats.org/drawingml/2006/main"/>
           <a:p xmlns:a="http://schemas.openxmlformats.org/drawingml/2006/main">
             <a:pPr algn="ctr">
+              <a:buNone/>
               <a:defRPr sz="1500" b="1">
                 <a:solidFill>
                   <a:srgbClr val="48CAE4"/>
@@ -38211,6 +37857,7 @@
           <a:lstStyle xmlns:a="http://schemas.openxmlformats.org/drawingml/2006/main"/>
           <a:p xmlns:a="http://schemas.openxmlformats.org/drawingml/2006/main">
             <a:pPr algn="l">
+              <a:buNone/>
               <a:defRPr sz="1050" b="1">
                 <a:solidFill>
                   <a:srgbClr val="48CAE4"/>
@@ -38268,6 +37915,7 @@
           <a:lstStyle xmlns:a="http://schemas.openxmlformats.org/drawingml/2006/main"/>
           <a:p xmlns:a="http://schemas.openxmlformats.org/drawingml/2006/main">
             <a:pPr algn="l">
+              <a:buNone/>
               <a:defRPr sz="2925" b="1">
                 <a:solidFill>
                   <a:srgbClr val="F4F7FB"/>
@@ -38355,6 +38003,7 @@
           <a:lstStyle xmlns:a="http://schemas.openxmlformats.org/drawingml/2006/main"/>
           <a:p xmlns:a="http://schemas.openxmlformats.org/drawingml/2006/main">
             <a:pPr algn="l">
+              <a:buNone/>
               <a:defRPr sz="825" b="1">
                 <a:solidFill>
                   <a:srgbClr val="A6B7C9"/>
@@ -38412,6 +38061,7 @@
           <a:lstStyle xmlns:a="http://schemas.openxmlformats.org/drawingml/2006/main"/>
           <a:p xmlns:a="http://schemas.openxmlformats.org/drawingml/2006/main">
             <a:pPr algn="r">
+              <a:buNone/>
               <a:defRPr sz="900" b="0">
                 <a:solidFill>
                   <a:srgbClr val="A6B7C9"/>
@@ -38469,6 +38119,7 @@
           <a:lstStyle xmlns:a="http://schemas.openxmlformats.org/drawingml/2006/main"/>
           <a:p xmlns:a="http://schemas.openxmlformats.org/drawingml/2006/main">
             <a:pPr algn="l">
+              <a:buNone/>
               <a:defRPr sz="3825" b="1">
                 <a:solidFill>
                   <a:srgbClr val="48CAE4"/>
@@ -38556,6 +38207,7 @@
           <a:lstStyle xmlns:a="http://schemas.openxmlformats.org/drawingml/2006/main"/>
           <a:p xmlns:a="http://schemas.openxmlformats.org/drawingml/2006/main">
             <a:pPr algn="l">
+              <a:buNone/>
               <a:defRPr sz="1875" b="1">
                 <a:solidFill>
                   <a:srgbClr val="F4F7FB"/>
@@ -38613,6 +38265,7 @@
           <a:lstStyle xmlns:a="http://schemas.openxmlformats.org/drawingml/2006/main"/>
           <a:p xmlns:a="http://schemas.openxmlformats.org/drawingml/2006/main">
             <a:pPr algn="l">
+              <a:buNone/>
               <a:defRPr sz="3825" b="1">
                 <a:solidFill>
                   <a:srgbClr val="80ED99"/>
@@ -38700,6 +38353,7 @@
           <a:lstStyle xmlns:a="http://schemas.openxmlformats.org/drawingml/2006/main"/>
           <a:p xmlns:a="http://schemas.openxmlformats.org/drawingml/2006/main">
             <a:pPr algn="l">
+              <a:buNone/>
               <a:defRPr sz="1875" b="0">
                 <a:solidFill>
                   <a:srgbClr val="F4F7FB"/>
@@ -38757,6 +38411,7 @@
           <a:lstStyle xmlns:a="http://schemas.openxmlformats.org/drawingml/2006/main"/>
           <a:p xmlns:a="http://schemas.openxmlformats.org/drawingml/2006/main">
             <a:pPr algn="l">
+              <a:buNone/>
               <a:defRPr sz="3825" b="1">
                 <a:solidFill>
                   <a:srgbClr val="C4A7FF"/>
@@ -38844,6 +38499,7 @@
           <a:lstStyle xmlns:a="http://schemas.openxmlformats.org/drawingml/2006/main"/>
           <a:p xmlns:a="http://schemas.openxmlformats.org/drawingml/2006/main">
             <a:pPr algn="l">
+              <a:buNone/>
               <a:defRPr sz="1875" b="0">
                 <a:solidFill>
                   <a:srgbClr val="F4F7FB"/>
@@ -38933,6 +38589,7 @@
           <a:lstStyle xmlns:a="http://schemas.openxmlformats.org/drawingml/2006/main"/>
           <a:p xmlns:a="http://schemas.openxmlformats.org/drawingml/2006/main">
             <a:pPr algn="ctr">
+              <a:buNone/>
               <a:defRPr sz="1500" b="1">
                 <a:solidFill>
                   <a:srgbClr val="48CAE4"/>
@@ -39072,6 +38729,7 @@
           <a:lstStyle xmlns:a="http://schemas.openxmlformats.org/drawingml/2006/main"/>
           <a:p xmlns:a="http://schemas.openxmlformats.org/drawingml/2006/main">
             <a:pPr algn="l">
+              <a:buNone/>
               <a:defRPr sz="1050" b="1">
                 <a:solidFill>
                   <a:srgbClr val="48CAE4"/>
@@ -39129,6 +38787,7 @@
           <a:lstStyle xmlns:a="http://schemas.openxmlformats.org/drawingml/2006/main"/>
           <a:p xmlns:a="http://schemas.openxmlformats.org/drawingml/2006/main">
             <a:pPr algn="l">
+              <a:buNone/>
               <a:defRPr sz="2925" b="1">
                 <a:solidFill>
                   <a:srgbClr val="F4F7FB"/>
@@ -39216,6 +38875,7 @@
           <a:lstStyle xmlns:a="http://schemas.openxmlformats.org/drawingml/2006/main"/>
           <a:p xmlns:a="http://schemas.openxmlformats.org/drawingml/2006/main">
             <a:pPr algn="l">
+              <a:buNone/>
               <a:defRPr sz="825" b="1">
                 <a:solidFill>
                   <a:srgbClr val="A6B7C9"/>
@@ -39273,6 +38933,7 @@
           <a:lstStyle xmlns:a="http://schemas.openxmlformats.org/drawingml/2006/main"/>
           <a:p xmlns:a="http://schemas.openxmlformats.org/drawingml/2006/main">
             <a:pPr algn="r">
+              <a:buNone/>
               <a:defRPr sz="900" b="0">
                 <a:solidFill>
                   <a:srgbClr val="A6B7C9"/>
@@ -39330,6 +38991,7 @@
           <a:lstStyle xmlns:a="http://schemas.openxmlformats.org/drawingml/2006/main"/>
           <a:p xmlns:a="http://schemas.openxmlformats.org/drawingml/2006/main">
             <a:pPr algn="l">
+              <a:buNone/>
               <a:defRPr sz="2400" b="1">
                 <a:solidFill>
                   <a:srgbClr val="48CAE4"/>
@@ -39387,6 +39049,7 @@
           <a:lstStyle xmlns:a="http://schemas.openxmlformats.org/drawingml/2006/main"/>
           <a:p xmlns:a="http://schemas.openxmlformats.org/drawingml/2006/main">
             <a:pPr algn="l">
+              <a:buNone/>
               <a:defRPr sz="2025" b="1">
                 <a:solidFill>
                   <a:srgbClr val="F4F7FB"/>
@@ -39474,6 +39137,7 @@
           <a:lstStyle xmlns:a="http://schemas.openxmlformats.org/drawingml/2006/main"/>
           <a:p xmlns:a="http://schemas.openxmlformats.org/drawingml/2006/main">
             <a:pPr algn="l">
+              <a:buNone/>
               <a:defRPr sz="2400" b="1">
                 <a:solidFill>
                   <a:srgbClr val="80ED99"/>
@@ -39531,6 +39195,7 @@
           <a:lstStyle xmlns:a="http://schemas.openxmlformats.org/drawingml/2006/main"/>
           <a:p xmlns:a="http://schemas.openxmlformats.org/drawingml/2006/main">
             <a:pPr algn="l">
+              <a:buNone/>
               <a:defRPr sz="2025" b="0">
                 <a:solidFill>
                   <a:srgbClr val="F4F7FB"/>
@@ -39618,6 +39283,7 @@
           <a:lstStyle xmlns:a="http://schemas.openxmlformats.org/drawingml/2006/main"/>
           <a:p xmlns:a="http://schemas.openxmlformats.org/drawingml/2006/main">
             <a:pPr algn="l">
+              <a:buNone/>
               <a:defRPr sz="2400" b="1">
                 <a:solidFill>
                   <a:srgbClr val="C4A7FF"/>
@@ -39675,6 +39341,7 @@
           <a:lstStyle xmlns:a="http://schemas.openxmlformats.org/drawingml/2006/main"/>
           <a:p xmlns:a="http://schemas.openxmlformats.org/drawingml/2006/main">
             <a:pPr algn="l">
+              <a:buNone/>
               <a:defRPr sz="2025" b="0">
                 <a:solidFill>
                   <a:srgbClr val="F4F7FB"/>
@@ -39794,6 +39461,7 @@
           <a:lstStyle xmlns:a="http://schemas.openxmlformats.org/drawingml/2006/main"/>
           <a:p xmlns:a="http://schemas.openxmlformats.org/drawingml/2006/main">
             <a:pPr algn="ctr">
+              <a:buNone/>
               <a:defRPr sz="1500" b="1">
                 <a:solidFill>
                   <a:srgbClr val="48CAE4"/>
@@ -39933,6 +39601,7 @@
           <a:lstStyle xmlns:a="http://schemas.openxmlformats.org/drawingml/2006/main"/>
           <a:p xmlns:a="http://schemas.openxmlformats.org/drawingml/2006/main">
             <a:pPr algn="l">
+              <a:buNone/>
               <a:defRPr sz="1050" b="1">
                 <a:solidFill>
                   <a:srgbClr val="48CAE4"/>
@@ -39990,6 +39659,7 @@
           <a:lstStyle xmlns:a="http://schemas.openxmlformats.org/drawingml/2006/main"/>
           <a:p xmlns:a="http://schemas.openxmlformats.org/drawingml/2006/main">
             <a:pPr algn="l">
+              <a:buNone/>
               <a:defRPr sz="2925" b="1">
                 <a:solidFill>
                   <a:srgbClr val="F4F7FB"/>
@@ -40077,6 +39747,7 @@
           <a:lstStyle xmlns:a="http://schemas.openxmlformats.org/drawingml/2006/main"/>
           <a:p xmlns:a="http://schemas.openxmlformats.org/drawingml/2006/main">
             <a:pPr algn="l">
+              <a:buNone/>
               <a:defRPr sz="825" b="1">
                 <a:solidFill>
                   <a:srgbClr val="A6B7C9"/>
@@ -40134,6 +39805,7 @@
           <a:lstStyle xmlns:a="http://schemas.openxmlformats.org/drawingml/2006/main"/>
           <a:p xmlns:a="http://schemas.openxmlformats.org/drawingml/2006/main">
             <a:pPr algn="r">
+              <a:buNone/>
               <a:defRPr sz="900" b="0">
                 <a:solidFill>
                   <a:srgbClr val="A6B7C9"/>
@@ -40253,6 +39925,7 @@
           <a:lstStyle xmlns:a="http://schemas.openxmlformats.org/drawingml/2006/main"/>
           <a:p xmlns:a="http://schemas.openxmlformats.org/drawingml/2006/main">
             <a:pPr algn="l">
+              <a:buNone/>
               <a:defRPr sz="2850" b="1">
                 <a:solidFill>
                   <a:srgbClr val="48CAE4"/>
@@ -40310,6 +39983,7 @@
           <a:lstStyle xmlns:a="http://schemas.openxmlformats.org/drawingml/2006/main"/>
           <a:p xmlns:a="http://schemas.openxmlformats.org/drawingml/2006/main">
             <a:pPr algn="l">
+              <a:buNone/>
               <a:defRPr sz="2025" b="1">
                 <a:solidFill>
                   <a:srgbClr val="F4F7FB"/>
@@ -40429,6 +40103,7 @@
           <a:lstStyle xmlns:a="http://schemas.openxmlformats.org/drawingml/2006/main"/>
           <a:p xmlns:a="http://schemas.openxmlformats.org/drawingml/2006/main">
             <a:pPr algn="l">
+              <a:buNone/>
               <a:defRPr sz="2850" b="1">
                 <a:solidFill>
                   <a:srgbClr val="80ED99"/>
@@ -40486,6 +40161,7 @@
           <a:lstStyle xmlns:a="http://schemas.openxmlformats.org/drawingml/2006/main"/>
           <a:p xmlns:a="http://schemas.openxmlformats.org/drawingml/2006/main">
             <a:pPr algn="l">
+              <a:buNone/>
               <a:defRPr sz="2025" b="0">
                 <a:solidFill>
                   <a:srgbClr val="F4F7FB"/>
@@ -40605,6 +40281,7 @@
           <a:lstStyle xmlns:a="http://schemas.openxmlformats.org/drawingml/2006/main"/>
           <a:p xmlns:a="http://schemas.openxmlformats.org/drawingml/2006/main">
             <a:pPr algn="l">
+              <a:buNone/>
               <a:defRPr sz="2850" b="1">
                 <a:solidFill>
                   <a:srgbClr val="C4A7FF"/>
@@ -40662,6 +40339,7 @@
           <a:lstStyle xmlns:a="http://schemas.openxmlformats.org/drawingml/2006/main"/>
           <a:p xmlns:a="http://schemas.openxmlformats.org/drawingml/2006/main">
             <a:pPr algn="l">
+              <a:buNone/>
               <a:defRPr sz="2025" b="0">
                 <a:solidFill>
                   <a:srgbClr val="F4F7FB"/>
@@ -40751,6 +40429,7 @@
           <a:lstStyle xmlns:a="http://schemas.openxmlformats.org/drawingml/2006/main"/>
           <a:p xmlns:a="http://schemas.openxmlformats.org/drawingml/2006/main">
             <a:pPr algn="ctr">
+              <a:buNone/>
               <a:defRPr sz="1500" b="1">
                 <a:solidFill>
                   <a:srgbClr val="48CAE4"/>
@@ -40890,6 +40569,7 @@
           <a:lstStyle xmlns:a="http://schemas.openxmlformats.org/drawingml/2006/main"/>
           <a:p xmlns:a="http://schemas.openxmlformats.org/drawingml/2006/main">
             <a:pPr algn="l">
+              <a:buNone/>
               <a:defRPr sz="1050" b="1">
                 <a:solidFill>
                   <a:srgbClr val="48CAE4"/>
@@ -40947,6 +40627,7 @@
           <a:lstStyle xmlns:a="http://schemas.openxmlformats.org/drawingml/2006/main"/>
           <a:p xmlns:a="http://schemas.openxmlformats.org/drawingml/2006/main">
             <a:pPr algn="l">
+              <a:buNone/>
               <a:defRPr sz="2925" b="1">
                 <a:solidFill>
                   <a:srgbClr val="F4F7FB"/>
@@ -41034,6 +40715,7 @@
           <a:lstStyle xmlns:a="http://schemas.openxmlformats.org/drawingml/2006/main"/>
           <a:p xmlns:a="http://schemas.openxmlformats.org/drawingml/2006/main">
             <a:pPr algn="l">
+              <a:buNone/>
               <a:defRPr sz="825" b="1">
                 <a:solidFill>
                   <a:srgbClr val="A6B7C9"/>
@@ -41091,6 +40773,7 @@
           <a:lstStyle xmlns:a="http://schemas.openxmlformats.org/drawingml/2006/main"/>
           <a:p xmlns:a="http://schemas.openxmlformats.org/drawingml/2006/main">
             <a:pPr algn="r">
+              <a:buNone/>
               <a:defRPr sz="900" b="0">
                 <a:solidFill>
                   <a:srgbClr val="A6B7C9"/>
@@ -41178,6 +40861,7 @@
           <a:lstStyle xmlns:a="http://schemas.openxmlformats.org/drawingml/2006/main"/>
           <a:p xmlns:a="http://schemas.openxmlformats.org/drawingml/2006/main">
             <a:pPr algn="l">
+              <a:buNone/>
               <a:defRPr sz="1800" b="1">
                 <a:solidFill>
                   <a:srgbClr val="F4F7FB"/>
@@ -41265,6 +40949,7 @@
           <a:lstStyle xmlns:a="http://schemas.openxmlformats.org/drawingml/2006/main"/>
           <a:p xmlns:a="http://schemas.openxmlformats.org/drawingml/2006/main">
             <a:pPr algn="l">
+              <a:buNone/>
               <a:defRPr sz="1800" b="0">
                 <a:solidFill>
                   <a:srgbClr val="F4F7FB"/>
@@ -41352,6 +41037,7 @@
           <a:lstStyle xmlns:a="http://schemas.openxmlformats.org/drawingml/2006/main"/>
           <a:p xmlns:a="http://schemas.openxmlformats.org/drawingml/2006/main">
             <a:pPr algn="l">
+              <a:buNone/>
               <a:defRPr sz="1800" b="0">
                 <a:solidFill>
                   <a:srgbClr val="F4F7FB"/>
@@ -42281,6 +41967,7 @@
           <a:lstStyle xmlns:a="http://schemas.openxmlformats.org/drawingml/2006/main"/>
           <a:p xmlns:a="http://schemas.openxmlformats.org/drawingml/2006/main">
             <a:pPr algn="ctr">
+              <a:buNone/>
               <a:defRPr sz="1275" b="1">
                 <a:solidFill>
                   <a:srgbClr val="F4F7FB"/>
